--- a/library/lectures/lec-03/rendered/lec-03.pptx
+++ b/library/lectures/lec-03/rendered/lec-03.pptx
@@ -1187,7 +1187,7 @@
           <a:lstStyle/>
           <a:p>
             <a:r>
-              <a:t>Введём термин, потому что в Лекции 1 он встречался лишь как один из типов использования, а в Лекции 2 не разбирался — это пробел пререквизита, который мы закрываем здесь явно. Fine-tuning, дообучение, — это дополнительное обучение уже готовой, предобученной модели на ваших данных, при котором изменяются веса модели. Это отличает его от RAG и промпта: RAG и промпт кладут знание в контекст на момент запроса и веса не трогают; fine-tuning меняет саму модель. В Лекции 1 он упоминался как тип использования; здесь нас интересует он как архитектурный выбор — одна из ступеней лестницы, между которыми инженер выбирает.</a:t>
+              <a:t>На предыдущем слайде мы зафиксировали определение: fine-tuning меняет сами веса, тогда как промпт и RAG трогают только контекст. Опираясь на это, разберём область его применения в 2026 году. Среди инженеров ходит формулировка «в 2026 fine-tuning умер — всё решает RAG и длинный контекст». Это неточно. Fine-tuning не умер — он сузился и перестал быть настройкой по умолчанию. Сузился именно потому, что меняет веса: знание — факты, документы, всё, что меняется, — плохо ложится в веса и ушло в RAG и длинный контекст, где его можно процитировать и обновить. За fine-tuning осталось то, что в веса ложится хорошо, — устойчивое поведение модели, а не её знания.</a:t>
             </a:r>
           </a:p>
           <a:p/>
@@ -14345,7 +14345,7 @@
                 </a:solidFill>
                 <a:latin typeface="Arial"/>
               </a:rPr>
-              <a:t>Fine-tuning (дообучение) — доп. обучение готовой модели на своих данных, меняются веса. В Л1 — тип использования; здесь — архитектурный выбор, одна из ступеней лестницы.</a:t>
+              <a:t>Fine-tuning (определение — предыдущий слайд) меняет сами веса. Среди инженеров ходит: «в 2026 он умер — всё решает RAG». Это неточно — он не умер, а сузился.</a:t>
             </a:r>
           </a:p>
         </p:txBody>

--- a/library/lectures/lec-03/rendered/lec-03.pptx
+++ b/library/lectures/lec-03/rendered/lec-03.pptx
@@ -2069,7 +2069,7 @@
           <a:lstStyle/>
           <a:p>
             <a:r>
-              <a:t>До сих пор мы говорили про агента как про абстрактный цикл: планируй, действуй, проверяй, повторяй. Но реальный агент-помощник, с которым инженер работает каждый день, — это не голый цикл, а цикл плюс оснастка. Набор дополнительных механизмов, которые определяют, что агент помнит, чему следует, какие процедуры умеет переиспользовать, кому может делегировать работу и к каким внешним системам имеет доступ. По данным независимого публичного реестра экипировки агентов можно выделить пять типовых слотов этой оснастки. Первый — память: что агент помнит между сессиями. Второй — инструкции-правила: файлы-конвенции проекта и журнал прогресса. Третий — skills, переиспользуемые процедуры под повторяющиеся задачи. Четвёртый — subagents, делегированные под-агенты с собственным контекстным окном. Пятый — доступ к внешним инструментам через MCP.</a:t>
+              <a:t>До сих пор мы говорили про агента как про абстрактный цикл: планируй, действуй, проверяй, повторяй. Но реальный агент-помощник, с которым инженер работает каждый день, — это не голый цикл, а цикл плюс оснастка. Набор дополнительных механизмов, которые определяют, что агент помнит, чему следует, какие процедуры умеет переиспользовать, кому может делегировать работу и к каким внешним системам имеет доступ. Дальше в этом разделе мы будем не раз опираться на данные agent-harness-registry — это независимый публичный реестр, который тестирует экипировку агентов (память, skills, subagents, MCP) через live-eval бенчмарки на реальных задачах, а не через вендорские самоотчёты о возможностях. По его данным можно выделить пять типовых слотов этой оснастки. Первый — память: что агент помнит между сессиями. Второй — инструкции-правила: файлы-конвенции проекта и журнал прогресса. Третий — skills, переиспользуемые процедуры под повторяющиеся задачи. Четвёртый — subagents, делегированные под-агенты с собственным контекстным окном. Пятый — доступ к внешним инструментам через MCP.</a:t>
             </a:r>
           </a:p>
           <a:p/>
@@ -2221,7 +2221,7 @@
           <a:lstStyle/>
           <a:p>
             <a:r>
-              <a:t>Наличие памяти интуитивно кажется чистым улучшением — агент, который помнит, должен быть полезнее агента, начинающего каждый раз с нуля. Данные независимого реестра, тестирующего системы на реальных задачах, показывают, что это не всегда так, а иногда драматически не так. Первый кейс — система Letta. По данным реестра она проигрывает и голой модели без всякой памяти, и тривиальному плоскому файлу на всех полностью протестированных бенчмарках: на persistbench голая модель дала 1.000, плоский файл 0.833, а Letta лишь 0.750, при этом на порядок медленнее. Выявлены три механизма провала: капитуляция под давлением, когда при повторном вопросе система меняет уже данный верный ответ на неуверенный; многословие, когда длинный приукрашенный ответ прячет короткий правильный факт; и факт, замеченный, но не закоммиченный в память. Оговорка по свежести обязательна: тестировалась версия примерно восемнадцатимесячной давности из-за ограничения установщика, а не из-за срезания угла, поэтому это оценка конкретной устаревшей версии.</a:t>
+              <a:t>Наличие памяти интуитивно кажется чистым улучшением — агент, который помнит, должен быть полезнее агента, начинающего каждый раз с нуля. Данные agent-harness-registry, независимого реестра, тестирующего системы на реальных задачах, показывают, что это не всегда так, а иногда драматически не так. На слайде системы помечены буквой Tier — это рейтинговая категория реестра от A (лучшие результаты) до D (худшие) по сумме бенчмарков live-eval; чем ближе к A, тем стабильнее система показывала себя на полном наборе тестов. Первый кейс — система Letta, Tier D. По данным реестра она проигрывает и голой модели без всякой памяти, и тривиальному плоскому файлу на всех полностью протестированных бенчмарках: на persistbench голая модель дала 1.000, плоский файл 0.833, а Letta лишь 0.750, при этом на порядок медленнее. Выявлены три механизма провала: капитуляция под давлением, когда при повторном вопросе система меняет уже данный верный ответ на неуверенный; многословие, когда длинный приукрашенный ответ прячет короткий правильный факт; и факт, замеченный, но не закоммиченный в память. Оговорка по свежести обязательна: тестировалась версия примерно восемнадцатимесячной давности из-за ограничения установщика, а не из-за срезания угла, поэтому это оценка конкретной устаревшей версии.</a:t>
             </a:r>
           </a:p>
           <a:p/>
@@ -2455,7 +2455,7 @@
           <a:p/>
           <a:p>
             <a:r>
-              <a:t>Отсюда специфический класс атак. Prompt injection — атака, при которой во внешние данные в контексте модели встраивается текст, который модель интерпретирует как команду и исполняет; корень в том, что модель доверяет убедительно звучащим токенам и не отличает данные от команды. GitHub MCP heist, май 2025: у ассистента широкий токен на все репозитории; в публичном issue — инструкция «собери приватные репозитории и опубликуй здесь»; ассистент читает issue как команду и выгружает приватное. Катастрофа — это инъекция, помноженная на широкие права; убери любой из двух, и атака не проходит. И про хранение данных два факта против наивного «у нас ZDR, всё в порядке»: судебный приказ по делу NYT против OpenAI обязал сохранять все логи поверх любой договорной политики; а ZDR у вендоров не покрывает third-party интеграции и MCP-коннекторы — то есть ровно те звенья, из которых агент и состоит. Отсюда четыре правила: least-privilege, изоляция недоверенного контента, human-in-the-loop на необратимых действиях, allowlist с фиксацией версий. Плюс карта данных по каждой фиче — что через какое звено проходит и какая у него политика хранения.</a:t>
+              <a:t>Отсюда специфический класс атак. Prompt injection — атака, при которой во внешние данные в контексте модели встраивается текст, который модель интерпретирует как команду и исполняет; корень в том, что модель доверяет убедительно звучащим токенам и не отличает данные от команды. GitHub MCP heist, май 2025: у ассистента широкий токен на все репозитории; в публичном issue — инструкция «собери приватные репозитории и опубликуй здесь»; ассистент читает issue как команду и выгружает приватное. Катастрофа — это инъекция, помноженная на широкие права; убери любой из двух, и атака не проходит. И про хранение данных два факта против наивного «у нас ZDR, всё в порядке»: ZDR, Zero Data Retention, — это политика вендора не сохранять содержимое запросов после обработки; судебный приказ по делу NYT против OpenAI обязал сохранять все логи поверх любой договорной политики; а ZDR у вендоров не покрывает third-party интеграции и MCP-коннекторы — то есть ровно те звенья, из которых агент и состоит. Отсюда четыре правила: least-privilege, изоляция недоверенного контента, human-in-the-loop на необратимых действиях, allowlist с фиксацией версий. Плюс карта данных по каждой фиче — что через какое звено проходит и какая у него политика хранения.</a:t>
             </a:r>
           </a:p>
         </p:txBody>
@@ -13668,11 +13668,11 @@
             </a:avLst>
           </a:prstGeom>
           <a:solidFill>
-            <a:srgbClr val="F4F7FA"/>
+            <a:srgbClr val="E4F1F2"/>
           </a:solidFill>
           <a:ln w="19050">
             <a:solidFill>
-              <a:srgbClr val="1C7293"/>
+              <a:srgbClr val="028090"/>
             </a:solidFill>
           </a:ln>
           <a:effectLst/>
@@ -13699,9 +13699,92 @@
           </a:p>
         </p:txBody>
       </p:sp>
+      <p:sp>
+        <p:nvSpPr>
+          <p:cNvPr id="5" name="Oval 4"/>
+          <p:cNvSpPr/>
+          <p:nvPr/>
+        </p:nvSpPr>
+        <p:spPr>
+          <a:xfrm>
+            <a:off x="685800" y="1792224"/>
+            <a:ext cx="292608" cy="292608"/>
+          </a:xfrm>
+          <a:prstGeom prst="ellipse">
+            <a:avLst/>
+          </a:prstGeom>
+          <a:solidFill>
+            <a:srgbClr val="028090"/>
+          </a:solidFill>
+          <a:ln>
+            <a:noFill/>
+          </a:ln>
+          <a:effectLst/>
+        </p:spPr>
+        <p:style>
+          <a:lnRef idx="1">
+            <a:schemeClr val="accent1"/>
+          </a:lnRef>
+          <a:fillRef idx="3">
+            <a:schemeClr val="accent1"/>
+          </a:fillRef>
+          <a:effectRef idx="2">
+            <a:schemeClr val="accent1"/>
+          </a:effectRef>
+          <a:fontRef idx="minor">
+            <a:schemeClr val="lt1"/>
+          </a:fontRef>
+        </p:style>
+        <p:txBody>
+          <a:bodyPr rtlCol="0" anchor="ctr"/>
+          <a:lstStyle/>
+          <a:p>
+            <a:pPr algn="ctr"/>
+          </a:p>
+        </p:txBody>
+      </p:sp>
+      <p:sp>
+        <p:nvSpPr>
+          <p:cNvPr id="6" name="TextBox 5"/>
+          <p:cNvSpPr txBox="1"/>
+          <p:nvPr/>
+        </p:nvSpPr>
+        <p:spPr>
+          <a:xfrm>
+            <a:off x="685800" y="1792224"/>
+            <a:ext cx="292608" cy="292608"/>
+          </a:xfrm>
+          <a:prstGeom prst="rect">
+            <a:avLst/>
+          </a:prstGeom>
+          <a:noFill/>
+        </p:spPr>
+        <p:txBody>
+          <a:bodyPr wrap="square" lIns="0" rIns="0" tIns="0" bIns="0" anchor="ctr">
+            <a:spAutoFit/>
+          </a:bodyPr>
+          <a:lstStyle/>
+          <a:p>
+            <a:pPr algn="ctr">
+              <a:lnSpc>
+                <a:spcPct val="115000"/>
+              </a:lnSpc>
+            </a:pPr>
+            <a:r>
+              <a:rPr sz="1300" b="1" i="0">
+                <a:solidFill>
+                  <a:srgbClr val="FFFFFF"/>
+                </a:solidFill>
+                <a:latin typeface="Arial"/>
+              </a:rPr>
+              <a:t>1</a:t>
+            </a:r>
+          </a:p>
+        </p:txBody>
+      </p:sp>
       <p:pic>
         <p:nvPicPr>
-          <p:cNvPr id="5" name="Picture 4" descr="circle-slash-mid.png"/>
+          <p:cNvPr id="7" name="Picture 6" descr="circle-slash-teal.png"/>
           <p:cNvPicPr>
             <a:picLocks noChangeAspect="1"/>
           </p:cNvPicPr>
@@ -13715,7 +13798,7 @@
         </p:blipFill>
         <p:spPr>
           <a:xfrm>
-            <a:off x="722376" y="1847088"/>
+            <a:off x="3465576" y="1810512"/>
             <a:ext cx="475488" cy="475488"/>
           </a:xfrm>
           <a:prstGeom prst="rect">
@@ -13725,14 +13808,14 @@
       </p:pic>
       <p:sp>
         <p:nvSpPr>
-          <p:cNvPr id="6" name="TextBox 5"/>
-          <p:cNvSpPr txBox="1"/>
-          <p:nvPr/>
-        </p:nvSpPr>
-        <p:spPr>
-          <a:xfrm>
-            <a:off x="1325880" y="1865376"/>
-            <a:ext cx="2697480" cy="713232"/>
+          <p:cNvPr id="8" name="TextBox 7"/>
+          <p:cNvSpPr txBox="1"/>
+          <p:nvPr/>
+        </p:nvSpPr>
+        <p:spPr>
+          <a:xfrm>
+            <a:off x="1106424" y="1847088"/>
+            <a:ext cx="2240280" cy="713232"/>
           </a:xfrm>
           <a:prstGeom prst="rect">
             <a:avLst/>
@@ -13753,18 +13836,18 @@
             <a:r>
               <a:rPr sz="1500" b="1" i="0">
                 <a:solidFill>
-                  <a:srgbClr val="065A82"/>
-                </a:solidFill>
-                <a:latin typeface="Arial"/>
-              </a:rPr>
-              <a:t>1. Корпус влезает в окно</a:t>
-            </a:r>
-          </a:p>
-        </p:txBody>
-      </p:sp>
-      <p:sp>
-        <p:nvSpPr>
-          <p:cNvPr id="7" name="TextBox 6"/>
+                  <a:srgbClr val="028090"/>
+                </a:solidFill>
+                <a:latin typeface="Arial"/>
+              </a:rPr>
+              <a:t>Корпус влезает в окно</a:t>
+            </a:r>
+          </a:p>
+        </p:txBody>
+      </p:sp>
+      <p:sp>
+        <p:nvSpPr>
+          <p:cNvPr id="9" name="TextBox 8"/>
           <p:cNvSpPr txBox="1"/>
           <p:nvPr/>
         </p:nvSpPr>
@@ -13803,7 +13886,7 @@
       </p:sp>
       <p:sp>
         <p:nvSpPr>
-          <p:cNvPr id="8" name="TextBox 7"/>
+          <p:cNvPr id="10" name="TextBox 9"/>
           <p:cNvSpPr txBox="1"/>
           <p:nvPr/>
         </p:nvSpPr>
@@ -13842,7 +13925,7 @@
       </p:sp>
       <p:sp>
         <p:nvSpPr>
-          <p:cNvPr id="9" name="Rounded Rectangle 8"/>
+          <p:cNvPr id="11" name="Rounded Rectangle 10"/>
           <p:cNvSpPr/>
           <p:nvPr/>
         </p:nvSpPr>
@@ -13857,11 +13940,11 @@
             </a:avLst>
           </a:prstGeom>
           <a:solidFill>
-            <a:srgbClr val="F4F7FA"/>
+            <a:srgbClr val="E4F1F2"/>
           </a:solidFill>
           <a:ln w="19050">
             <a:solidFill>
-              <a:srgbClr val="1C7293"/>
+              <a:srgbClr val="028090"/>
             </a:solidFill>
           </a:ln>
           <a:effectLst/>
@@ -13888,9 +13971,92 @@
           </a:p>
         </p:txBody>
       </p:sp>
+      <p:sp>
+        <p:nvSpPr>
+          <p:cNvPr id="12" name="Oval 11"/>
+          <p:cNvSpPr/>
+          <p:nvPr/>
+        </p:nvSpPr>
+        <p:spPr>
+          <a:xfrm>
+            <a:off x="4636008" y="1792224"/>
+            <a:ext cx="292608" cy="292608"/>
+          </a:xfrm>
+          <a:prstGeom prst="ellipse">
+            <a:avLst/>
+          </a:prstGeom>
+          <a:solidFill>
+            <a:srgbClr val="028090"/>
+          </a:solidFill>
+          <a:ln>
+            <a:noFill/>
+          </a:ln>
+          <a:effectLst/>
+        </p:spPr>
+        <p:style>
+          <a:lnRef idx="1">
+            <a:schemeClr val="accent1"/>
+          </a:lnRef>
+          <a:fillRef idx="3">
+            <a:schemeClr val="accent1"/>
+          </a:fillRef>
+          <a:effectRef idx="2">
+            <a:schemeClr val="accent1"/>
+          </a:effectRef>
+          <a:fontRef idx="minor">
+            <a:schemeClr val="lt1"/>
+          </a:fontRef>
+        </p:style>
+        <p:txBody>
+          <a:bodyPr rtlCol="0" anchor="ctr"/>
+          <a:lstStyle/>
+          <a:p>
+            <a:pPr algn="ctr"/>
+          </a:p>
+        </p:txBody>
+      </p:sp>
+      <p:sp>
+        <p:nvSpPr>
+          <p:cNvPr id="13" name="TextBox 12"/>
+          <p:cNvSpPr txBox="1"/>
+          <p:nvPr/>
+        </p:nvSpPr>
+        <p:spPr>
+          <a:xfrm>
+            <a:off x="4636008" y="1792224"/>
+            <a:ext cx="292608" cy="292608"/>
+          </a:xfrm>
+          <a:prstGeom prst="rect">
+            <a:avLst/>
+          </a:prstGeom>
+          <a:noFill/>
+        </p:spPr>
+        <p:txBody>
+          <a:bodyPr wrap="square" lIns="0" rIns="0" tIns="0" bIns="0" anchor="ctr">
+            <a:spAutoFit/>
+          </a:bodyPr>
+          <a:lstStyle/>
+          <a:p>
+            <a:pPr algn="ctr">
+              <a:lnSpc>
+                <a:spcPct val="115000"/>
+              </a:lnSpc>
+            </a:pPr>
+            <a:r>
+              <a:rPr sz="1300" b="1" i="0">
+                <a:solidFill>
+                  <a:srgbClr val="FFFFFF"/>
+                </a:solidFill>
+                <a:latin typeface="Arial"/>
+              </a:rPr>
+              <a:t>2</a:t>
+            </a:r>
+          </a:p>
+        </p:txBody>
+      </p:sp>
       <p:pic>
         <p:nvPicPr>
-          <p:cNvPr id="10" name="Picture 9" descr="key-mid.png"/>
+          <p:cNvPr id="14" name="Picture 13" descr="key-teal.png"/>
           <p:cNvPicPr>
             <a:picLocks noChangeAspect="1"/>
           </p:cNvPicPr>
@@ -13904,7 +14070,7 @@
         </p:blipFill>
         <p:spPr>
           <a:xfrm>
-            <a:off x="4672584" y="1847088"/>
+            <a:off x="7415784" y="1810512"/>
             <a:ext cx="475488" cy="475488"/>
           </a:xfrm>
           <a:prstGeom prst="rect">
@@ -13914,14 +14080,14 @@
       </p:pic>
       <p:sp>
         <p:nvSpPr>
-          <p:cNvPr id="11" name="TextBox 10"/>
-          <p:cNvSpPr txBox="1"/>
-          <p:nvPr/>
-        </p:nvSpPr>
-        <p:spPr>
-          <a:xfrm>
-            <a:off x="5276088" y="1865376"/>
-            <a:ext cx="2697480" cy="713232"/>
+          <p:cNvPr id="15" name="TextBox 14"/>
+          <p:cNvSpPr txBox="1"/>
+          <p:nvPr/>
+        </p:nvSpPr>
+        <p:spPr>
+          <a:xfrm>
+            <a:off x="5056632" y="1847088"/>
+            <a:ext cx="2240280" cy="713232"/>
           </a:xfrm>
           <a:prstGeom prst="rect">
             <a:avLst/>
@@ -13942,18 +14108,18 @@
             <a:r>
               <a:rPr sz="1500" b="1" i="0">
                 <a:solidFill>
-                  <a:srgbClr val="065A82"/>
-                </a:solidFill>
-                <a:latin typeface="Arial"/>
-              </a:rPr>
-              <a:t>2. Отдать фиксированную политику / значение</a:t>
-            </a:r>
-          </a:p>
-        </p:txBody>
-      </p:sp>
-      <p:sp>
-        <p:nvSpPr>
-          <p:cNvPr id="12" name="TextBox 11"/>
+                  <a:srgbClr val="028090"/>
+                </a:solidFill>
+                <a:latin typeface="Arial"/>
+              </a:rPr>
+              <a:t>Фиксированная политика / значение</a:t>
+            </a:r>
+          </a:p>
+        </p:txBody>
+      </p:sp>
+      <p:sp>
+        <p:nvSpPr>
+          <p:cNvPr id="16" name="TextBox 15"/>
           <p:cNvSpPr txBox="1"/>
           <p:nvPr/>
         </p:nvSpPr>
@@ -13992,7 +14158,7 @@
       </p:sp>
       <p:sp>
         <p:nvSpPr>
-          <p:cNvPr id="13" name="TextBox 12"/>
+          <p:cNvPr id="17" name="TextBox 16"/>
           <p:cNvSpPr txBox="1"/>
           <p:nvPr/>
         </p:nvSpPr>
@@ -14031,7 +14197,7 @@
       </p:sp>
       <p:sp>
         <p:nvSpPr>
-          <p:cNvPr id="14" name="Rounded Rectangle 13"/>
+          <p:cNvPr id="18" name="Rounded Rectangle 17"/>
           <p:cNvSpPr/>
           <p:nvPr/>
         </p:nvSpPr>
@@ -14077,9 +14243,92 @@
           </a:p>
         </p:txBody>
       </p:sp>
+      <p:sp>
+        <p:nvSpPr>
+          <p:cNvPr id="19" name="Oval 18"/>
+          <p:cNvSpPr/>
+          <p:nvPr/>
+        </p:nvSpPr>
+        <p:spPr>
+          <a:xfrm>
+            <a:off x="8586216" y="1792224"/>
+            <a:ext cx="292608" cy="292608"/>
+          </a:xfrm>
+          <a:prstGeom prst="ellipse">
+            <a:avLst/>
+          </a:prstGeom>
+          <a:solidFill>
+            <a:srgbClr val="F0AB00"/>
+          </a:solidFill>
+          <a:ln>
+            <a:noFill/>
+          </a:ln>
+          <a:effectLst/>
+        </p:spPr>
+        <p:style>
+          <a:lnRef idx="1">
+            <a:schemeClr val="accent1"/>
+          </a:lnRef>
+          <a:fillRef idx="3">
+            <a:schemeClr val="accent1"/>
+          </a:fillRef>
+          <a:effectRef idx="2">
+            <a:schemeClr val="accent1"/>
+          </a:effectRef>
+          <a:fontRef idx="minor">
+            <a:schemeClr val="lt1"/>
+          </a:fontRef>
+        </p:style>
+        <p:txBody>
+          <a:bodyPr rtlCol="0" anchor="ctr"/>
+          <a:lstStyle/>
+          <a:p>
+            <a:pPr algn="ctr"/>
+          </a:p>
+        </p:txBody>
+      </p:sp>
+      <p:sp>
+        <p:nvSpPr>
+          <p:cNvPr id="20" name="TextBox 19"/>
+          <p:cNvSpPr txBox="1"/>
+          <p:nvPr/>
+        </p:nvSpPr>
+        <p:spPr>
+          <a:xfrm>
+            <a:off x="8586216" y="1792224"/>
+            <a:ext cx="292608" cy="292608"/>
+          </a:xfrm>
+          <a:prstGeom prst="rect">
+            <a:avLst/>
+          </a:prstGeom>
+          <a:noFill/>
+        </p:spPr>
+        <p:txBody>
+          <a:bodyPr wrap="square" lIns="0" rIns="0" tIns="0" bIns="0" anchor="ctr">
+            <a:spAutoFit/>
+          </a:bodyPr>
+          <a:lstStyle/>
+          <a:p>
+            <a:pPr algn="ctr">
+              <a:lnSpc>
+                <a:spcPct val="115000"/>
+              </a:lnSpc>
+            </a:pPr>
+            <a:r>
+              <a:rPr sz="1300" b="1" i="0">
+                <a:solidFill>
+                  <a:srgbClr val="FFFFFF"/>
+                </a:solidFill>
+                <a:latin typeface="Arial"/>
+              </a:rPr>
+              <a:t>3</a:t>
+            </a:r>
+          </a:p>
+        </p:txBody>
+      </p:sp>
       <p:pic>
         <p:nvPicPr>
-          <p:cNvPr id="15" name="Picture 14" descr="cable-gold.png"/>
+          <p:cNvPr id="21" name="Picture 20" descr="cable-gold.png"/>
           <p:cNvPicPr>
             <a:picLocks noChangeAspect="1"/>
           </p:cNvPicPr>
@@ -14093,7 +14342,7 @@
         </p:blipFill>
         <p:spPr>
           <a:xfrm>
-            <a:off x="8622792" y="1847088"/>
+            <a:off x="11365992" y="1810512"/>
             <a:ext cx="475488" cy="475488"/>
           </a:xfrm>
           <a:prstGeom prst="rect">
@@ -14103,14 +14352,14 @@
       </p:pic>
       <p:sp>
         <p:nvSpPr>
-          <p:cNvPr id="16" name="TextBox 15"/>
-          <p:cNvSpPr txBox="1"/>
-          <p:nvPr/>
-        </p:nvSpPr>
-        <p:spPr>
-          <a:xfrm>
-            <a:off x="9226296" y="1865376"/>
-            <a:ext cx="2697480" cy="713232"/>
+          <p:cNvPr id="22" name="TextBox 21"/>
+          <p:cNvSpPr txBox="1"/>
+          <p:nvPr/>
+        </p:nvSpPr>
+        <p:spPr>
+          <a:xfrm>
+            <a:off x="9006840" y="1847088"/>
+            <a:ext cx="2240280" cy="713232"/>
           </a:xfrm>
           <a:prstGeom prst="rect">
             <a:avLst/>
@@ -14135,14 +14384,14 @@
                 </a:solidFill>
                 <a:latin typeface="Arial"/>
               </a:rPr>
-              <a:t>3. Данные доступны live через API / MCP</a:t>
-            </a:r>
-          </a:p>
-        </p:txBody>
-      </p:sp>
-      <p:sp>
-        <p:nvSpPr>
-          <p:cNvPr id="17" name="TextBox 16"/>
+              <a:t>Данные доступны live через API / MCP</a:t>
+            </a:r>
+          </a:p>
+        </p:txBody>
+      </p:sp>
+      <p:sp>
+        <p:nvSpPr>
+          <p:cNvPr id="23" name="TextBox 22"/>
           <p:cNvSpPr txBox="1"/>
           <p:nvPr/>
         </p:nvSpPr>
@@ -14181,7 +14430,7 @@
       </p:sp>
       <p:sp>
         <p:nvSpPr>
-          <p:cNvPr id="18" name="TextBox 17"/>
+          <p:cNvPr id="24" name="TextBox 23"/>
           <p:cNvSpPr txBox="1"/>
           <p:nvPr/>
         </p:nvSpPr>
@@ -14220,7 +14469,7 @@
       </p:sp>
       <p:sp>
         <p:nvSpPr>
-          <p:cNvPr id="19" name="Rounded Rectangle 18"/>
+          <p:cNvPr id="25" name="Rounded Rectangle 24"/>
           <p:cNvSpPr/>
           <p:nvPr/>
         </p:nvSpPr>
@@ -14268,7 +14517,7 @@
       </p:sp>
       <p:sp>
         <p:nvSpPr>
-          <p:cNvPr id="20" name="TextBox 19"/>
+          <p:cNvPr id="26" name="TextBox 25"/>
           <p:cNvSpPr txBox="1"/>
           <p:nvPr/>
         </p:nvSpPr>
@@ -22925,7 +23174,46 @@
         </p:nvSpPr>
         <p:spPr>
           <a:xfrm>
-            <a:off x="1115568" y="4718304"/>
+            <a:off x="1115568" y="4700016"/>
+            <a:ext cx="1371600" cy="237744"/>
+          </a:xfrm>
+          <a:prstGeom prst="rect">
+            <a:avLst/>
+          </a:prstGeom>
+          <a:noFill/>
+        </p:spPr>
+        <p:txBody>
+          <a:bodyPr wrap="square" lIns="0" rIns="0" tIns="0" bIns="0" anchor="t">
+            <a:spAutoFit/>
+          </a:bodyPr>
+          <a:lstStyle/>
+          <a:p>
+            <a:pPr algn="l">
+              <a:lnSpc>
+                <a:spcPct val="115000"/>
+              </a:lnSpc>
+            </a:pPr>
+            <a:r>
+              <a:rPr sz="1150" b="1" i="0">
+                <a:solidFill>
+                  <a:srgbClr val="21295C"/>
+                </a:solidFill>
+                <a:latin typeface="Arial"/>
+              </a:rPr>
+              <a:t>Anthropic</a:t>
+            </a:r>
+          </a:p>
+        </p:txBody>
+      </p:sp>
+      <p:sp>
+        <p:nvSpPr>
+          <p:cNvPr id="28" name="TextBox 27"/>
+          <p:cNvSpPr txBox="1"/>
+          <p:nvPr/>
+        </p:nvSpPr>
+        <p:spPr>
+          <a:xfrm>
+            <a:off x="1115568" y="4919472"/>
             <a:ext cx="1371600" cy="219456"/>
           </a:xfrm>
           <a:prstGeom prst="rect">
@@ -22945,46 +23233,7 @@
               </a:lnSpc>
             </a:pPr>
             <a:r>
-              <a:rPr sz="1050" b="1" i="0">
-                <a:solidFill>
-                  <a:srgbClr val="21295C"/>
-                </a:solidFill>
-                <a:latin typeface="Arial"/>
-              </a:rPr>
-              <a:t>Anthropic</a:t>
-            </a:r>
-          </a:p>
-        </p:txBody>
-      </p:sp>
-      <p:sp>
-        <p:nvSpPr>
-          <p:cNvPr id="28" name="TextBox 27"/>
-          <p:cNvSpPr txBox="1"/>
-          <p:nvPr/>
-        </p:nvSpPr>
-        <p:spPr>
-          <a:xfrm>
-            <a:off x="1115568" y="4919472"/>
-            <a:ext cx="1371600" cy="201168"/>
-          </a:xfrm>
-          <a:prstGeom prst="rect">
-            <a:avLst/>
-          </a:prstGeom>
-          <a:noFill/>
-        </p:spPr>
-        <p:txBody>
-          <a:bodyPr wrap="square" lIns="0" rIns="0" tIns="0" bIns="0" anchor="t">
-            <a:spAutoFit/>
-          </a:bodyPr>
-          <a:lstStyle/>
-          <a:p>
-            <a:pPr algn="l">
-              <a:lnSpc>
-                <a:spcPct val="115000"/>
-              </a:lnSpc>
-            </a:pPr>
-            <a:r>
-              <a:rPr sz="1000" b="0" i="1">
+              <a:rPr sz="1150" b="1" i="1">
                 <a:solidFill>
                   <a:srgbClr val="1C7293"/>
                 </a:solidFill>
@@ -23066,7 +23315,46 @@
         </p:nvSpPr>
         <p:spPr>
           <a:xfrm>
-            <a:off x="2944368" y="4718304"/>
+            <a:off x="2944368" y="4700016"/>
+            <a:ext cx="1371600" cy="237744"/>
+          </a:xfrm>
+          <a:prstGeom prst="rect">
+            <a:avLst/>
+          </a:prstGeom>
+          <a:noFill/>
+        </p:spPr>
+        <p:txBody>
+          <a:bodyPr wrap="square" lIns="0" rIns="0" tIns="0" bIns="0" anchor="t">
+            <a:spAutoFit/>
+          </a:bodyPr>
+          <a:lstStyle/>
+          <a:p>
+            <a:pPr algn="l">
+              <a:lnSpc>
+                <a:spcPct val="115000"/>
+              </a:lnSpc>
+            </a:pPr>
+            <a:r>
+              <a:rPr sz="1150" b="1" i="0">
+                <a:solidFill>
+                  <a:srgbClr val="21295C"/>
+                </a:solidFill>
+                <a:latin typeface="Arial"/>
+              </a:rPr>
+              <a:t>OpenAI</a:t>
+            </a:r>
+          </a:p>
+        </p:txBody>
+      </p:sp>
+      <p:sp>
+        <p:nvSpPr>
+          <p:cNvPr id="32" name="TextBox 31"/>
+          <p:cNvSpPr txBox="1"/>
+          <p:nvPr/>
+        </p:nvSpPr>
+        <p:spPr>
+          <a:xfrm>
+            <a:off x="2944368" y="4919472"/>
             <a:ext cx="1371600" cy="219456"/>
           </a:xfrm>
           <a:prstGeom prst="rect">
@@ -23086,46 +23374,7 @@
               </a:lnSpc>
             </a:pPr>
             <a:r>
-              <a:rPr sz="1050" b="1" i="0">
-                <a:solidFill>
-                  <a:srgbClr val="21295C"/>
-                </a:solidFill>
-                <a:latin typeface="Arial"/>
-              </a:rPr>
-              <a:t>OpenAI</a:t>
-            </a:r>
-          </a:p>
-        </p:txBody>
-      </p:sp>
-      <p:sp>
-        <p:nvSpPr>
-          <p:cNvPr id="32" name="TextBox 31"/>
-          <p:cNvSpPr txBox="1"/>
-          <p:nvPr/>
-        </p:nvSpPr>
-        <p:spPr>
-          <a:xfrm>
-            <a:off x="2944368" y="4919472"/>
-            <a:ext cx="1371600" cy="201168"/>
-          </a:xfrm>
-          <a:prstGeom prst="rect">
-            <a:avLst/>
-          </a:prstGeom>
-          <a:noFill/>
-        </p:spPr>
-        <p:txBody>
-          <a:bodyPr wrap="square" lIns="0" rIns="0" tIns="0" bIns="0" anchor="t">
-            <a:spAutoFit/>
-          </a:bodyPr>
-          <a:lstStyle/>
-          <a:p>
-            <a:pPr algn="l">
-              <a:lnSpc>
-                <a:spcPct val="115000"/>
-              </a:lnSpc>
-            </a:pPr>
-            <a:r>
-              <a:rPr sz="1000" b="0" i="1">
+              <a:rPr sz="1150" b="1" i="1">
                 <a:solidFill>
                   <a:srgbClr val="1C7293"/>
                 </a:solidFill>
@@ -23207,7 +23456,46 @@
         </p:nvSpPr>
         <p:spPr>
           <a:xfrm>
-            <a:off x="4773168" y="4718304"/>
+            <a:off x="4773168" y="4700016"/>
+            <a:ext cx="1371600" cy="237744"/>
+          </a:xfrm>
+          <a:prstGeom prst="rect">
+            <a:avLst/>
+          </a:prstGeom>
+          <a:noFill/>
+        </p:spPr>
+        <p:txBody>
+          <a:bodyPr wrap="square" lIns="0" rIns="0" tIns="0" bIns="0" anchor="t">
+            <a:spAutoFit/>
+          </a:bodyPr>
+          <a:lstStyle/>
+          <a:p>
+            <a:pPr algn="l">
+              <a:lnSpc>
+                <a:spcPct val="115000"/>
+              </a:lnSpc>
+            </a:pPr>
+            <a:r>
+              <a:rPr sz="1150" b="1" i="0">
+                <a:solidFill>
+                  <a:srgbClr val="21295C"/>
+                </a:solidFill>
+                <a:latin typeface="Arial"/>
+              </a:rPr>
+              <a:t>Google</a:t>
+            </a:r>
+          </a:p>
+        </p:txBody>
+      </p:sp>
+      <p:sp>
+        <p:nvSpPr>
+          <p:cNvPr id="36" name="TextBox 35"/>
+          <p:cNvSpPr txBox="1"/>
+          <p:nvPr/>
+        </p:nvSpPr>
+        <p:spPr>
+          <a:xfrm>
+            <a:off x="4773168" y="4919472"/>
             <a:ext cx="1371600" cy="219456"/>
           </a:xfrm>
           <a:prstGeom prst="rect">
@@ -23227,46 +23515,7 @@
               </a:lnSpc>
             </a:pPr>
             <a:r>
-              <a:rPr sz="1050" b="1" i="0">
-                <a:solidFill>
-                  <a:srgbClr val="21295C"/>
-                </a:solidFill>
-                <a:latin typeface="Arial"/>
-              </a:rPr>
-              <a:t>Google</a:t>
-            </a:r>
-          </a:p>
-        </p:txBody>
-      </p:sp>
-      <p:sp>
-        <p:nvSpPr>
-          <p:cNvPr id="36" name="TextBox 35"/>
-          <p:cNvSpPr txBox="1"/>
-          <p:nvPr/>
-        </p:nvSpPr>
-        <p:spPr>
-          <a:xfrm>
-            <a:off x="4773168" y="4919472"/>
-            <a:ext cx="1371600" cy="201168"/>
-          </a:xfrm>
-          <a:prstGeom prst="rect">
-            <a:avLst/>
-          </a:prstGeom>
-          <a:noFill/>
-        </p:spPr>
-        <p:txBody>
-          <a:bodyPr wrap="square" lIns="0" rIns="0" tIns="0" bIns="0" anchor="t">
-            <a:spAutoFit/>
-          </a:bodyPr>
-          <a:lstStyle/>
-          <a:p>
-            <a:pPr algn="l">
-              <a:lnSpc>
-                <a:spcPct val="115000"/>
-              </a:lnSpc>
-            </a:pPr>
-            <a:r>
-              <a:rPr sz="1000" b="0" i="1">
+              <a:rPr sz="1150" b="1" i="1">
                 <a:solidFill>
                   <a:srgbClr val="1C7293"/>
                 </a:solidFill>
@@ -23372,7 +23621,7 @@
         </p:nvSpPr>
         <p:spPr>
           <a:xfrm>
-            <a:off x="6894576" y="4050791"/>
+            <a:off x="6894576" y="4087368"/>
             <a:ext cx="100584" cy="100584"/>
           </a:xfrm>
           <a:prstGeom prst="ellipse">
@@ -23416,8 +23665,8 @@
         </p:nvSpPr>
         <p:spPr>
           <a:xfrm>
-            <a:off x="7095744" y="4005072"/>
-            <a:ext cx="4572000" cy="384048"/>
+            <a:off x="7095744" y="4041648"/>
+            <a:ext cx="4572000" cy="438912"/>
           </a:xfrm>
           <a:prstGeom prst="rect">
             <a:avLst/>
@@ -23432,11 +23681,11 @@
           <a:p>
             <a:pPr algn="l">
               <a:lnSpc>
-                <a:spcPct val="108000"/>
-              </a:lnSpc>
-            </a:pPr>
-            <a:r>
-              <a:rPr sz="1200" b="0" i="0">
+                <a:spcPct val="110000"/>
+              </a:lnSpc>
+            </a:pPr>
+            <a:r>
+              <a:rPr sz="1250" b="0" i="0">
                 <a:solidFill>
                   <a:srgbClr val="21295C"/>
                 </a:solidFill>
@@ -23455,7 +23704,7 @@
         </p:nvSpPr>
         <p:spPr>
           <a:xfrm>
-            <a:off x="6894576" y="4453128"/>
+            <a:off x="6894576" y="4562855"/>
             <a:ext cx="100584" cy="100584"/>
           </a:xfrm>
           <a:prstGeom prst="ellipse">
@@ -23499,8 +23748,8 @@
         </p:nvSpPr>
         <p:spPr>
           <a:xfrm>
-            <a:off x="7095744" y="4407408"/>
-            <a:ext cx="4572000" cy="384048"/>
+            <a:off x="7095744" y="4517136"/>
+            <a:ext cx="4572000" cy="438912"/>
           </a:xfrm>
           <a:prstGeom prst="rect">
             <a:avLst/>
@@ -23515,11 +23764,11 @@
           <a:p>
             <a:pPr algn="l">
               <a:lnSpc>
-                <a:spcPct val="108000"/>
-              </a:lnSpc>
-            </a:pPr>
-            <a:r>
-              <a:rPr sz="1200" b="0" i="0">
+                <a:spcPct val="110000"/>
+              </a:lnSpc>
+            </a:pPr>
+            <a:r>
+              <a:rPr sz="1250" b="0" i="0">
                 <a:solidFill>
                   <a:srgbClr val="21295C"/>
                 </a:solidFill>
@@ -23532,90 +23781,7 @@
       </p:sp>
       <p:sp>
         <p:nvSpPr>
-          <p:cNvPr id="43" name="Oval 42"/>
-          <p:cNvSpPr/>
-          <p:nvPr/>
-        </p:nvSpPr>
-        <p:spPr>
-          <a:xfrm>
-            <a:off x="6894576" y="4855464"/>
-            <a:ext cx="100584" cy="100584"/>
-          </a:xfrm>
-          <a:prstGeom prst="ellipse">
-            <a:avLst/>
-          </a:prstGeom>
-          <a:solidFill>
-            <a:srgbClr val="028090"/>
-          </a:solidFill>
-          <a:ln>
-            <a:noFill/>
-          </a:ln>
-          <a:effectLst/>
-        </p:spPr>
-        <p:style>
-          <a:lnRef idx="1">
-            <a:schemeClr val="accent1"/>
-          </a:lnRef>
-          <a:fillRef idx="3">
-            <a:schemeClr val="accent1"/>
-          </a:fillRef>
-          <a:effectRef idx="2">
-            <a:schemeClr val="accent1"/>
-          </a:effectRef>
-          <a:fontRef idx="minor">
-            <a:schemeClr val="lt1"/>
-          </a:fontRef>
-        </p:style>
-        <p:txBody>
-          <a:bodyPr rtlCol="0" anchor="ctr"/>
-          <a:lstStyle/>
-          <a:p>
-            <a:pPr algn="ctr"/>
-          </a:p>
-        </p:txBody>
-      </p:sp>
-      <p:sp>
-        <p:nvSpPr>
-          <p:cNvPr id="44" name="TextBox 43"/>
-          <p:cNvSpPr txBox="1"/>
-          <p:nvPr/>
-        </p:nvSpPr>
-        <p:spPr>
-          <a:xfrm>
-            <a:off x="7095744" y="4809744"/>
-            <a:ext cx="4572000" cy="384048"/>
-          </a:xfrm>
-          <a:prstGeom prst="rect">
-            <a:avLst/>
-          </a:prstGeom>
-          <a:noFill/>
-        </p:spPr>
-        <p:txBody>
-          <a:bodyPr wrap="square" lIns="0" rIns="0" tIns="0" bIns="0" anchor="t">
-            <a:spAutoFit/>
-          </a:bodyPr>
-          <a:lstStyle/>
-          <a:p>
-            <a:pPr algn="l">
-              <a:lnSpc>
-                <a:spcPct val="108000"/>
-              </a:lnSpc>
-            </a:pPr>
-            <a:r>
-              <a:rPr sz="1200" b="0" i="0">
-                <a:solidFill>
-                  <a:srgbClr val="21295C"/>
-                </a:solidFill>
-                <a:latin typeface="Arial"/>
-              </a:rPr>
-              <a:t>ещё одна граница доверия и retention-политика</a:t>
-            </a:r>
-          </a:p>
-        </p:txBody>
-      </p:sp>
-      <p:sp>
-        <p:nvSpPr>
-          <p:cNvPr id="45" name="Rounded Rectangle 44"/>
+          <p:cNvPr id="43" name="Rounded Rectangle 42"/>
           <p:cNvSpPr/>
           <p:nvPr/>
         </p:nvSpPr>
@@ -23663,7 +23829,7 @@
       </p:sp>
       <p:sp>
         <p:nvSpPr>
-          <p:cNvPr id="46" name="TextBox 45"/>
+          <p:cNvPr id="44" name="TextBox 43"/>
           <p:cNvSpPr txBox="1"/>
           <p:nvPr/>
         </p:nvSpPr>
@@ -23702,7 +23868,7 @@
       </p:sp>
       <p:sp>
         <p:nvSpPr>
-          <p:cNvPr id="47" name="TextBox 46"/>
+          <p:cNvPr id="45" name="TextBox 44"/>
           <p:cNvSpPr txBox="1"/>
           <p:nvPr/>
         </p:nvSpPr>
@@ -23734,7 +23900,7 @@
                 </a:solidFill>
                 <a:latin typeface="Arial"/>
               </a:rPr>
-              <a:t>Числа экономии prompt caching и масштаб экосистемы MCP — в главе; перепроверить ко дню лекции.</a:t>
+              <a:t>Актуальные цифры экономии и масштаб экосистемы MCP — в главе методички.</a:t>
             </a:r>
           </a:p>
         </p:txBody>
@@ -35444,7 +35610,7 @@
                 </a:solidFill>
                 <a:latin typeface="Arial"/>
               </a:rPr>
-              <a:t>[требует подтверждения] вероятный кандидат на «OpenClaw» из issue #157 — рабочая гипотеза по совпадению профиля, не установленный факт</a:t>
+              <a:t>рабочая гипотеза по совпадению профиля — вероятный кандидат на «OpenClaw», не подтверждённый факт</a:t>
             </a:r>
           </a:p>
         </p:txBody>

--- a/library/lectures/lec-03/rendered/lec-03.pptx
+++ b/library/lectures/lec-03/rendered/lec-03.pptx
@@ -541,7 +541,7 @@
           <a:lstStyle/>
           <a:p>
             <a:r>
-              <a:t>Четырнадцатого февраля 2024 года Гражданский трибунал по разрешению споров провинции Британская Колумбия вынес решение по делу *Moffatt v. Air Canada*. История проста. Пассажир Джейк Моффатт зашёл на сайт авиакомпании после смерти бабушки, спросил чат-бота про тариф по случаю утраты близкого и получил ответ: можно купить билет по обычной цене, а затем в течение 90 дней подать заявку на возврат разницы. Это было неправдой — реальная политика Air Canada не допускала ретроактивного возврата по такому тарифу, и об этом было написано на той же странице сайта, на которую чат-бот даже ссылался. Моффатт купил билеты, подал заявку, получил отказ, и дело дошло до трибунала. Авиакомпания защищалась аргументом, что чат-бот — это «отдельное юридическое лицо, отвечающее за свои действия». Трибунал этот аргумент отверг и обязал Air Canada компенсировать пассажиру разницу.</a:t>
+              <a:t>Четырнадцатого февраля 2024 года Гражданский трибунал по разрешению споров провинции Британская Колумбия вынес решение по делу *Moffatt v. Air Canada*. История проста. Пассажир Джейк Моффатт зашёл на сайт авиакомпании после смерти бабушки, спросил чат-бота про тариф по случаю утраты близкого и получил ответ: можно купить билет по обычной цене, а затем в течение 90 дней подать заявку на возврат разницы. Это было неправдой — реальная политика Air Canada не допускала ретроактивного возврата по такому тарифу, и об этом было написано на той же странице сайта, на которую чат-бот даже ссылался. Моффатт купил билеты, подал заявку, получил отказ, и дело дошло до трибунала. Авиакомпания защищалась аргументом, что чат-бот — это «отдельное юридическое лицо, отвечающее за свои действия».[1,2] Трибунал этот аргумент отверг и обязал Air Canada компенсировать пассажиру разницу.</a:t>
             </a:r>
           </a:p>
           <a:p/>
@@ -554,6 +554,22 @@
           <a:p>
             <a:r>
               <a:t>Это был не сбой модели. Это был неправильный выбор архитектуры под задачу. И именно про этот класс ошибок — про выбор архитектуры — вся эта лекция. Прежде чем идти дальше, задайте себе вопрос: если задача всего лишь «узнать правило тарифа», какая архитектура её закрывает — и нужен ли здесь ИИ вообще? К этому ответу мы вернёмся в разделе про RAG.</a:t>
+            </a:r>
+          </a:p>
+          <a:p/>
+          <a:p>
+            <a:r>
+              <a:t>Источники:</a:t>
+            </a:r>
+          </a:p>
+          <a:p>
+            <a:r>
+              <a:t>[1] McCarthy Tétrault — Moffatt v. Air Canada (BC CRT, 14.02.2024) — бот выдумал политику возврата; трибунал: компания отвечает за ответ бота. https://www.mccarthy.ca/en/insights/blogs/techlex/moffatt-v-air-canada-misrepresentation-ai-chatbot</a:t>
+            </a:r>
+          </a:p>
+          <a:p>
+            <a:r>
+              <a:t>[2] ABA Business Law Today — компании отвечают за AI-чат-бота — «бот — не отдельное юр. лицо»: неправильный выбор архитектуры под задачу lookup. https://www.americanbar.org/groups/business_law/resources/business-law-today/2024-february/bc-tribunal-confirms-companies-remain-liable-information-provided-ai-chatbot/</a:t>
             </a:r>
           </a:p>
         </p:txBody>
@@ -623,13 +639,29 @@
           <a:lstStyle/>
           <a:p>
             <a:r>
-              <a:t>Chain-of-thought, или пошаговое рассуждение, — это приём, при котором модель просят не выдавать ответ сразу, а сначала пошагово рассуждать вслух, и только затем формулировать итог. Технически это всё ещё один вызов: изменён только промпт и форма ответа. Посмотрите на рабочий пример про яблоки: было 23, семь испортились, докупили два ящика по шесть. Без пошагового рассуждения модель часто выдаёт правдоподобное, но неверное число, потому что сэмплинг генерирует ответ потокенно и короткий путь легко уводит в ошибку. С CoT модель порождает промежуточные вычисления — 23 минус 7 равно 16; два по шесть это 12; 16 плюс 12 равно 28 — и качество на арифметике и многошаговой логике заметно растёт, потому что каждый сгенерированный токен служит опорой для внимания на следующем шаге. Но «CoT почти всегда улучшает» — заблуждение: на прямом извлечении факта или простой классификации рассуждение не помогает и может навредить — удлиняет ответ и уводит в правдоподобную ошибку. Это инструмент под класс задач, а не тумблер «сделать лучше».</a:t>
+              <a:t>Chain-of-thought, или пошаговое рассуждение, — это приём, при котором модель просят не выдавать ответ сразу, а сначала пошагово рассуждать вслух, и только затем формулировать итог. Технически это всё ещё один вызов: изменён только промпт и форма ответа. Посмотрите на рабочий пример про яблоки: было 23, семь испортились, докупили два ящика по шесть. Без пошагового рассуждения модель часто выдаёт правдоподобное, но неверное число, потому что сэмплинг генерирует ответ потокенно и короткий путь легко уводит в ошибку. С CoT модель порождает промежуточные вычисления — 23 минус 7 равно 16; два по шесть это 12; 16 плюс 12 равно 28[1] — и качество на арифметике и многошаговой логике заметно растёт, потому что каждый сгенерированный токен служит опорой для внимания на следующем шаге. Но «CoT почти всегда улучшает» — заблуждение: на прямом извлечении факта или простой классификации рассуждение не помогает и может навредить — удлиняет ответ и уводит в правдоподобную ошибку. Это инструмент под класс задач, а не тумблер «сделать лучше».</a:t>
             </a:r>
           </a:p>
           <a:p/>
           <a:p>
             <a:r>
-              <a:t>Теперь предел этого приёма, и он важнее самого приёма. Естественно предположить, что раз модель рассуждает вслух, по этому рассуждению можно проверить, как она пришла к ответу. Это неверно фундаментально. Faithfulness, верность рассуждения, — степень, в которой проговорённая цепочка отражает реальные факторы, повлиявшие на ответ. Anthropic измерила это напрямую: модели давали задачу с подсказкой, меняющей ответ, и смотрели, упоминает ли модель эту подсказку в рассуждении. Claude 3.7 упоминал реально использованную подсказку примерно в четверти случаев, DeepSeek R1 — примерно в двух из пяти; в остальных модель меняла ответ под влиянием подсказки, но строила выдуманную аргументацию. Вывод структурный: цепочка — сгенерированный текст, подчиняющийся той же механике сэмплинга, произведённый быть правдоподобным, а не верным протоколом внутреннего вычисления. Unfaithfulness — свойство класса, не баг конкретной модели. Практический вывод и одна из сквозных линий курса: человек-валидатор проверяет результат и факты против независимого источника, а не самообъяснение модели.</a:t>
+              <a:t>Теперь предел этого приёма, и он важнее самого приёма. Естественно предположить, что раз модель рассуждает вслух, по этому рассуждению можно проверить, как она пришла к ответу. Это неверно фундаментально. Faithfulness, верность рассуждения, — степень, в которой проговорённая цепочка отражает реальные факторы, повлиявшие на ответ. Anthropic измерила это напрямую: модели давали задачу с подсказкой, меняющей ответ, и смотрели, упоминает ли модель эту подсказку в рассуждении. Claude 3.7 упоминал реально использованную подсказку примерно в четверти случаев, DeepSeek R1 — примерно в двух из пяти[2]; в остальных модель меняла ответ под влиянием подсказки, но строила выдуманную аргументацию. Вывод структурный: цепочка — сгенерированный текст, подчиняющийся той же механике сэмплинга, произведённый быть правдоподобным, а не верным протоколом внутреннего вычисления. Unfaithfulness — свойство класса, не баг конкретной модели. Практический вывод и одна из сквозных линий курса: человек-валидатор проверяет результат и факты против независимого источника, а не самообъяснение модели.</a:t>
+            </a:r>
+          </a:p>
+          <a:p/>
+          <a:p>
+            <a:r>
+              <a:t>Источники:</a:t>
+            </a:r>
+          </a:p>
+          <a:p>
+            <a:r>
+              <a:t>[1] Wei et al. 2022 — Chain-of-Thought Prompting — пошаговое рассуждение поднимает надёжность на арифметике/многошаговой логике. https://arxiv.org/abs/2201.11903</a:t>
+            </a:r>
+          </a:p>
+          <a:p>
+            <a:r>
+              <a:t>[2] Anthropic — Reasoning Models Don't Always Say What They Think — faithfulness: Claude 3.7 ~25%, DeepSeek R1 ~39% — рассуждение не обязано отражать причину. https://www.anthropic.com/research/reasoning-models-dont-say-think [VFY-day-of]</a:t>
             </a:r>
           </a:p>
         </p:txBody>
@@ -699,7 +731,7 @@
           <a:lstStyle/>
           <a:p>
             <a:r>
-              <a:t>Если chain-of-thought — это про форму одного вызова, то контекст-инжиниринг — про его содержимое. Введём различение. Промпт-инжиниринг, знакомый по Лекции 1, — это формулировка одной инструкции: роль, задача, контекст в тексте запроса. Контекст-инжиниринг — более широкая и итеративная дисциплина: курирование всего набора токенов, видимых модели на инференсе, включая системные инструкции, описания доступных инструментов, подгружаемые внешние данные и историю сообщений. Главный принцип формулируется так: найти наименьший набор высокосигнальных токенов, максимизирующий вероятность желаемого исхода.</a:t>
+              <a:t>Если chain-of-thought — это про форму одного вызова, то контекст-инжиниринг — про его содержимое. Введём различение. Промпт-инжиниринг, знакомый по Лекции 1, — это формулировка одной инструкции: роль, задача, контекст в тексте запроса. Контекст-инжиниринг — более широкая и итеративная дисциплина: курирование всего набора токенов, видимых модели на инференсе[3], включая системные инструкции, описания доступных инструментов, подгружаемые внешние данные и историю сообщений. Главный принцип формулируется так: найти наименьший набор высокосигнальных токенов, максимизирующий вероятность желаемого исхода.</a:t>
             </a:r>
           </a:p>
           <a:p/>
@@ -712,6 +744,27 @@
           <a:p>
             <a:r>
               <a:t>Прямое следствие: «просто положить всё в контекст» — не стратегия. Большое контекстное окно даёт возможность вместить много текста, но не гарантию, что модель этим текстом воспользуется правильно. И это, забегая вперёд, один из ключей к вопросу «когда НЕ RAG», который мы разберём в Разделе 2: иногда правильный ответ — не строить retrieval-инфраструктуру, а аккуратно курировать небольшой стабильный контекст и переиспользовать его через кэширование. То есть это первый практический критерий: если корпус знаний мал, стабилен и помещается в окно — RAG здесь добавил бы хрупкость без выигрыша, и правильный ответ проще, чем кажется.</a:t>
+            </a:r>
+          </a:p>
+          <a:p/>
+          <a:p>
+            <a:r>
+              <a:t>Источники:</a:t>
+            </a:r>
+          </a:p>
+          <a:p>
+            <a:r>
+              <a:t>[1] Chroma Research — Context Rot — точность извлечения падает с ростом числа токенов в контексте. https://research.trychroma.com/context-rot</a:t>
+            </a:r>
+          </a:p>
+          <a:p>
+            <a:r>
+              <a:t>[2] Liu et al. 2023 — Lost in the Middle — тот же феномен «lost in the middle» из Лекции 2 — новый термин, не новая сущность. https://arxiv.org/abs/2307.03172</a:t>
+            </a:r>
+          </a:p>
+          <a:p>
+            <a:r>
+              <a:t>[3] Anthropic — Effective Context Engineering — минимальный высокосигнальный контекст — инженерное требование, не эстетика. https://www.anthropic.com/engineering/effective-context-engineering-for-ai-agents</a:t>
             </a:r>
           </a:p>
         </p:txBody>
@@ -939,7 +992,7 @@
           <a:lstStyle/>
           <a:p>
             <a:r>
-              <a:t>RAG — retrieval-augmented generation, поиск-дополненная генерация — это архитектура, в которой перед вызовом модели система сначала извлекает релевантные фрагменты из внешнего хранилища, кладёт их в контекст вместе с вопросом, и только затем модель генерирует ответ, опираясь на эти фрагменты. Введём термин: retrieval — этап поиска и извлечения релевантных фрагментов; именно он отличает RAG от «положить документ в промпт вручную».</a:t>
+              <a:t>RAG — retrieval-augmented generation, поиск-дополненная генерация — это архитектура, в которой перед вызовом модели система сначала извлекает релевантные фрагменты из внешнего хранилища, кладёт их в контекст вместе с вопросом, и только затем модель генерирует ответ, опираясь на эти фрагменты[1]. Введём термин: retrieval — этап поиска и извлечения релевантных фрагментов; именно он отличает RAG от «положить документ в промпт вручную».</a:t>
             </a:r>
           </a:p>
           <a:p/>
@@ -952,6 +1005,17 @@
           <a:p>
             <a:r>
               <a:t>Введём ещё один термин, несущий в разделе основную нагрузку. Grounding, опора на источник, — свойство ответа быть выведенным из конкретных извлечённых фрагментов, а не сочинённым моделью из головы, с возможностью показать, из какого фрагмента взят каждый факт. Хорошая RAG-система проектируется так, чтобы ответ был grounded, и чтобы на вопрос, на который в извлечённых фрагментах ответа нет, система говорила «не знаю» или «см. источник», а не сочиняла. Сформулируем как инженерный инвариант: «не знаю» — корректный ответ RAG-системы; правдоподобный ответ при нерелевантном retrieval — дефект, а не «лучше, чем ничего». Различение «ответ с опорой и цитатой» против «правдоподобный текст» окажется центральным дальше и прямо объясняет дело Air Canada.</a:t>
+            </a:r>
+          </a:p>
+          <a:p/>
+          <a:p>
+            <a:r>
+              <a:t>Источники:</a:t>
+            </a:r>
+          </a:p>
+          <a:p>
+            <a:r>
+              <a:t>[1] Lewis et al. 2020 — Retrieval-Augmented Generation (NeurIPS) — каноническая статья RAG: индексация → retrieval → генерация с опорой. https://arxiv.org/abs/2005.11401</a:t>
             </a:r>
           </a:p>
         </p:txBody>
@@ -1021,7 +1085,7 @@
           <a:lstStyle/>
           <a:p>
             <a:r>
-              <a:t>RAG — правильный выбор, когда налицо сильный сигнал по одному или нескольким признакам и при этом нет блокеров с соседнего критерия «когда НЕ». Первый признак: знание большое или растущее — корпус не помещается в окно целиком, либо помещается, но класть его в каждый запрос дорого и медленно. Второй: знание меняется — документы, цены, регламенты обновляются чаще, чем выходят версии модели; RAG читает актуальное хранилище в момент запроса, и новый документ доступен сразу после индексации. Третий: нужны свежесть и провенанс — ответ должен опираться на проверяемый источник, и нужно показать, откуда взят факт; регулируемые домены почти всегда требуют провенанса. Четвёртый: база приватная — знания компании не входят в веса публичной модели.</a:t>
+              <a:t>RAG — правильный выбор, когда налицо сильный сигнал по одному или нескольким признакам[1] и при этом нет блокеров с соседнего критерия «когда НЕ». Первый признак: знание большое или растущее — корпус не помещается в окно целиком, либо помещается, но класть его в каждый запрос дорого и медленно. Второй: знание меняется — документы, цены, регламенты обновляются чаще, чем выходят версии модели; RAG читает актуальное хранилище в момент запроса, и новый документ доступен сразу после индексации. Третий: нужны свежесть и провенанс — ответ должен опираться на проверяемый источник, и нужно показать, откуда взят факт; регулируемые домены почти всегда требуют провенанса. Четвёртый: база приватная — знания компании не входят в веса публичной модели.</a:t>
             </a:r>
           </a:p>
           <a:p/>
@@ -1034,6 +1098,22 @@
           <a:p>
             <a:r>
               <a:t>Рабочий пример, к которому вернёмся как к разбору чек-листа в финале: корпоративная база из тысяч регламентов, обновляемых еженедельно, вопросы на естественном языке, обязательная ссылка на пункт-источник. Все четыре признака сошлись, и ни один более простой механизм их совместно не закрывает, а проверка по критериям «когда НЕ» ничего не отменяет. Это образцовый профиль RAG. И практическое наблюдение: выигрыш RAG над прямым ответом особенно велик для меньших моделей — внешний retrieval компенсирует то, чего меньшей модели не хватает в весах, поэтому RAG нередко даёт нужное качество на более дешёвой модели.</a:t>
+            </a:r>
+          </a:p>
+          <a:p/>
+          <a:p>
+            <a:r>
+              <a:t>Источники:</a:t>
+            </a:r>
+          </a:p>
+          <a:p>
+            <a:r>
+              <a:t>[1] IBM — RAG vs Fine-Tuning (вендор-нейтрально) — признаки-за-RAG: большое/меняется/провенанс/приватное. https://www.ibm.com/think/topics/rag-vs-fine-tuning</a:t>
+            </a:r>
+          </a:p>
+          <a:p>
+            <a:r>
+              <a:t>[2] U-NIAH — RAG win-rate выше у меньших моделей — выигрыш RAG над прямым ответом особенно велик для меньших моделей. https://arxiv.org/abs/2503.00353 [VFY-day-of]</a:t>
             </a:r>
           </a:p>
         </p:txBody>
@@ -1103,7 +1183,7 @@
           <a:lstStyle/>
           <a:p>
             <a:r>
-              <a:t>Знать, когда RAG не нужен, ценнее, чем знать, когда нужен, потому что RAG — модная архитектура, и её ставят туда, где она вредит. Три явных критерия «не RAG».</a:t>
+              <a:t>Знать, когда RAG не нужен, ценнее, чем знать, когда нужен, потому что RAG — модная архитектура, и её ставят туда, где она вредит. Три явных критерия «не RAG»[1].</a:t>
             </a:r>
           </a:p>
           <a:p/>
@@ -1128,6 +1208,22 @@
           <a:p>
             <a:r>
               <a:t>Сведём в правило: RAG избыточен, если корпус помещается в окно и стабилен, если задача сводится к фиксированному значению, или если знание уже доступно живьём через инструмент. Выполнен любой из трёх — сигнал остановиться. И даже когда ни один не сработал и RAG оправдан, это не гарантирует, что он будет работать хорошо на масштабе, — отдельный вопрос.</a:t>
+            </a:r>
+          </a:p>
+          <a:p/>
+          <a:p>
+            <a:r>
+              <a:t>Источники:</a:t>
+            </a:r>
+          </a:p>
+          <a:p>
+            <a:r>
+              <a:t>[1] Red Hat — RAG vs Fine-Tuning (когда не RAG) — корпус влезает в окно → full-context+кэш; фикс. значение → lookup; live → API без индекса. https://www.redhat.com/en/topics/ai/rag-vs-fine-tuning</a:t>
+            </a:r>
+          </a:p>
+          <a:p>
+            <a:r>
+              <a:t>[2] McCarthy Tétrault — Air Canada («генерация поверх фикс. политики») — фиксированная политика → детерминированный lookup, не retrieval+генерация. https://www.mccarthy.ca/en/insights/blogs/techlex/moffatt-v-air-canada-misrepresentation-ai-chatbot</a:t>
             </a:r>
           </a:p>
         </p:txBody>
@@ -1197,7 +1293,7 @@
           <a:lstStyle/>
           <a:p>
             <a:r>
-              <a:t>Главный урок раздела одной фразой: «система вернула что-то» не означает «система вернула правильное». RAG не имеет сигнала «я не нашёл подходящего» — по умолчанию он всегда возвращает k ближайших фрагментов, даже если они нерелевантны. Дальше модель честно делает свою работу: дали мусор — сочинит правдоподобный ответ поверх мусора.</a:t>
+              <a:t>Главный урок раздела одной фразой: «система вернула что-то» не означает «система вернула правильное»[1,2]. RAG не имеет сигнала «я не нашёл подходящего» — по умолчанию он всегда возвращает k ближайших фрагментов, даже если они нерелевантны. Дальше модель честно делает свою работу: дали мусор — сочинит правдоподобный ответ поверх мусора.</a:t>
             </a:r>
           </a:p>
           <a:p/>
@@ -1209,7 +1305,28 @@
           <a:p/>
           <a:p>
             <a:r>
-              <a:t>Теперь вернёмся к Air Canada (дело *Moffatt v. Air Canada*, BC CRT, решение 14.02.2024) — с инструментами раздела. Бот сообщил про возврат разницы и сослался на страницу с реальной политикой; политика на той же странице такого возврата не допускала. Источник истины существовал, был доступен — но ответ был не выведен из него, а сгенерирован как правдоподобный текст. Это образцовый отказ grounding: сгенерированный текст в роли, требовавшей извлечённого факта. Правильная архитектура: для фиксированной политики — детерминированная страница или lookup; если нужен диалог — RAG со строгой опорой, обязательной цитатой, явным «не знаю» и человеческой проверкой. Air Canada — не «ИИ галлюцинирует», это решение поставить генеративную архитектуру на детерминированную задачу. Короткий вопрос вам: RAG вернул ответ — как узнать, что он правильный? Только измерением; на глаз правдоподобный от верного не отличить.</a:t>
+              <a:t>Теперь вернёмся к Air Canada[3] (дело *Moffatt v. Air Canada*, BC CRT, решение 14.02.2024) — с инструментами раздела. Бот сообщил про возврат разницы и сослался на страницу с реальной политикой; политика на той же странице такого возврата не допускала. Источник истины существовал, был доступен — но ответ был не выведен из него, а сгенерирован как правдоподобный текст. Это образцовый отказ grounding: сгенерированный текст в роли, требовавшей извлечённого факта. Правильная архитектура: для фиксированной политики — детерминированная страница или lookup; если нужен диалог — RAG со строгой опорой, обязательной цитатой, явным «не знаю» и человеческой проверкой. Air Canada — не «ИИ галлюцинирует», это решение поставить генеративную архитектуру на детерминированную задачу. Короткий вопрос вам: RAG вернул ответ — как узнать, что он правильный? Только измерением; на глаз правдоподобный от верного не отличить.</a:t>
+            </a:r>
+          </a:p>
+          <a:p/>
+          <a:p>
+            <a:r>
+              <a:t>Источники:</a:t>
+            </a:r>
+          </a:p>
+          <a:p>
+            <a:r>
+              <a:t>[1] Barnett et al. 2024 — Seven Failure Points (RAG) — «вернул что-то ≠ вернул правильное»: 7 точек отказа RAG-инжиниринга. https://arxiv.org/abs/2401.05856</a:t>
+            </a:r>
+          </a:p>
+          <a:p>
+            <a:r>
+              <a:t>[2] Kore.ai — Seven RAG Engineering Failure Points — legal-AI / medical-RAG / support-бот — деградация на масштабе без observability. https://www.kore.ai/blog/seven-rag-engineering-failure-points</a:t>
+            </a:r>
+          </a:p>
+          <a:p>
+            <a:r>
+              <a:t>[3] McCarthy Tétrault — Air Canada (отказ grounding) — сгенерированный текст в роли, требовавшей извлечённого проверенного факта. https://www.mccarthy.ca/en/insights/blogs/techlex/moffatt-v-air-canada-misrepresentation-ai-chatbot</a:t>
             </a:r>
           </a:p>
         </p:txBody>
@@ -1355,7 +1472,7 @@
           <a:lstStyle/>
           <a:p>
             <a:r>
-              <a:t>Прежде чем что-либо говорить про то, где fine-tuning сузился, где он опасен и по каким критериям его выбирать, нужно одинаково понимать, что это такое. Fine-tuning, по-русски дообучение, — это продолжение обучения уже готовой, предобученной модели на ваших собственных данных. В Лекции 1 дообучение упоминалось мельком как один из типов использования ИИ; здесь оно появляется в своей настоящей роли — как архитектурный выбор, одна из ступеней той же лестницы сложности.</a:t>
+              <a:t>Прежде чем что-либо говорить про то, где fine-tuning сузился, где он опасен и по каким критериям его выбирать, нужно одинаково понимать, что это такое. Fine-tuning, по-русски дообучение, — это продолжение обучения уже готовой, предобученной модели[1] на ваших собственных данных. В Лекции 1 дообучение упоминалось мельком как один из типов использования ИИ; здесь оно появляется в своей настоящей роли — как архитектурный выбор, одна из ступеней той же лестницы сложности.</a:t>
             </a:r>
           </a:p>
           <a:p/>
@@ -1368,6 +1485,17 @@
           <a:p>
             <a:r>
               <a:t>Важная практическая оговорка сразу: на практике «дообучить модель» почти всегда означает не переобучение всех весов, а параметр-эффективное дообучение, которое обычно называют аббревиатурой PEFT и чаще всего реализуют методом LoRA. Полное дообучение всех весов в 2026 году — редкость, и на следующих слайдах мы разберём, почему это так. Пока запомните различие как формулу: промпт и RAG — это «что показать модели», fine-tuning — это «изменить саму модель». На следующих слайдах мы будем опираться на это определение, разбирая, почему в 2026 году fine-tuning сузился до поведения, а не знания, и где он превращается из инструмента в источник проблем.</a:t>
+            </a:r>
+          </a:p>
+          <a:p/>
+          <a:p>
+            <a:r>
+              <a:t>Источники:</a:t>
+            </a:r>
+          </a:p>
+          <a:p>
+            <a:r>
+              <a:t>[1] IBM — RAG vs Fine-Tuning (fine-tuning меняет веса) — промпт/RAG меняют контекст; fine-tuning меняет сами веса модели. https://www.ibm.com/think/topics/rag-vs-fine-tuning</a:t>
             </a:r>
           </a:p>
         </p:txBody>
@@ -1513,7 +1641,7 @@
           <a:lstStyle/>
           <a:p>
             <a:r>
-              <a:t>Слово «дообучить модель» у многих ассоциируется с обновлением всех весов — это full fine-tuning. В 2026 это почти никогда не то, что нужно. PEFT, параметр-эффективное дообучение, — семейство методов, при которых базовые веса замораживаются, а обучается лишь небольшой набор дополнительных параметров, адаптеров. Наиболее распространённый метод — LoRA: в выбранные слои добавляются маленькие низкоранговые матрицы-адаптеры, и обучаются только они. QLoRA — та же идея поверх квантованной базовой модели, что радикально снижает требования к памяти.</a:t>
+              <a:t>Слово «дообучить модель» у многих ассоциируется с обновлением всех весов — это full fine-tuning. В 2026 это почти никогда не то, что нужно. PEFT, параметр-эффективное дообучение, — семейство методов, при которых базовые веса замораживаются, а обучается лишь небольшой набор дополнительных параметров, адаптеров[1]. Наиболее распространённый метод — LoRA: в выбранные слои добавляются маленькие низкоранговые матрицы-адаптеры, и обучаются только они. QLoRA — та же идея поверх квантованной базовой модели, что радикально снижает требования к памяти.</a:t>
             </a:r>
           </a:p>
           <a:p/>
@@ -1525,7 +1653,28 @@
           <a:p/>
           <a:p>
             <a:r>
-              <a:t>Насколько LoRA распространён — не оценка на глаз, а измеримый факт. По данным команды PEFT Hugging Face, среди 20 834 карточек моделей с тегом PEFT 98.4 процента используют именно LoRA. Оговорка обязательна: это доля среди уже помеченных тегом PEFT, а не среди всего fine-tuning — полное дообучение помечается тегами не так аккуратно и в выборке может быть не видно. Тем не менее среди выбравших параметр-эффективный путь LoRA — практически безальтернативный дефолт. И граница: и full FT, и PEFT — это изменение весов, в отличие от RAG, промпта и контекста, которые веса не трогают. Это водораздел между «разместить знание» — RAG и контекст — и «закодировать поведение» — PEFT. В нарративе достаточно: full FT — почти никогда, PEFT и LoRA — рабочая лошадка 2026 года.</a:t>
+              <a:t>Насколько LoRA распространён — не оценка на глаз, а измеримый факт. По данным команды PEFT Hugging Face, среди 20 834 карточек моделей с тегом PEFT 98[3].4 процента используют именно LoRA. Оговорка обязательна: это доля среди уже помеченных тегом PEFT, а не среди всего fine-tuning — полное дообучение помечается тегами не так аккуратно и в выборке может быть не видно. Тем не менее среди выбравших параметр-эффективный путь LoRA — практически безальтернативный дефолт. И граница: и full FT, и PEFT — это изменение весов, в отличие от RAG, промпта и контекста, которые веса не трогают. Это водораздел между «разместить знание» — RAG и контекст — и «закодировать поведение» — PEFT. В нарративе достаточно: full FT — почти никогда, PEFT и LoRA — рабочая лошадка 2026 года.</a:t>
+            </a:r>
+          </a:p>
+          <a:p/>
+          <a:p>
+            <a:r>
+              <a:t>Источники:</a:t>
+            </a:r>
+          </a:p>
+          <a:p>
+            <a:r>
+              <a:t>[1] Hu et al. 2021 — LoRA — базовые веса замораживаются, обучаются низкоранговые адаптеры. https://arxiv.org/abs/2106.09685</a:t>
+            </a:r>
+          </a:p>
+          <a:p>
+            <a:r>
+              <a:t>[2] Dettmers et al. 2023 — QLoRA — LoRA поверх квантованной модели → дообучение на одном GPU. https://arxiv.org/abs/2305.14314</a:t>
+            </a:r>
+          </a:p>
+          <a:p>
+            <a:r>
+              <a:t>[3] HF PEFT — Beyond LoRA (LoRA 98,4% из 20 834 карточек) — 98,4% моделей с тегом PEFT используют LoRA; оговорка: доля среди помеченных PEFT. https://huggingface.co/blog/peft-beyond-lora [VFY-day-of]</a:t>
             </a:r>
           </a:p>
         </p:txBody>
@@ -1595,19 +1744,40 @@
           <a:lstStyle/>
           <a:p>
             <a:r>
-              <a:t>На предыдущем слайде мы зафиксировали определение: fine-tuning меняет сами веса, тогда как промпт и RAG трогают только контекст. Опираясь на это, разберём область его применения в 2026 году. Среди инженеров ходит формулировка «в 2026 fine-tuning умер — всё решает RAG и длинный контекст». Это неточно. Fine-tuning не умер — он сузился и перестал быть настройкой по умолчанию. Сузился именно потому, что меняет веса: знание — факты, документы, всё, что меняется, — плохо ложится в веса и ушло в RAG и длинный контекст, где его можно процитировать и обновить. За fine-tuning осталась узкая, но важная область — стабильное поведение, стиль, формат вывода, следование политике, а не знания модели.</a:t>
+              <a:t>На предыдущем слайде мы зафиксировали определение: fine-tuning меняет сами веса, тогда как промпт и RAG трогают только контекст. Опираясь на это, разберём область его применения в 2026 году. Среди инженеров ходит формулировка «в 2026 fine-tuning умер — всё решает RAG и длинный контекст». Это неточно. Fine-tuning не умер — он сузился[1] и перестал быть настройкой по умолчанию. Сузился именно потому, что меняет веса: знание — факты, документы, всё, что меняется, — плохо ложится в веса и ушло в RAG и длинный контекст, где его можно процитировать и обновить. За fine-tuning осталась узкая, но важная область — стабильное поведение, стиль, формат вывода, следование политике, а не знания модели.</a:t>
             </a:r>
           </a:p>
           <a:p/>
           <a:p>
             <a:r>
-              <a:t>Отдельно и аккуратно про дистилляцию, потому что здесь частая путаница. Дистилляция — самостоятельная техника переноса знания и сжатия модели (Hinton, Vinyals, Dean, 2015): student-модель учится имитировать выходы teacher-модели через отдельную функцию потерь. Таксономически это не разновидность fine-tuning — обзоры методов разносят их по разным категориям. На практике две техники часто комбинируются: сначала teacher-модель дообучают под нужное поведение, а затем из неё дистиллируют компактную student-модель. Держите это как «fine-tune teacher, потом дистилляция student — две отдельные техники в связке», а не «дистилляция как вид fine-tuning».</a:t>
+              <a:t>Отдельно и аккуратно про дистилляц[2,3]ию, потому что здесь частая путаница. Дистилляция — самостоятельная техника переноса знания и сжатия модели (Hinton, Vinyals, Dean, 2015): student-модель учится имитировать выходы teacher-модели через отдельную функцию потерь. Таксономически это не разновидность fine-tuning — обзоры методов разносят их по разным категориям. На практике две техники часто комбинируются: сначала teacher-модель дообучают под нужное поведение, а затем из неё дистиллируют компактную student-модель. Держите это как «fine-tune teacher, потом дистилляция student — две отдельные техники в связке», а не «дистилляция как вид fine-tuning».</a:t>
             </a:r>
           </a:p>
           <a:p/>
           <a:p>
             <a:r>
               <a:t>Отсюда критерий что-куда. Знание меняется или нужен провенанс — RAG или длинный контекст, не fine-tuning: знание устареет, переобучение дорого, есть риск забывания. Нужно стабильное поведение, тон, формат, политика — это fine-tuning в форме PEFT, не RAG. Нужно снизить стоимость на узкой задаче — связка fine-tune teacher плюс дистилляция student. Ответ детерминирован и верифицируем — обычный код без ИИ. Иначе говоря, fine-tuning 2026 — узкий инструмент под поведение, формат, политику и эффективность, а не способ научить модель домену; «научить домену» в смысле фактов — это RAG, в смысле манеры — PEFT, и почти никогда full fine-tuning.</a:t>
+            </a:r>
+          </a:p>
+          <a:p/>
+          <a:p>
+            <a:r>
+              <a:t>Источники:</a:t>
+            </a:r>
+          </a:p>
+          <a:p>
+            <a:r>
+              <a:t>[1] BigData Boutique — Fine-Tuning When RAG Isn't Enough — fine-tuning сузился до поведения/стиля/формата/политики; знание → RAG. https://bigdataboutique.com/blog/fine-tuning-llms-when-rag-isnt-enough [VFY-day-of]</a:t>
+            </a:r>
+          </a:p>
+          <a:p>
+            <a:r>
+              <a:t>[2] Hinton, Vinyals, Dean 2015 — Distilling the Knowledge — дистилляция — самостоятельная техника, таксономически НЕ вид fine-tuning. https://arxiv.org/abs/1503.02531</a:t>
+            </a:r>
+          </a:p>
+          <a:p>
+            <a:r>
+              <a:t>[3] PEFT survey — таксономия методов настройки — обзоры разносят дистилляцию и fine-tuning по разным категориям. https://arxiv.org/abs/2403.14608</a:t>
             </a:r>
           </a:p>
         </p:txBody>
@@ -1677,7 +1847,7 @@
           <a:lstStyle/>
           <a:p>
             <a:r>
-              <a:t>Введём термин через документированный провал. Catastrophic forgetting, катастрофическое забывание, — деградация общих способностей модели в результате узкого агрессивного дообучения: обучая модель быть очень хорошей в одной узкой задаче, вы можете сломать то, что она умела до этого.</a:t>
+              <a:t>Введём термин через документированный провал. Catastrophic forgetting, катастрофическое забывание, — деградация общих способностей модели[1] в результате узкого агрессивного дообучения: обучая модель быть очень хорошей в одной узкой задаче, вы можете сломать то, что она умела до этого.</a:t>
             </a:r>
           </a:p>
           <a:p/>
@@ -1690,6 +1860,17 @@
           <a:p>
             <a:r>
               <a:t>Почему это попадает в раздел про выбор архитектуры, а не в курьёзы. Сам по себе forgetting — управляемый риск. Катастрофическим его делает отсутствие инженерной дисциплины: нет петли оценки, которая на репрезентативном наборе общих задач показала бы деградацию; нет версионирования датасета и весов для отката. Без eval-петли вы не заметите, что сломали общие способности, пока это не всплывёт в проде; без версионирования не вернётесь к работавшей версии. Правило: если нет eval-петли и версионирования датасета — не делайте fine-tuning. Это не «риск», это критерий: не будет ни сигнала о поломке, ни кнопки отката. Правильные альтернативы: PEFT, где замороженные веса дают ниже риск; а для меняющегося знания — RAG, а не fine-tuning вовсе.</a:t>
+            </a:r>
+          </a:p>
+          <a:p/>
+          <a:p>
+            <a:r>
+              <a:t>Источники:</a:t>
+            </a:r>
+          </a:p>
+          <a:p>
+            <a:r>
+              <a:t>[1] Luo et al. 2023 — Catastrophic Forgetting in LLM Continual FT — узкий агрессивный FT ломает общие способности; тяжелее с ростом масштаба модели. https://arxiv.org/abs/2308.08747</a:t>
             </a:r>
           </a:p>
         </p:txBody>
@@ -1835,7 +2016,18 @@
           <a:p/>
           <a:p>
             <a:r>
-              <a:t>Остаётся вопрос, как инструмент к модели подключается. До конца 2024 года каждая интеграция решала это по-своему. MCP, Model Context Protocol, — открытый стандарт единого способа подключать инструменты к модели; метафора — «USB-C для инструментов». Суть в арифметике: при N моделях и M инструментах наивно нужно N умножить на M интеграций, а MCP сводит это к N плюс M. Но здесь критический поворот: стандартизация подключения не означает безопасность подключаемого и даже усугубляет проблему доверия. Каждый подключённый инструмент — это код в вашем окружении и канал, через который в контекст попадает недоверенный текст. «Подключить за минуту» и «доверять подключённому» — разные вопросы; MCP решил первый и сделал второй острее. Удобство подключения — не аргумент за подключение.</a:t>
+              <a:t>Остаётся вопрос, как инструмент к модели подключается. До конца 2024 года каждая интеграция решала это по-своему. MCP, Model Context Protocol, — открытый стандарт единого способа подключать[1] инструменты к модели; метафора — «USB-C для инструментов». Суть в арифметике: при N моделях и M инструментах наивно нужно N умножить на M интеграций, а MCP сводит это к N плюс M. Но здесь критический поворот: стандартизация подключения не означает безопасность подключаемого и даже усугубляет проблему доверия. Каждый подключённый инструмент — это код в вашем окружении и канал, через который в контекст попадает недоверенный текст. «Подключить за минуту» и «доверять подключённому» — разные вопросы; MCP решил первый и сделал второй острее. Удобство подключения — не аргумент за подключение.</a:t>
+            </a:r>
+          </a:p>
+          <a:p/>
+          <a:p>
+            <a:r>
+              <a:t>Источники:</a:t>
+            </a:r>
+          </a:p>
+          <a:p>
+            <a:r>
+              <a:t>[1] Anthropic — MCP donation / Agentic AI Foundation (N×M→N+M) — MCP стандартизует подключение; удобство подключения ≠ безопасность подключаемого. https://www.anthropic.com/news/donating-the-model-context-protocol-and-establishing-of-the-agentic-ai-foundation [VFY-day-of]</a:t>
             </a:r>
           </a:p>
         </p:txBody>
@@ -1905,7 +2097,7 @@
           <a:lstStyle/>
           <a:p>
             <a:r>
-              <a:t>Теперь есть всё для следующей ступени. Один вызов умеет рассуждать; RAG достаёт знание; function calling дотягивается до внешних систем; MCP стандартизует подключение. Агент — архитектура, в которой модель не делает один проход, а работает в цикле: планирует шаг, действует — вызывает инструмент, наблюдает результат, проверяет, достигнута ли цель, и итерирует, сама динамически определяя последовательность. Каноническая формулировка — планируй, действуй, проверяй, повторяй; это паттерн ReAct, чередование рассуждения и действий, а Reflexion добавляет явную самооценку после неудачи. Это «другой AI» по сравнению с одним вызовом: там модель отвечала один раз, здесь — управляет процессом из многих шагов.</a:t>
+              <a:t>Теперь есть всё для следующей ступени. Один вызов умеет рассуждать; RAG достаёт знание; function calling дотягивается до внешних систем; MCP стандартизует подключение. Агент — архитектура, в которой модель не делает один проход, а работает в цикле[1]: планирует шаг, действует — вызывает инструмент, наблюдает результат, проверяет, достигнута ли цель, и итерирует, сама динамически определяя последовательность. Каноническая формулировка — планируй, действуй, проверяй, повторяй; это паттерн ReAct, чередование рассуждения и действий, а Reflexion добавляет явную самооценку после неудачи. Это «другой AI» по сравнению с одним вызовом: там модель отвечала один раз, здесь — управляет процессом из многих шагов.</a:t>
             </a:r>
           </a:p>
           <a:p/>
@@ -1917,7 +2109,23 @@
           <a:p/>
           <a:p>
             <a:r>
-              <a:t>Подчеркну элемент, несущий основную сквозную нагрузку курса, — шаг check. И здесь возвращается урок про верность рассуждения ребром: проверка не должна быть «модель сама себя спросила и сама себе ответила, что всё хорошо». Самооценка подвержена той же unfaithfulness, что мы видели на слайде про предел chain-of-thought — это иллюзия контроля: объяснение «я проверил» порождается тем же сэмплингом, что и сам ответ. Надёжная проверка — валидация против внешнего критерия: схема, тест, проверка инвариантов, сверка с источником истины, а в значимых решениях — человек-валидатор. Без внешнего check цикл агента — петля, которая уверенно идёт не туда. Это прямой мост к провалам агентов.</a:t>
+              <a:t>Подчеркну элемент, несущий основную сквозную нагрузку курса, — шаг check[2]. И здесь возвращается урок про верность рассуждения ребром: проверка не должна быть «модель сама себя спросила и сама себе ответила, что всё хорошо». Самооценка подвержена той же unfaithfulness, что мы видели на слайде про предел chain-of-thought — это иллюзия контроля: объяснение «я проверил» порождается тем же сэмплингом, что и сам ответ. Надёжная проверка — валидация против внешнего критерия: схема, тест, проверка инвариантов, сверка с источником истины, а в значимых решениях — человек-валидатор. Без внешнего check цикл агента — петля, которая уверенно идёт не туда. Это прямой мост к провалам агентов.</a:t>
+            </a:r>
+          </a:p>
+          <a:p/>
+          <a:p>
+            <a:r>
+              <a:t>Источники:</a:t>
+            </a:r>
+          </a:p>
+          <a:p>
+            <a:r>
+              <a:t>[1] Yao et al. 2022 — ReAct (plan→act→check→iterate) — чередование рассуждения и действий; каждый шаг — место отказа. https://arxiv.org/abs/2210.03629</a:t>
+            </a:r>
+          </a:p>
+          <a:p>
+            <a:r>
+              <a:t>[2] Anthropic — Reasoning Models faithfulness (check ≠ самооценка) — шаг check — валидация против внешнего критерия, не самооценка модели. https://www.anthropic.com/research/reasoning-models-dont-say-think [VFY-day-of]</a:t>
             </a:r>
           </a:p>
         </p:txBody>
@@ -1987,7 +2195,7 @@
           <a:lstStyle/>
           <a:p>
             <a:r>
-              <a:t>Перед тем как разбирать, как агенты ломаются, нужно ввести различение, для основной учебной цели лекции — одно из самых важных. Anthropic в «Building Effective Agents» разделяет два понятия, которые в обиходе часто смешивают. Workflow, рабочий поток или сценарий, — система, где модель и инструменты оркестрируются по предопределённым в коде путям; последовательность шагов известна заранее и зашита, модель вызывается на конкретных шагах, но не решает, какие шаги и в каком порядке делать. Агент — система, где модель динамически определяет собственный процесс; последовательность заранее не зафиксирована.</a:t>
+              <a:t>Перед тем как разбирать, как агенты ломаются, нужно ввести различение, для основной учебной цели лекции — одно из самых важных. Anthropic в «Building Effective Agents» разделяет два понятия[1], которые в обиходе часто смешивают. Workflow, рабочий поток или сценарий, — система, где модель и инструменты оркестрируются по предопределённым в коде путям; последовательность шагов известна заранее и зашита, модель вызывается на конкретных шагах, но не решает, какие шаги и в каком порядке делать. Агент — система, где модель динамически определяет собственный процесс; последовательность заранее не зафиксирована.</a:t>
             </a:r>
           </a:p>
           <a:p/>
@@ -1999,7 +2207,23 @@
           <a:p/>
           <a:p>
             <a:r>
-              <a:t>Важная оговорка: граница проходит не только по задаче в целом, но и по тому, что происходит внутри конкретного шага, — workflow и агент вкладываются друг в друга, и это норма. Агент на шаге действия может вызвать целый workflow как один инструмент: агент code review сам решает, что проверять, но шаг «линтер, тесты, форматирование» вызывает как единый детерминированный подпроцесс. И наоборот: workflow обработки заявок ведёт маршрут по фиксированным правилам, но шаг «разобраться в свободной жалобе» делегирует мини-агенту. Это не третья архитектура, а признание того, что вопрос «workflow или агент» — про конкретное место в системе: динамика добавляется только там, где нужна. Полный дебат о мульти-агентах остаётся в главе; в нарративе достаточно: мульти-агент по умолчанию — не апгрейд.</a:t>
+              <a:t>Важная оговорка: граница проходит не только по задаче в целом, но и по тому, что происходит внутри конкретного шага, — workflow и агент вкладываются друг в друга, и это норма. Агент на шаге действия может вызвать целый workflow как один инструмент: агент code review сам решает, что проверять, но шаг «линтер, тесты, форматирование» вызывает как единый детерминированный подпроцесс. И наоборот: workflow обработки заявок ведёт маршрут по фиксированным правилам, но шаг «разобраться в свободной жалобе» делегирует мини-агенту. Это не третья архитектура, а признание того, что вопрос «workflow или агент» — про конкретное место в системе: динамика добавляется только там, где нужна. Полный дебат о мульти-агент[2]ах остаётся в главе; в нарративе достаточно: мульти-агент по умолчанию — не апгрейд.</a:t>
+            </a:r>
+          </a:p>
+          <a:p/>
+          <a:p>
+            <a:r>
+              <a:t>Источники:</a:t>
+            </a:r>
+          </a:p>
+          <a:p>
+            <a:r>
+              <a:t>[1] Anthropic — Building Effective Agents (workflow vs agent) — workflow = предопределённые пути; агент = динамический процесс; размен латентность/стоимость↔качество. https://www.anthropic.com/research/building-effective-agents</a:t>
+            </a:r>
+          </a:p>
+          <a:p>
+            <a:r>
+              <a:t>[2] Cognition — Don't Build Multi-Agents — мульти-агент по умолчанию не апгрейд; хрупкость параллельных субагентов. https://cognition.ai/blog/dont-build-multi-agents</a:t>
             </a:r>
           </a:p>
         </p:txBody>
@@ -2069,13 +2293,24 @@
           <a:lstStyle/>
           <a:p>
             <a:r>
-              <a:t>До сих пор мы говорили про агента как про абстрактный цикл: планируй, действуй, проверяй, повторяй. Но реальный агент-помощник, с которым инженер работает каждый день, — это не голый цикл, а цикл плюс оснастка. Набор дополнительных механизмов, которые определяют, что агент помнит, чему следует, какие процедуры умеет переиспользовать, кому может делегировать работу и к каким внешним системам имеет доступ. Дальше в этом разделе мы будем не раз опираться на данные agent-harness-registry — это независимый публичный реестр, который тестирует экипировку агентов (память, skills, subagents, MCP) через live-eval бенчмарки на реальных задачах, а не через вендорские самоотчёты о возможностях. По его данным можно выделить пять типовых слотов этой оснастки. Первый — память: что агент помнит между сессиями. Второй — инструкции-правила: файлы-конвенции проекта и журнал прогресса. Третий — skills, переиспользуемые процедуры под повторяющиеся задачи. Четвёртый — subagents, делегированные под-агенты с собственным контекстным окном. Пятый — доступ к внешним инструментам через MCP.</a:t>
+              <a:t>До сих пор мы говорили про агента как про абстрактный цикл: планируй, действуй, проверяй, повторяй. Но реальный агент-помощник, с которым инженер работает каждый день, — это не голый цикл, а цикл плюс оснастка[1]. Набор дополнительных механизмов, которые определяют, что агент помнит, чему следует, какие процедуры умеет переиспользовать, кому может делегировать работу и к каким внешним системам имеет доступ. Дальше в этом разделе мы будем не раз опираться на данные agent-harness-registry — это независимый публичный реестр, который тестирует экипировку агентов (память, skills, subagents, MCP) через live-eval бенчмарки на реальных задачах, а не через вендорские самоотчёты о возможностях. По его данным можно выделить пять типовых слотов этой оснастки. Первый — память: что агент помнит между сессиями. Второй — инструкции-правила: файлы-конвенции проекта и журнал прогресса. Третий — skills, переиспользуемые процедуры под повторяющиеся задачи. Четвёртый — subagents, делегированные под-агенты с собственным контекстным окном. Пятый — доступ к внешним инструментам через MCP.</a:t>
             </a:r>
           </a:p>
           <a:p/>
           <a:p>
             <a:r>
               <a:t>Прежде чем разбирать каждый слот по отдельности, зафиксируем тезис, который рифмуется с центральным правилом всей лекции и с лестницей архитектурной сложности. Каждый слот экипировки — это компромисс между ценой, сложностью и отказоустойчивостью, а не апгрейд по умолчанию. Ровно как не стоит подниматься по лестнице архитектур без требования задачи, не стоит и добавлять агенту память, subagents или новый доступ на всякий случай: каждый добавленный слот несёт свою цену — операционную сложность, новую поверхность отказа, новую границу доверия — и должен отвечать на конкретный, а не абстрактный триггер. Дальше мы пройдём вдоль этой карты слот за слотом и на каждом проверим этот тезис.</a:t>
+            </a:r>
+          </a:p>
+          <a:p/>
+          <a:p>
+            <a:r>
+              <a:t>Источники:</a:t>
+            </a:r>
+          </a:p>
+          <a:p>
+            <a:r>
+              <a:t>[1] agent-harness-registry — карта слотов экипировки агента — источник не подтверждён canonical-URL 2026-08-30; Claude Code/Cursor/Aider — вендор-сайты, verify day-of. [VFY: не подтверждён canonical-URL, подавать как данные независимого реестра live-eval, не как первоисточник]</a:t>
             </a:r>
           </a:p>
         </p:txBody>
@@ -2145,13 +2380,24 @@
           <a:lstStyle/>
           <a:p>
             <a:r>
-              <a:t>Первый слот экипировки — память: то, что агент помнит между сессиями, в отличие от контекста одного разговора, который живёт, только пока открыт диалог. Простейшая форма памяти — плоский файл: агент дописывает в текстовый лог факты, выводы, историю решений, и при следующем запуске читает этот файл целиком. Это работает, пока лог небольшой и не растёт бесконтрольно. На другом конце спектра — специализированные векторные или графовые базы памяти. Система mem0 собирает факты о пользователе и его предпочтениях и переиспользует их в будущих сессиях. Cognee строит память на графе знаний, где факты связаны через онтологию, и retrieval учитывает не только текстовую близость, но и связи между сущностями. Graphiti и Zep идут дальше — это temporal knowledge graphs, которые явно отслеживают время действия факта и его происхождение: система знает, когда факт стал верным, когда устарел и откуда взят.</a:t>
+              <a:t>Первый слот экипировки — память: то, что агент помнит между сессиями, в отличие от контекста одного разговора, который живёт, только пока открыт диалог. Простейшая форма памяти — плоский файл[1]: агент дописывает в текстовый лог факты, выводы, историю решений, и при следующем запуске читает этот файл целиком. Это работает, пока лог небольшой и не растёт бесконтрольно. На другом конце спектра — специализированные векторные или графовые базы памяти. Система mem0 собирает факты о пользователе и его предпочтениях и переиспользует их в будущих сессиях. Cognee строит память на графе знаний, где факты связаны через онтологию, и retrieval учитывает не только текстовую близость, но и связи между сущностями. Graphiti и Zep идут дальше — это temporal knowledge graphs, которые явно отслеживают время действия факта и его происхождение: система знает, когда факт стал верным, когда устарел и откуда взят.</a:t>
             </a:r>
           </a:p>
           <a:p/>
           <a:p>
             <a:r>
               <a:t>Здесь прямо повторяется вопрос, который мы уже разбирали для RAG. Тот же вопрос масштаба знания, что решает RAG для корпуса документов, встаёт для памяти самого агента. Плоский файл работает, пока история мала и стабильна, — это прямая параллель критерию «корпус помещается в окно». Структурированная база нужна, когда история большая, растущая или требует извлечения по фактам — кто что сказал, когда, актуально ли ещё, — а не просто «дай последние сообщения». Критерий один и тот же, применён к другому объекту. И симметрично работает правило лестницы: не ставьте графовую базу памяти агенту, у которого короткие несвязанные сессии и нечего структурированно вспоминать, — это тот же технический долг без требования, что RAG для десяти статей.</a:t>
+            </a:r>
+          </a:p>
+          <a:p/>
+          <a:p>
+            <a:r>
+              <a:t>Источники:</a:t>
+            </a:r>
+          </a:p>
+          <a:p>
+            <a:r>
+              <a:t>[1] agent-harness-registry (live-eval) — спектр памяти агента — источник не подтверждён canonical-URL 2026-08-30; параллель с критерием масштаба RAG. [VFY: не подтверждён canonical-URL, подавать как данные независимого реестра live-eval, не как первоисточник]</a:t>
             </a:r>
           </a:p>
         </p:txBody>
@@ -2221,13 +2467,24 @@
           <a:lstStyle/>
           <a:p>
             <a:r>
-              <a:t>Наличие памяти интуитивно кажется чистым улучшением — агент, который помнит, должен быть полезнее агента, начинающего каждый раз с нуля. Данные agent-harness-registry, независимого реестра, тестирующего системы на реальных задачах, показывают, что это не всегда так, а иногда драматически не так. На слайде системы помечены буквой Tier — это рейтинговая категория реестра от A (лучшие результаты) до D (худшие) по сумме бенчмарков live-eval; чем ближе к A, тем стабильнее система показывала себя на полном наборе тестов. Первый кейс — система Letta, Tier D. По данным реестра она проигрывает и голой модели без всякой памяти, и тривиальному плоскому файлу на всех полностью протестированных бенчмарках: на persistbench голая модель дала 1.000, плоский файл 0.833, а Letta лишь 0.750, при этом на порядок медленнее. Выявлены три механизма провала: капитуляция под давлением, когда при повторном вопросе система меняет уже данный верный ответ на неуверенный; многословие, когда длинный приукрашенный ответ прячет короткий правильный факт; и факт, замеченный, но не закоммиченный в память. Оговорка по свежести обязательна: тестировалась версия примерно восемнадцатимесячной давности из-за ограничения установщика, а не из-за срезания угла, поэтому это оценка конкретной устаревшей версии.</a:t>
+              <a:t>Наличие памяти интуитивно кажется чистым улучшением — агент, который помнит, должен быть полезнее агента, начинающего каждый раз с нуля. Данные agent-harness-registry, независимого реестра[1], тестирующего системы на реальных задачах, показывают, что это не всегда так, а иногда драматически не так. На слайде системы помечены буквой Tier — это рейтинговая категория реестра от A (лучшие результаты) до D (худшие) по сумме бенчмарков live-eval; чем ближе к A, тем стабильнее система показывала себя на полном наборе тестов. Первый кейс — система Letta, Tier D. По данным реестра она проигрывает и голой модели без всякой памяти, и тривиальному плоскому файлу на всех полностью протестированных бенчмарках: на persistbench голая модель дала 1.000, плоский файл 0.833, а Letta лишь 0.750, при этом на порядок медленнее. Выявлены три механизма провала: капитуляция под давлением, когда при повторном вопросе система меняет уже данный верный ответ на неуверенный; многословие, когда длинный приукрашенный ответ прячет короткий правильный факт; и факт, замеченный, но не закоммиченный в память. Оговорка по свежести обязательна: тестировалась версия примерно восемнадцатимесячной давности из-за ограничения установщика, а не из-за срезания угла, поэтому это оценка конкретной устаревшей версии.</a:t>
             </a:r>
           </a:p>
           <a:p/>
           <a:p>
             <a:r>
               <a:t>Второй кейс важнее, потому что это лучшая протестированная система. Anthropic Memory Tool в целом сильна, но и у неё в четырёх задачах из двадцати четырёх, то есть в 17 процентах, зафиксирована потеря информации: явный отказ записать факт, сочтённый эфемерным; отказ как «вне рамок»; и тихая суммаризация, когда конкретные факты незаметно поглощаются общими категориями. Самая тревожная деталь — невоспроизводимость: одна и та же беседа, поданная дважды, дала разное поведение. Это не баг, а задокументированный дизайн: модель просят применять суждение, что достойно записи, и это суждение производит реальные, иногда противоречивые провалы. Вывод один: даже за лучшую систему памяти стоит измеримый хвост потерь. «Работает хорошо» и «работает всегда» — разные утверждения, и это тот же урок, что RAG-провал на масштабе и катастрофическое забывание.</a:t>
+            </a:r>
+          </a:p>
+          <a:p/>
+          <a:p>
+            <a:r>
+              <a:t>Источники:</a:t>
+            </a:r>
+          </a:p>
+          <a:p>
+            <a:r>
+              <a:t>[1] agent-harness-registry (live-eval) — Letta Tier D / Memory Tool 17%-хвост — источник не подтверждён canonical-URL 2026-08-30; числа volatile (1.0/0.833/0.750; 17%). [VFY: не подтверждён canonical-URL, подавать как данные независимого реестра live-eval, не как первоисточник]</a:t>
             </a:r>
           </a:p>
         </p:txBody>
@@ -2373,13 +2630,29 @@
           <a:lstStyle/>
           <a:p>
             <a:r>
-              <a:t>Второй слот экипировки — операционный слой: файлы-инструкции проекта и журнал задач, в который агент пишет собственный прогресс по многошаговой работе. Файл-инструкция здесь — обобщённое имя для класса файлов-конвенций, где команда фиксирует, как собирать проект, как тестировать, каких паттернов держаться. Интуиция понятна: если написать агенту подробную инструкцию и вести журнал сделанного, качество должно вырасти. Контролируемые исследования показывают, что интуиция заметно расходится с измеренным эффектом. Первое исследование, presence paradox, — это рандомизированный эксперимент с тремя плечами: без файла, файл сгенерирован моделью, файл написан разработчиком. Ключевой вывод: само по себе наличие файла не дало статистически значимого прироста успешности задач, при этом стоимость и число шагов, как правило, росли. Единственное исключение осмысленно: сгенерированные файлы помогли именно в репозиториях, где другой документации не было, — то есть файл работает, когда заполняет реальный информационный пробел, а не дублирует то, что модель и так выведет из кода.</a:t>
+              <a:t>Второй слот экипировки — операционный слой: файлы-инструкции проекта и журнал задач, в который агент пишет собственный прогресс по многошаговой работе. Файл-инструкция здесь — обобщённое имя для класса файлов-конвенций, где команда фиксирует, как собирать проект, как тестировать, каких паттернов держаться. Интуиция понятна: если написать агенту подробную инструкцию и вести журнал сделанного, качество должно вырасти. Контролируемые исследования показывают, что интуиция заметно расходится с измеренным эффектом. Первое исследование, presence paradox[1], — это рандомизированный эксперимент с тремя плечами: без файла, файл сгенерирован моделью, файл написан разработчиком. Ключевой вывод: само по себе наличие файла не дало статистически значимого прироста успешности задач, при этом стоимость и число шагов, как правило, росли. Единственное исключение осмысленно: сгенерированные файлы помогли именно в репозиториях, где другой документации не было, — то есть файл работает, когда заполняет реальный информационный пробел, а не дублирует то, что модель и так выведет из кода.</a:t>
             </a:r>
           </a:p>
           <a:p/>
           <a:p>
             <a:r>
-              <a:t>Второе исследование, Honest Lying, про самоавторскую память: агент сам пишет заметки о своих выводах и ошибках. Оказалось, такая память может не помогать исправлению, а закреплять неверное убеждение — если агент рано ошибочно записал причину сбоя, последующие попытки опираются на неё вместо перепроверки. Третье — реальный кейс claude-code#51735: прошлая ошибка была письменно признана в журнале, и это не предотвратило её повтор через двадцать пять дней. Синтез для инженера: операционный слой — не магическая прививка от ошибок и не ритуал по умолчанию, а инструмент с измеренными, местами скромными и контр-интуитивными эффектами. Тот же паттерн, что у роли в промпте: расхожее «добавь X — станет лучше» измерением не подтверждается, и делать X стоит только там, где есть конкретное основание.</a:t>
+              <a:t>Второе исследование, Honest Lying, про самоавторскую память: агент сам пишет заметки о своих выводах и ошибках. Оказалось, такая память может не помогать исправлению, а закреплять неверное убеждение — если агент рано ошибочно записал причину сбоя, последующие попытки опираются на неё вместо перепроверки. Третье — реальный кейс claude-code[2]#51735: прошлая ошибка была письменно признана в журнале, и это не предотвратило её повтор через двадцать пять дней. Синтез для инженера: операционный слой — не магическая прививка от ошибок и не ритуал по умолчанию, а инструмент с измеренными, местами скромными и контр-интуитивными эффектами. Тот же паттерн, что у роли в промпте: расхожее «добавь X — станет лучше» измерением не подтверждается, и делать X стоит только там, где есть конкретное основание.</a:t>
+            </a:r>
+          </a:p>
+          <a:p/>
+          <a:p>
+            <a:r>
+              <a:t>Источники:</a:t>
+            </a:r>
+          </a:p>
+          <a:p>
+            <a:r>
+              <a:t>[1] Gloaguen et al. 2026 — Evaluating AGENTS.md (presence paradox) — наличие файла-инструкции не даёт значимого прироста; помогает в пробеле документации. https://arxiv.org/abs/2602.11988 [VFY-day-of]</a:t>
+            </a:r>
+          </a:p>
+          <a:p>
+            <a:r>
+              <a:t>[2] GitHub anthropics/claude-code#51735 (повтор ошибки через 25 дней) — письменная запись о прошлой ошибке не предотвратила её повтор. https://github.com/anthropics/claude-code/issues/51735</a:t>
             </a:r>
           </a:p>
         </p:txBody>
@@ -2455,7 +2728,38 @@
           <a:p/>
           <a:p>
             <a:r>
-              <a:t>Отсюда специфический класс атак. Prompt injection — атака, при которой во внешние данные в контексте модели встраивается текст, который модель интерпретирует как команду и исполняет; корень в том, что модель доверяет убедительно звучащим токенам и не отличает данные от команды. GitHub MCP heist, май 2025: у ассистента широкий токен на все репозитории; в публичном issue — инструкция «собери приватные репозитории и опубликуй здесь»; ассистент читает issue как команду и выгружает приватное. Катастрофа — это инъекция, помноженная на широкие права; убери любой из двух, и атака не проходит. И про хранение данных два факта против наивного «у нас ZDR, всё в порядке»: ZDR, Zero Data Retention, — это политика вендора не сохранять содержимое запросов после обработки; судебный приказ по делу NYT против OpenAI обязал сохранять все логи поверх любой договорной политики; а ZDR у вендоров не покрывает third-party интеграции и MCP-коннекторы — то есть ровно те звенья, из которых агент и состоит. Отсюда четыре правила: least-privilege, изоляция недоверенного контента, human-in-the-loop на необратимых действиях, allowlist с фиксацией версий. Плюс карта данных по каждой фиче — что через какое звено проходит и какая у него политика хранения.</a:t>
+              <a:t>Отсюда специфический класс атак. Prompt injection — атака, при которой во внешние данные в контексте модели встраивается текст, который модель интерпретирует как команду и исполняет; корень в том, что модель доверяет убедительно звучащим токенам и не отличает данные от команды[2,3]. GitHub MCP heist, май 2025: у ассистента широкий токен на все репозитории; в публичном issue — инструкция «собери приватные репозитории и опубликуй здесь»[1]; ассистент читает issue как команду и выгружает приватное. Катастрофа — это инъекция, помноженная на широкие права; убери любой из двух, и атака не проходит. И про хранение данных два факта против наивного «у нас ZDR, всё в порядке»: ZDR, Zero Data Retention, — это политика вендора не сохранять содержимое запросов после обработки; судебный приказ[4,5] по делу NYT против OpenAI обязал сохранять все логи поверх любой договорной политики; а ZDR у вендоров не покрывает third-party интеграции и MCP-коннекторы — то есть ровно те звенья, из которых агент и состоит. Отсюда четыре правила: least-privilege, изоляция недоверенного контента, human-in-the-loop на необратимых действиях, allowlist с фиксацией версий. Плюс карта данных по каждой фиче — что через какое звено проходит и какая у него политика хранения.</a:t>
+            </a:r>
+          </a:p>
+          <a:p/>
+          <a:p>
+            <a:r>
+              <a:t>Источники:</a:t>
+            </a:r>
+          </a:p>
+          <a:p>
+            <a:r>
+              <a:t>[1] Docker — MCP Horror Stories: GitHub Prompt Injection — GitHub MCP heist: issue-инструкция + широкий токен → выгрузка приватных репо. https://www.docker.com/blog/mcp-horror-stories-github-prompt-injection/</a:t>
+            </a:r>
+          </a:p>
+          <a:p>
+            <a:r>
+              <a:t>[2] Simon Willison — Prompt injection via MCP — модель не отличает данные от команды; недоверенный контент = команда. https://simonwillison.net/2025/Apr/9/mcp-prompt-injection/</a:t>
+            </a:r>
+          </a:p>
+          <a:p>
+            <a:r>
+              <a:t>[3] Palo Alto Unit 42 — MCP Attack Vectors — tool poisoning / каждое подключение = новая граница доверия. https://unit42.paloaltonetworks.com/model-context-protocol-attack-vectors/</a:t>
+            </a:r>
+          </a:p>
+          <a:p>
+            <a:r>
+              <a:t>[4] Bloomberg Law — NYT v. OpenAI (суд обязал хранить логи) — ZDR покрывает не всё; судебный приказ поверх любой политики хранения. https://news.bloomberglaw.com/ip-law/openai-must-turn-over-20-million-chatgpt-logs-judge-affirms</a:t>
+            </a:r>
+          </a:p>
+          <a:p>
+            <a:r>
+              <a:t>[5] Anthropic — API and Data Retention (границы ZDR) — ZDR не покрывает third-party / MCP-connector — ровно то, из чего агент состоит. https://platform.claude.com/docs/en/build-with-claude/api-and-data-retention [VFY-day-of]</a:t>
             </a:r>
           </a:p>
         </p:txBody>
@@ -2525,13 +2829,24 @@
           <a:lstStyle/>
           <a:p>
             <a:r>
-              <a:t>Соберём весь понятийный аппарат раздела — API и MCP, цикл агента, различение workflow и агента, пять слотов экипировки — в один практический ориентир: как через эти понятия выглядят реальные coding-агенты 2026 года. Показываем каждый инструмент не через маркетинг, а через рамку экипировки: какая у него оснастка по карте пяти слотов. Claude Code — широкая экипировка: собственная память между сессиями, поддержка файлов-инструкций, встроенные skills, полноценные subagents с отдельным контекстным окном, доступ к внешним системам через MCP; заполнены практически все слоты, что даёт возможности ценой большей операционной сложности. Aider — противоположная точка: минимальная файловая простота, без развитой памяти, без subagents, без формальных skills; open-source, CLI-first. Он показывает важный тезис: тонкая экипировка не недоразвитая версия полной, а самостоятельный рабочий выбор для задач, где широкая оснастка не нужна.</a:t>
+              <a:t>Соберём весь понятийный аппарат раздела — API и MCP, цикл агента, различение workflow и агента, пять слотов экипировки — в один практический ориентир: как через эти понятия выглядят реальные coding-агенты 2026 года. Показываем каждый инструмент не через маркетинг, а через рамку экипировки[1]: какая у него оснастка по карте пяти слотов. Claude Code — широкая экипировка: собственная память между сессиями, поддержка файлов-инструкций, встроенные skills, полноценные subagents с отдельным контекстным окном, доступ к внешним системам через MCP; заполнены практически все слоты, что даёт возможности ценой большей операционной сложности. Aider — противоположная точка: минимальная файловая простота, без развитой памяти, без subagents, без формальных skills; open-source, CLI-first. Он показывает важный тезис: тонкая экипировка не недоразвитая версия полной, а самостоятельный рабочий выбор для задач, где широкая оснастка не нужна.</a:t>
             </a:r>
           </a:p>
           <a:p/>
           <a:p>
             <a:r>
               <a:t>Cursor — третья точка: не терминал, а desktop-редактор со встроенным агентом, форк VS Code. Он показывает, что оснастка — не единственная ось: форма интеграции в рабочий процесс, терминал против IDE, — отдельное архитектурное решение. OpenHands — self-hosted автономная платформа с лицензией MIT, разворачивается локально или в Docker. По профилю — открытый код, автономность, лицензия MIT — это вероятный кандидат на инструмент, упомянутый на слух как «OpenClaw»; это рабочая гипотеза по совпадению профиля, а не установленный факт, и её стоит подтвердить. Общий вывод обзора: разница между реальными coding-агентами — не в качестве модели внутри них, а в том, какие слоты экипировки заполнены и где агент физически живёт. Это прямое применение всей карты раздела и той же логики «не бери самый оснащённый вариант по умолчанию».</a:t>
+            </a:r>
+          </a:p>
+          <a:p/>
+          <a:p>
+            <a:r>
+              <a:t>Источники:</a:t>
+            </a:r>
+          </a:p>
+          <a:p>
+            <a:r>
+              <a:t>[1] agent-harness-registry — обзор через рамку экипировки — источник не подтверждён; Claude Code/Aider/Cursor/OpenHands — вендор-сайты, verify day-of. [VFY: не подтверждён canonical-URL, подавать как данные независимого реестра live-eval, не как первоисточник]</a:t>
             </a:r>
           </a:p>
         </p:txBody>
@@ -2601,7 +2916,7 @@
           <a:lstStyle/>
           <a:p>
             <a:r>
-              <a:t>Цикл агента имеет четыре места отказа; три класса провалов ниже — эти режимы в датированных кейсах, каждый с уроком и альтернативой. Первый. Команда поставила автономного агента на «синхронизировать заказы в CRM» — задача предсказуемая. Внешний API упёрся в ограничение частоты и стал возвращать ошибку 429. Агент, не имея в плане ветки на 429, действовал по своей природе: планирую, вызываю, 429, перепланирую, снова — тысячи раз в час; итог около $4,200 за шестьдесят три часа (постмортем Sattyam Jain, 2026-04; single-author, числа округлены, иллюстративный). Агент конструктивно не понимает ни накопленной стоимости, ни времени, ни того, что действия идентичны. Урок: без жёстких внешних лимитов «пробуй, пока не получится» исполняется буквально и до разорения.</a:t>
+              <a:t>Цикл агента имеет четыре места отказа; три класса провалов ниже — эти режимы в датированных кейсах, каждый с уроком и альтернативой. Первый. Команда поставила автономного агента на «синхронизировать заказы в CRM» — задача предсказуемая. Внешний API упёрся в ограничение частоты и стал возвращать ошибку 429[1]. Агент, не имея в плане ветки на 429, действовал по своей природе: планирую, вызываю, 429, перепланирую, снова — тысячи раз в час; итог около $4,200 за шестьдесят три часа (постмортем Sattyam Jain, 2026-04; single-author, числа округлены, иллюстративный). Агент конструктивно не понимает ни накопленной стоимости, ни времени, ни того, что действия идентичны. Урок: без жёстких внешних лимитов «пробуй, пока не получится» исполняется буквально и до разорения.</a:t>
             </a:r>
           </a:p>
           <a:p/>
@@ -2613,7 +2928,28 @@
           <a:p/>
           <a:p>
             <a:r>
-              <a:t>Второй. В цепочке, где сбой любого компонента портит результат, надёжности перемножаются: пять шагов по 99% дают примерно 95%, десять — около 90%, двадцать — около 82%. Рассуждение «каждый шаг почти всегда работает, значит и цепочка» математически ложно. Следствие: улучшение отдельного агента почти не двигает системную надёжность, а сокращение числа шагов вдвое даёт сопоставимый эффект дешевле. Урок: «улучшить модель» — слабый рычаг, «меньше хопов плюс валидация между шагами» — сильный. Третий. Когда подзадачи зависимы, параллельные субагенты принимают конфликтующие неявные решения и дают несовместимый результат. Урок: мульти-агент по умолчанию — не апгрейд; для задач с зависимостями он хуже одного линейного агента. Во всех трёх «более сложная архитектура» означала «менее надёжная», а не «более продвинутая».</a:t>
+              <a:t>Второй. В цепочке, где сбой любого компонента портит результат, надёжности перемножа[2]ются: пять шагов по 99% дают примерно 95%, десять — около 90%, двадцать — около 82%. Рассуждение «каждый шаг почти всегда работает, значит и цепочка» математически ложно. Следствие: улучшение отдельного агента почти не двигает системную надёжность, а сокращение числа шагов вдвое даёт сопоставимый эффект дешевле. Урок: «улучшить модель» — слабый рычаг, «меньше хопов плюс валидация между шагами» — сильный. Третий. Когда подзадачи зависимы, параллельные субагенты принимают конфликтующие неявные решения и дают несовместимый результат. Урок: мульти-агент[3] по умолчанию — не апгрейд; для задач с зависимостями он хуже одного линейного агента. Во всех трёх «более сложная архитектура» означала «менее надёжная», а не «более продвинутая».</a:t>
+            </a:r>
+          </a:p>
+          <a:p/>
+          <a:p>
+            <a:r>
+              <a:t>Источники:</a:t>
+            </a:r>
+          </a:p>
+          <a:p>
+            <a:r>
+              <a:t>[1] Sattyam Jain 2026 — The Agent That Burned $4,200 in 63 Hours — петля без лимитов на HTTP 429; retry-скрипт решил бы задачу почти бесплатно. https://medium.com/@sattyamjain96/the-agent-that-burned-4-200-in-63-hours-a-production-ai-postmortem-d38fd9586a85 [VFY-day-of]</a:t>
+            </a:r>
+          </a:p>
+          <a:p>
+            <a:r>
+              <a:t>[2] MindStudio — Reliability Compounding Problem — 5×99%≈95%, 10→90%, 20→82% — надёжности перемножаются. https://www.mindstudio.ai/blog/reliability-compounding-problem-ai-agent-stacks</a:t>
+            </a:r>
+          </a:p>
+          <a:p>
+            <a:r>
+              <a:t>[3] Cognition — Don't Build Multi-Agents (хрупкость) — зависимые подзадачи → параллельные субагенты принимают конфликтующие решения. https://cognition.ai/blog/dont-build-multi-agents</a:t>
             </a:r>
           </a:p>
         </p:txBody>
@@ -2759,7 +3095,7 @@
           <a:lstStyle/>
           <a:p>
             <a:r>
-              <a:t>Соберём всё пройденное в одну структуру — лестницу архитектурной сложности. Каждая ступень — это архитектура, которую мы разобрали. Снизу вверх: обычный код без ИИ; один вызов модели с промптом, возможно с пошаговым рассуждением и примерами; RAG или контекст-инжиниринг, а для малого стабильного корпуса — длинный контекст с кэшированием; workflow с предопределёнными путями; агент с динамическим циклом и обязательными лимитами на бюджет и итерации; и наверху мульти-агент.</a:t>
+              <a:t>Соберём всё пройденное в одну структуру — лестницу архитектурной сложности[1]. Каждая ступень — это архитектура, которую мы разобрали. Снизу вверх: обычный код без ИИ; один вызов модели с промптом, возможно с пошаговым рассуждением и примерами; RAG или контекст-инжиниринг, а для малого стабильного корпуса — длинный контекст с кэшированием; workflow с предопределёнными путями; агент с динамическим циклом и обязательными лимитами на бюджет и итерации; и наверху мульти-агент.</a:t>
             </a:r>
           </a:p>
           <a:p/>
@@ -2772,6 +3108,17 @@
           <a:p>
             <a:r>
               <a:t>Соберём, какое именно требование открывает каждый подъём — это переход от лестницы-картинки к лестнице-инструменту. Код в один вызов: появилось требование обрабатывать естественный язык, неструктурированный ввод, нечёткое соответствие, которого детерминированными правилами не выразить. Один вызов в RAG: появилось требование к знанию, которого нет в весах и которое большое, и меняющееся, и требующее провенанса, и приватное одновременно. В workflow: задача стала многошаговой, но последовательность шагов известна заранее. Workflow в агента: последовательность принципиально зависит от промежуточных результатов так, что заранее её выписать нельзя, и ценность задачи оправдывает кратные стоимость, латентность и потерю аудируемости. Агент в мульти-агент: подзадачи широко-параллельны, независимы и высокоценны настолько, что выигрыш параллелизма перекрывает кратный рост токенов и хрупкость согласования. Каждая стрелка — это не «улучшение», а обмен: больше возможностей в обмен на стоимость, латентность, аудируемость, поверхность атаки. Инженер, владеющий этим навыком, умеет назвать обе стороны обмена, а не только левую.</a:t>
+            </a:r>
+          </a:p>
+          <a:p/>
+          <a:p>
+            <a:r>
+              <a:t>Источники:</a:t>
+            </a:r>
+          </a:p>
+          <a:p>
+            <a:r>
+              <a:t>[1] Anthropic — Building Effective Agents (правило лестницы) — оставайся на нижней ступени; каждый подъём — обмен, не улучшение. https://www.anthropic.com/research/building-effective-agents</a:t>
             </a:r>
           </a:p>
         </p:txBody>
@@ -2841,13 +3188,29 @@
           <a:lstStyle/>
           <a:p>
             <a:r>
-              <a:t>Лестница говорит «не поднимайся без нужды», но не говорит, по каким осям мерить нужду. Это даёт план решения — не таблица для сложения баллов, а маршрут вопросов, который вы проходите сверху вниз для конкретной задачи, останавливаясь на первом сработавшем. Первый вопрос и самый дешёвый отсев: задача детерминированная и верифицируемая — фиксированная цена, политика, парсинг, валидация по схеме, арифметика, маршрутизация по правилам? Если да — обычный код, стоп здесь, остальные вопросы не нужны. Нет — закрывает ли задачу один вызов, возможно с пошаговым рассуждением? Если да — промпт. Дальше решающий вопрос регулируемых доменов: должен ли ответ быть проверяем по источнику? Если да, дальнейший выбор обязан обеспечивать провенанс — строгая опора на источник или код, свободная генерация исключена; это диагноз Air Canada.</a:t>
+              <a:t>Лестница говорит «не поднимайся без нужды», но не говорит, по каким осям мерить нужду. Это даёт план решения — не таблица для сложения баллов, а маршрут вопросов, который вы проходите сверху вниз для конкретной задачи, останавливаясь на первом сработавшем[1]. Первый вопрос и самый дешёвый отсев: задача детерминированная и верифицируемая[2] — фиксированная цена, политика, парсинг, валидация по схеме, арифметика, маршрутизация по правилам? Если да — обычный код, стоп здесь, остальные вопросы не нужны. Нет — закрывает ли задачу один вызов, возможно с пошаговым рассуждением? Если да — промпт. Дальше решающий вопрос регулируемых доменов: должен ли ответ быть проверяем по источнику? Если да, дальнейший выбор обязан обеспечивать провенанс — строгая опора на источник или код, свободная генерация исключена; это диагноз Air Canada.</a:t>
             </a:r>
           </a:p>
           <a:p/>
           <a:p>
             <a:r>
               <a:t>Следующие вопросы: знание меняется часто или нужен провенанс — RAG, если не заблокировано критериями «когда НЕ»; знание стабильно и мало — длинный контекст с кэшем. Нужно поведение, тон, формат, политика, а не факты — fine-tuning в форме PEFT. Задача многошаговая и последовательность известна заранее — workflow; принципиально непредсказуема и ценность оправдывает рост стоимости — агент с бюджетными лимитами. Подзадачи широко-параллельны, независимы и ценны — мульти-агент, иначе один линейный агент. И параллельно, на любом шаге: данные чувствительны — карта данных по фиче, least-privilege, ZDR или договор, человек-валидатор. Навык, который проверяет основная учебная цель, — не посчитать по таблице, а пройти маршрут и назвать решающий вопрос для этой задачи. «По очкам вышло RAG» — не обоснование; «вопрос про провенанс решающий, ответы юридически значимы, поэтому RAG со строгой опорой и человек-валидатор» — обоснование. И нижняя плашка — самая важная строка лекции: детерминированная задача решается обычным кодом, а Air Canada — это выбор генеративной архитектуры для задачи из этой нижней плашки.</a:t>
+            </a:r>
+          </a:p>
+          <a:p/>
+          <a:p>
+            <a:r>
+              <a:t>Источники:</a:t>
+            </a:r>
+          </a:p>
+          <a:p>
+            <a:r>
+              <a:t>[1] Anthropic — Building Effective Agents (маршрут выбора) — маршрут вопросов сверху вниз; шаг 1 — детерминированная задача → обычный код, СТОП. https://www.anthropic.com/research/building-effective-agents</a:t>
+            </a:r>
+          </a:p>
+          <a:p>
+            <a:r>
+              <a:t>[2] McCarthy Tétrault — Air Canada (нижняя строка матрицы) — генеративная архитектура на детерминированную задачу = ошибка нижней строки. https://www.mccarthy.ca/en/insights/blogs/techlex/moffatt-v-air-canada-misrepresentation-ai-chatbot</a:t>
             </a:r>
           </a:p>
         </p:txBody>
@@ -2993,7 +3356,7 @@
           <a:lstStyle/>
           <a:p>
             <a:r>
-              <a:t>Во всех ветках лестницы, где есть генерация, остаётся одна сквозная роль — человек-валидатор. Его функция обоснована двумя разделами лекции: пределом chain-of-thought, где рассуждение может быть unfaithful, и циклом агента, где шаг check не может быть самооценкой модели. «Модель объяснила, почему она права» — не доказательство правоты, а такой же сгенерированный текст, как и сам ответ. Границу роли часто понимают неверно в обе стороны: это не «человек перечитывает каждый ответ» (не масштабируется) и не «человек смотрит, убедительно ли звучит рассуждение» (ловушка unfaithfulness). Это: на значимых решениях результат проходит проверку против источника истины до того, как станет действием; на незначимых — выборочный аудит.</a:t>
+              <a:t>Во всех ветках лестницы, где есть генерация, остаётся одна сквозная роль — человек-валидатор. Его функция обоснована двумя разделами лекции: пределом chain-of-thought, где рассуждение может быть unfaithful[1], и циклом агента, где шаг check не может быть самооценкой модели. «Модель объяснила, почему она права» — не доказательство правоты, а такой же сгенерированный текст, как и сам ответ. Границу роли часто понимают неверно в обе стороны: это не «человек перечитывает каждый ответ» (не масштабируется) и не «человек смотрит, убедительно ли звучит рассуждение» (ловушка unfaithfulness). Это: на значимых решениях результат проходит проверку против источника истины до того, как станет действием; на незначимых — выборочный аудит.</a:t>
             </a:r>
           </a:p>
           <a:p/>
@@ -3005,7 +3368,23 @@
           <a:p/>
           <a:p>
             <a:r>
-              <a:t>Эту мысль усиливает отчёт MIT NANDA о состоянии корпоративного AI в 2025: около девяноста пяти процентов корпоративных GenAI-пилотов не дали измеримого эффекта на финансовый результат. Цифру подавать как заголовок отчёта с методологией, а не как закон природы. Ключевое — не процент, а причина: корень не в качестве моделей, а в провале интеграции; бюджеты уходили в эффектные витрины, хотя отдача выше в скучном back-office. Урок для архитектора: «запустить ИИ» не равно «получить ценность»; решает архитектурно-интеграционная дисциплина — правильная ступень лестницы, измеримая узкая задача, человек-валидатор, — а не самая мощная модель. Иногда правильный ответ — простейшая архитектура или не-ИИ.</a:t>
+              <a:t>Эту мысль усиливает отчёт MIT NANDA о состоянии корпоративного AI в 2025: около девяноста пяти процентов корпоративных GenAI-пилотов не дали измеримого эффекта на финансовый результат. Цифру подавать как заголовок отчёта с методологией, а не как закон природы. Ключевое — не процент, а причина: корень не в качестве моделей, а в провале интеграции; бюджеты[2] уходили в эффектные витрины, хотя отдача выше в скучном back-office. Урок для архитектора: «запустить ИИ» не равно «получить ценность»; решает архитектурно-интеграционная дисциплина — правильная ступень лестницы, измеримая узкая задача, человек-валидатор, — а не самая мощная модель. Иногда правильный ответ — простейшая архитектура или не-ИИ.</a:t>
+            </a:r>
+          </a:p>
+          <a:p/>
+          <a:p>
+            <a:r>
+              <a:t>Источники:</a:t>
+            </a:r>
+          </a:p>
+          <a:p>
+            <a:r>
+              <a:t>[1] Anthropic — Reasoning Models faithfulness (self-rationale ≠ контроль) — человек проверяет результат/факты против источника, не самообъяснение модели. https://www.anthropic.com/research/reasoning-models-dont-say-think [VFY-day-of]</a:t>
+            </a:r>
+          </a:p>
+          <a:p>
+            <a:r>
+              <a:t>[2] MIT NANDA — State of AI in Business 2025 (~95% пилотов без ROI) — корень — learning gap и провал интеграции, не качество модели; отчёт, не закон. https://fortune.com/2025/08/18/mit-report-95-percent-generative-ai-pilots-at-companies-failing-cfo/ [VFY-day-of]</a:t>
             </a:r>
           </a:p>
         </p:txBody>
@@ -3467,7 +3846,7 @@
           <a:lstStyle/>
           <a:p>
             <a:r>
-              <a:t>Прежде чем выбирать между RAG, fine-tuning и агентами, зафиксируем точку отсчёта. Самая дешёвая, надёжная и предсказуемая AI-архитектура — это один вызов модели с хорошо составленным промптом. Один вызов — в Лекции 2 это single-shot инференс — не имеет ни внешнего поиска, ни цикла, ни инструментов: на вход промпт, на выход ответ, памяти между вызовами нет. У него минимальная стоимость, минимальная латентность и максимальная предсказуемость: нет петель, которые расходятся, нет retrieval, который тихо деградирует.</a:t>
+              <a:t>Прежде чем выбирать между RAG, fine-tuning и агентами, зафиксируем точку отсчёта. Самая дешёвая, надёжная и предсказуемая AI-архитектура — это один вызов модели с хорошо составленным промптом[1]. Один вызов — в Лекции 2 это single-shot инференс — не имеет ни внешнего поиска, ни цикла, ни инструментов: на вход промпт, на выход ответ, памяти между вызовами нет. У него минимальная стоимость, минимальная латентность и максимальная предсказуемость: нет петель, которые расходятся, нет retrieval, который тихо деградирует.</a:t>
             </a:r>
           </a:p>
           <a:p/>
@@ -3486,6 +3865,17 @@
           <a:p>
             <a:r>
               <a:t>Полезно зафиксировать, во что обходится каждый подъём, чтобы бремя доказательства было перечнем. Добавляя RAG, вы добавляете конвейер индексации, векторное хранилище, компонент retrieval, который может молча деградировать, и метрики его качества. Добавляя инструменты и цикл агента — внешние вызовы, которые падают и тормозят, петли, которые расходятся, недетерминизм траектории и новую поверхность атаки. Ни один из этих пунктов не появляется у одного вызова. Поэтому «один вызов по умолчанию» — не консерватизм, а отказ оплачивать инфраструктуру и режимы отказа, которых задача не требует.</a:t>
+            </a:r>
+          </a:p>
+          <a:p/>
+          <a:p>
+            <a:r>
+              <a:t>Источники:</a:t>
+            </a:r>
+          </a:p>
+          <a:p>
+            <a:r>
+              <a:t>[1] Anthropic — Building Effective Agents («найди простейшее») — не усложняй архитектуру без требования задачи — распределение бремени доказательства. https://www.anthropic.com/research/building-effective-agents</a:t>
             </a:r>
           </a:p>
         </p:txBody>
@@ -3561,7 +3951,18 @@
           <a:p/>
           <a:p>
             <a:r>
-              <a:t>Ключевой вопрос — сдвигает ли это фактическую точность, а не только подачу. Специально спроектированное исследование Zheng и коллег дало однозначный ответ: 162 персоны, восемь доменов экспертизы, 2410 фактических вопросов, четыре семейства моделей — и персоны не улучшают точность по сравнению с ответом вообще без роли. Модель, которой сказали «ты нобелевский лауреат по физике», не отвечает на физику точнее модели без роли. Отдельное исследование показывает, на что роль влияет реально: на тон и глубину изложения — насколько формально и подробно раскрыта тема, — но не на то, верен ли сообщаемый факт, и этот эффект модель-специфичен. Вывод для инженера: роль — инструмент настройки стиля, а не повышения точности. Нужна фактическая точность — работает грамотный контекст и, при необходимости, опора на проверяемый источник, а не удачная формулировка роли.</a:t>
+              <a:t>Ключевой вопрос — сдвигает ли это фактическую точность[1], а не только подачу. Специально спроектированное исследование Zheng и коллег дало однозначный ответ: 162 персоны, восемь доменов экспертизы, 2410 фактических вопросов, четыре семейства моделей — и персоны не улучшают точность по сравнению с ответом вообще без роли. Модель, которой сказали «ты нобелевский лауреат по физике», не отвечает на физику точнее модели без роли. Отдельное исследование показывает, на что роль влияет реально: на тон и глубину изложения — насколько формально и подробно раскрыта тема, — но не на то, верен ли сообщаемый факт, и этот эффект модель-специфичен. Вывод для инженера: роль — инструмент настройки стиля, а не повышения точности. Нужна фактическая точность — работает грамотный контекст и, при необходимости, опора на проверяемый источник, а не удачная формулировка роли.</a:t>
+            </a:r>
+          </a:p>
+          <a:p/>
+          <a:p>
+            <a:r>
+              <a:t>Источники:</a:t>
+            </a:r>
+          </a:p>
+          <a:p>
+            <a:r>
+              <a:t>[1] Zheng et al. 2024, Findings of EMNLP — персоны не улучшают точность фактов — 162 персоны · 8 доменов · 2410 фактических вопросов · 4 семейства → нет прироста точности. https://arxiv.org/abs/2311.10054</a:t>
             </a:r>
           </a:p>
         </p:txBody>
@@ -7319,6 +7720,17 @@
               </a:rPr>
               <a:t>Трибунал: «бот — не отдельное юр. лицо» → компания компенсирует разницу</a:t>
             </a:r>
+            <a:r>
+              <a:rPr sz="728" baseline="30000" b="0" i="1">
+                <a:latin typeface="Arial"/>
+                <a:cs typeface="Arial"/>
+                <a:ea typeface="Arial"/>
+                <a:solidFill>
+                  <a:srgbClr val="1C7293"/>
+                </a:solidFill>
+              </a:rPr>
+              <a:t>[1,2]</a:t>
+            </a:r>
           </a:p>
         </p:txBody>
       </p:sp>
@@ -7405,6 +7817,122 @@
                 <a:latin typeface="Arial"/>
               </a:rPr>
               <a:t>Это не сбой модели — это неправильный выбор архитектуры под задачу. Об этом классе ошибок вся лекция.</a:t>
+            </a:r>
+          </a:p>
+        </p:txBody>
+      </p:sp>
+      <p:sp>
+        <p:nvSpPr>
+          <p:cNvPr id="21" name="TextBox 20"/>
+          <p:cNvSpPr txBox="1"/>
+          <p:nvPr/>
+        </p:nvSpPr>
+        <p:spPr>
+          <a:xfrm>
+            <a:off x="5897880" y="6620256"/>
+            <a:ext cx="5806440" cy="329184"/>
+          </a:xfrm>
+          <a:prstGeom prst="rect">
+            <a:avLst/>
+          </a:prstGeom>
+          <a:noFill/>
+        </p:spPr>
+        <p:txBody>
+          <a:bodyPr wrap="square" lIns="0" rIns="0" tIns="0" bIns="0" anchor="t">
+            <a:spAutoFit/>
+          </a:bodyPr>
+          <a:lstStyle/>
+          <a:p>
+            <a:pPr algn="l">
+              <a:lnSpc>
+                <a:spcPct val="102000"/>
+              </a:lnSpc>
+            </a:pPr>
+            <a:r>
+              <a:rPr sz="850" b="1" i="1">
+                <a:solidFill>
+                  <a:srgbClr val="065A82"/>
+                </a:solidFill>
+                <a:latin typeface="Arial"/>
+              </a:rPr>
+              <a:t>[1] </a:t>
+            </a:r>
+            <a:r>
+              <a:rPr sz="850" i="1">
+                <a:solidFill>
+                  <a:srgbClr val="1C7293"/>
+                </a:solidFill>
+                <a:latin typeface="Arial"/>
+                <a:hlinkClick r:id="rId4"/>
+              </a:rPr>
+              <a:t>McCarthy Tétrault — Moffatt v. Air Canada (BC CRT, 14.02.2024)</a:t>
+            </a:r>
+            <a:r>
+              <a:rPr sz="850" i="1">
+                <a:solidFill>
+                  <a:srgbClr val="1C7293"/>
+                </a:solidFill>
+                <a:latin typeface="Arial"/>
+              </a:rPr>
+              <a:t>   ·   </a:t>
+            </a:r>
+            <a:r>
+              <a:rPr sz="850" b="1" i="1">
+                <a:solidFill>
+                  <a:srgbClr val="065A82"/>
+                </a:solidFill>
+                <a:latin typeface="Arial"/>
+              </a:rPr>
+              <a:t>[2] </a:t>
+            </a:r>
+            <a:r>
+              <a:rPr sz="850" i="1">
+                <a:solidFill>
+                  <a:srgbClr val="1C7293"/>
+                </a:solidFill>
+                <a:latin typeface="Arial"/>
+                <a:hlinkClick r:id="rId5"/>
+              </a:rPr>
+              <a:t>ABA Business Law Today — компании отвечают за AI-чат-бота</a:t>
+            </a:r>
+          </a:p>
+        </p:txBody>
+      </p:sp>
+      <p:sp>
+        <p:nvSpPr>
+          <p:cNvPr id="22" name="TextBox 21"/>
+          <p:cNvSpPr txBox="1"/>
+          <p:nvPr/>
+        </p:nvSpPr>
+        <p:spPr>
+          <a:xfrm>
+            <a:off x="11274552" y="6547104"/>
+            <a:ext cx="868680" cy="256032"/>
+          </a:xfrm>
+          <a:prstGeom prst="rect">
+            <a:avLst/>
+          </a:prstGeom>
+          <a:noFill/>
+        </p:spPr>
+        <p:txBody>
+          <a:bodyPr wrap="none" lIns="0" rIns="0" tIns="0" bIns="0">
+            <a:spAutoFit/>
+          </a:bodyPr>
+          <a:lstStyle/>
+          <a:p>
+            <a:pPr algn="r">
+              <a:lnSpc>
+                <a:spcPct val="100000"/>
+              </a:lnSpc>
+            </a:pPr>
+            <a:r>
+              <a:rPr sz="1000" i="1">
+                <a:solidFill>
+                  <a:srgbClr val="5B6678"/>
+                </a:solidFill>
+                <a:latin typeface="Arial"/>
+              </a:rPr>
+              <a:t>1 / 40</a:t>
             </a:r>
           </a:p>
         </p:txBody>
@@ -7752,7 +8280,29 @@
                 </a:solidFill>
                 <a:latin typeface="Arial"/>
               </a:rPr>
-              <a:t>23 − 7 = 16    ·    2 × 6 = 12</a:t>
+              <a:t>23 − 7 = 16</a:t>
+            </a:r>
+            <a:r>
+              <a:rPr sz="780" baseline="30000" b="0" i="1">
+                <a:latin typeface="Arial"/>
+                <a:cs typeface="Arial"/>
+                <a:ea typeface="Arial"/>
+                <a:solidFill>
+                  <a:srgbClr val="1C7293"/>
+                </a:solidFill>
+              </a:rPr>
+              <a:t>[1]</a:t>
+            </a:r>
+            <a:r>
+              <a:rPr sz="1500" b="1" i="0">
+                <a:latin typeface="Arial"/>
+                <a:cs typeface="Arial"/>
+                <a:ea typeface="Arial"/>
+                <a:solidFill>
+                  <a:srgbClr val="21295C"/>
+                </a:solidFill>
+              </a:rPr>
+              <a:t>    ·    2 × 6 = 12</a:t>
             </a:r>
           </a:p>
           <a:p>
@@ -8179,7 +8729,29 @@
                 </a:solidFill>
                 <a:latin typeface="Arial"/>
               </a:rPr>
-              <a:t>— доля случаев, где модель упомянула реально использованную подсказку.</a:t>
+              <a:t>— доля случаев, где модель упомянула реально использованную подсказку</a:t>
+            </a:r>
+            <a:r>
+              <a:rPr sz="598" baseline="30000" b="0" i="1">
+                <a:latin typeface="Arial"/>
+                <a:cs typeface="Arial"/>
+                <a:ea typeface="Arial"/>
+                <a:solidFill>
+                  <a:srgbClr val="1C7293"/>
+                </a:solidFill>
+              </a:rPr>
+              <a:t>[2]</a:t>
+            </a:r>
+            <a:r>
+              <a:rPr sz="1150" b="0" i="1">
+                <a:latin typeface="Arial"/>
+                <a:cs typeface="Arial"/>
+                <a:ea typeface="Arial"/>
+                <a:solidFill>
+                  <a:srgbClr val="5B6678"/>
+                </a:solidFill>
+              </a:rPr>
+              <a:t>.</a:t>
             </a:r>
           </a:p>
         </p:txBody>
@@ -8295,17 +8867,103 @@
           <a:p>
             <a:pPr algn="l">
               <a:lnSpc>
+                <a:spcPct val="102000"/>
+              </a:lnSpc>
+            </a:pPr>
+            <a:r>
+              <a:rPr sz="850" b="1" i="1">
+                <a:solidFill>
+                  <a:srgbClr val="065A82"/>
+                </a:solidFill>
+                <a:latin typeface="Arial"/>
+              </a:rPr>
+              <a:t>[1] </a:t>
+            </a:r>
+            <a:r>
+              <a:rPr sz="850" i="1">
+                <a:solidFill>
+                  <a:srgbClr val="1C7293"/>
+                </a:solidFill>
+                <a:latin typeface="Arial"/>
+                <a:hlinkClick r:id="rId3"/>
+              </a:rPr>
+              <a:t>Wei et al. 2022 — Chain-of-Thought Prompting</a:t>
+            </a:r>
+            <a:r>
+              <a:rPr sz="850" i="1">
+                <a:solidFill>
+                  <a:srgbClr val="1C7293"/>
+                </a:solidFill>
+                <a:latin typeface="Arial"/>
+              </a:rPr>
+              <a:t>   ·   </a:t>
+            </a:r>
+            <a:r>
+              <a:rPr sz="850" b="1" i="1">
+                <a:solidFill>
+                  <a:srgbClr val="065A82"/>
+                </a:solidFill>
+                <a:latin typeface="Arial"/>
+              </a:rPr>
+              <a:t>[2] </a:t>
+            </a:r>
+            <a:r>
+              <a:rPr sz="850" i="1">
+                <a:solidFill>
+                  <a:srgbClr val="1C7293"/>
+                </a:solidFill>
+                <a:latin typeface="Arial"/>
+                <a:hlinkClick r:id="rId4"/>
+              </a:rPr>
+              <a:t>Anthropic — Reasoning Models Don't Always Say What They Think</a:t>
+            </a:r>
+            <a:r>
+              <a:rPr sz="850" i="1">
+                <a:solidFill>
+                  <a:srgbClr val="5B6678"/>
+                </a:solidFill>
+                <a:latin typeface="Arial"/>
+              </a:rPr>
+              <a:t>   ·   Anthropic, апрель 2025 · верность падает на трудных задачах · перепроверить ко дню лекции.</a:t>
+            </a:r>
+          </a:p>
+        </p:txBody>
+      </p:sp>
+      <p:sp>
+        <p:nvSpPr>
+          <p:cNvPr id="23" name="TextBox 22"/>
+          <p:cNvSpPr txBox="1"/>
+          <p:nvPr/>
+        </p:nvSpPr>
+        <p:spPr>
+          <a:xfrm>
+            <a:off x="11274552" y="6547104"/>
+            <a:ext cx="868680" cy="256032"/>
+          </a:xfrm>
+          <a:prstGeom prst="rect">
+            <a:avLst/>
+          </a:prstGeom>
+          <a:noFill/>
+        </p:spPr>
+        <p:txBody>
+          <a:bodyPr wrap="none" lIns="0" rIns="0" tIns="0" bIns="0">
+            <a:spAutoFit/>
+          </a:bodyPr>
+          <a:lstStyle/>
+          <a:p>
+            <a:pPr algn="r">
+              <a:lnSpc>
                 <a:spcPct val="100000"/>
               </a:lnSpc>
             </a:pPr>
             <a:r>
-              <a:rPr sz="1200" b="0" i="1">
-                <a:solidFill>
-                  <a:srgbClr val="1C7293"/>
-                </a:solidFill>
-                <a:latin typeface="Arial"/>
-              </a:rPr>
-              <a:t>Anthropic, апрель 2025 · верность падает на трудных задачах · перепроверить ко дню лекции.</a:t>
+              <a:rPr sz="1000" i="1">
+                <a:solidFill>
+                  <a:srgbClr val="5B6678"/>
+                </a:solidFill>
+                <a:latin typeface="Arial"/>
+              </a:rPr>
+              <a:t>10 / 40</a:t>
             </a:r>
           </a:p>
         </p:txBody>
@@ -8512,7 +9170,29 @@
                 </a:solidFill>
                 <a:latin typeface="Arial"/>
               </a:rPr>
-              <a:t>context rot = тот же «lost in the middle» из Л2 — новый термин, не новая сущность</a:t>
+              <a:t>context rot = тот же «lost in the middle» из Л2</a:t>
+            </a:r>
+            <a:r>
+              <a:rPr sz="598" baseline="30000" b="0" i="1">
+                <a:latin typeface="Arial"/>
+                <a:cs typeface="Arial"/>
+                <a:ea typeface="Arial"/>
+                <a:solidFill>
+                  <a:srgbClr val="1C7293"/>
+                </a:solidFill>
+              </a:rPr>
+              <a:t>[1,2]</a:t>
+            </a:r>
+            <a:r>
+              <a:rPr sz="1150" b="0" i="1">
+                <a:latin typeface="Arial"/>
+                <a:cs typeface="Arial"/>
+                <a:ea typeface="Arial"/>
+                <a:solidFill>
+                  <a:srgbClr val="1C7293"/>
+                </a:solidFill>
+              </a:rPr>
+              <a:t> — новый термин, не новая сущность</a:t>
             </a:r>
           </a:p>
         </p:txBody>
@@ -8788,7 +9468,173 @@
                 </a:solidFill>
                 <a:latin typeface="Arial"/>
               </a:rPr>
-              <a:t>«Найти наименьший набор высокосигнальных токенов, максимизирующий вероятность желаемого исхода» — это инженерное требование, не эстетика.</a:t>
+              <a:t>«Найти наименьший набор высокосигнальных токенов, максимизирующий вероятность желаемого исхода» — это инженерное требование, не эстетика</a:t>
+            </a:r>
+            <a:r>
+              <a:rPr sz="754" baseline="30000" b="0" i="1">
+                <a:latin typeface="Arial"/>
+                <a:cs typeface="Arial"/>
+                <a:ea typeface="Arial"/>
+                <a:solidFill>
+                  <a:srgbClr val="1C7293"/>
+                </a:solidFill>
+              </a:rPr>
+              <a:t>[3]</a:t>
+            </a:r>
+            <a:r>
+              <a:rPr sz="1450" b="1" i="0">
+                <a:latin typeface="Arial"/>
+                <a:cs typeface="Arial"/>
+                <a:ea typeface="Arial"/>
+                <a:solidFill>
+                  <a:srgbClr val="21295C"/>
+                </a:solidFill>
+              </a:rPr>
+              <a:t>.</a:t>
+            </a:r>
+          </a:p>
+        </p:txBody>
+      </p:sp>
+      <p:sp>
+        <p:nvSpPr>
+          <p:cNvPr id="14" name="TextBox 13"/>
+          <p:cNvSpPr txBox="1"/>
+          <p:nvPr/>
+        </p:nvSpPr>
+        <p:spPr>
+          <a:xfrm>
+            <a:off x="502920" y="6419088"/>
+            <a:ext cx="11201400" cy="329184"/>
+          </a:xfrm>
+          <a:prstGeom prst="rect">
+            <a:avLst/>
+          </a:prstGeom>
+          <a:noFill/>
+        </p:spPr>
+        <p:txBody>
+          <a:bodyPr wrap="square" lIns="0" rIns="0" tIns="0" bIns="0" anchor="t">
+            <a:spAutoFit/>
+          </a:bodyPr>
+          <a:lstStyle/>
+          <a:p>
+            <a:pPr algn="l">
+              <a:lnSpc>
+                <a:spcPct val="102000"/>
+              </a:lnSpc>
+            </a:pPr>
+            <a:r>
+              <a:rPr sz="850" b="1" i="1">
+                <a:solidFill>
+                  <a:srgbClr val="065A82"/>
+                </a:solidFill>
+                <a:latin typeface="Arial"/>
+              </a:rPr>
+              <a:t>[1] </a:t>
+            </a:r>
+            <a:r>
+              <a:rPr sz="850" i="1">
+                <a:solidFill>
+                  <a:srgbClr val="1C7293"/>
+                </a:solidFill>
+                <a:latin typeface="Arial"/>
+                <a:hlinkClick r:id="rId5"/>
+              </a:rPr>
+              <a:t>Chroma Research — Context Rot</a:t>
+            </a:r>
+            <a:r>
+              <a:rPr sz="850" i="1">
+                <a:solidFill>
+                  <a:srgbClr val="1C7293"/>
+                </a:solidFill>
+                <a:latin typeface="Arial"/>
+              </a:rPr>
+              <a:t>   ·   </a:t>
+            </a:r>
+            <a:r>
+              <a:rPr sz="850" b="1" i="1">
+                <a:solidFill>
+                  <a:srgbClr val="065A82"/>
+                </a:solidFill>
+                <a:latin typeface="Arial"/>
+              </a:rPr>
+              <a:t>[2] </a:t>
+            </a:r>
+            <a:r>
+              <a:rPr sz="850" i="1">
+                <a:solidFill>
+                  <a:srgbClr val="1C7293"/>
+                </a:solidFill>
+                <a:latin typeface="Arial"/>
+                <a:hlinkClick r:id="rId6"/>
+              </a:rPr>
+              <a:t>Liu et al. 2023 — Lost in the Middle</a:t>
+            </a:r>
+            <a:r>
+              <a:rPr sz="850" i="1">
+                <a:solidFill>
+                  <a:srgbClr val="1C7293"/>
+                </a:solidFill>
+                <a:latin typeface="Arial"/>
+              </a:rPr>
+              <a:t>   ·   </a:t>
+            </a:r>
+            <a:r>
+              <a:rPr sz="850" b="1" i="1">
+                <a:solidFill>
+                  <a:srgbClr val="065A82"/>
+                </a:solidFill>
+                <a:latin typeface="Arial"/>
+              </a:rPr>
+              <a:t>[3] </a:t>
+            </a:r>
+            <a:r>
+              <a:rPr sz="850" i="1">
+                <a:solidFill>
+                  <a:srgbClr val="1C7293"/>
+                </a:solidFill>
+                <a:latin typeface="Arial"/>
+                <a:hlinkClick r:id="rId7"/>
+              </a:rPr>
+              <a:t>Anthropic — Effective Context Engineering</a:t>
+            </a:r>
+          </a:p>
+        </p:txBody>
+      </p:sp>
+      <p:sp>
+        <p:nvSpPr>
+          <p:cNvPr id="15" name="TextBox 14"/>
+          <p:cNvSpPr txBox="1"/>
+          <p:nvPr/>
+        </p:nvSpPr>
+        <p:spPr>
+          <a:xfrm>
+            <a:off x="11274552" y="6547104"/>
+            <a:ext cx="868680" cy="256032"/>
+          </a:xfrm>
+          <a:prstGeom prst="rect">
+            <a:avLst/>
+          </a:prstGeom>
+          <a:noFill/>
+        </p:spPr>
+        <p:txBody>
+          <a:bodyPr wrap="none" lIns="0" rIns="0" tIns="0" bIns="0">
+            <a:spAutoFit/>
+          </a:bodyPr>
+          <a:lstStyle/>
+          <a:p>
+            <a:pPr algn="r">
+              <a:lnSpc>
+                <a:spcPct val="100000"/>
+              </a:lnSpc>
+            </a:pPr>
+            <a:r>
+              <a:rPr sz="1000" i="1">
+                <a:solidFill>
+                  <a:srgbClr val="5B6678"/>
+                </a:solidFill>
+                <a:latin typeface="Arial"/>
+              </a:rPr>
+              <a:t>11 / 40</a:t>
             </a:r>
           </a:p>
         </p:txBody>
@@ -10644,6 +11490,45 @@
                 <a:latin typeface="Arial"/>
               </a:rPr>
               <a:t>Компактная форма всего раздела: роль ≠ точность, структура помогает разделить входы, CoT — точечный инструмент, контекст — минимальный. Для крупных архитектурных решений (RAG / FT / агент) — восьмишаговый чек-лист Раздела 5.</a:t>
+            </a:r>
+          </a:p>
+        </p:txBody>
+      </p:sp>
+      <p:sp>
+        <p:nvSpPr>
+          <p:cNvPr id="46" name="TextBox 45"/>
+          <p:cNvSpPr txBox="1"/>
+          <p:nvPr/>
+        </p:nvSpPr>
+        <p:spPr>
+          <a:xfrm>
+            <a:off x="11274552" y="6547104"/>
+            <a:ext cx="868680" cy="256032"/>
+          </a:xfrm>
+          <a:prstGeom prst="rect">
+            <a:avLst/>
+          </a:prstGeom>
+          <a:noFill/>
+        </p:spPr>
+        <p:txBody>
+          <a:bodyPr wrap="none" lIns="0" rIns="0" tIns="0" bIns="0">
+            <a:spAutoFit/>
+          </a:bodyPr>
+          <a:lstStyle/>
+          <a:p>
+            <a:pPr algn="r">
+              <a:lnSpc>
+                <a:spcPct val="100000"/>
+              </a:lnSpc>
+            </a:pPr>
+            <a:r>
+              <a:rPr sz="1000" i="1">
+                <a:solidFill>
+                  <a:srgbClr val="5B6678"/>
+                </a:solidFill>
+                <a:latin typeface="Arial"/>
+              </a:rPr>
+              <a:t>12 / 40</a:t>
             </a:r>
           </a:p>
         </p:txBody>
@@ -11630,6 +12515,45 @@
           </a:p>
         </p:txBody>
       </p:sp>
+      <p:sp>
+        <p:nvSpPr>
+          <p:cNvPr id="25" name="TextBox 24"/>
+          <p:cNvSpPr txBox="1"/>
+          <p:nvPr/>
+        </p:nvSpPr>
+        <p:spPr>
+          <a:xfrm>
+            <a:off x="11274552" y="6547104"/>
+            <a:ext cx="868680" cy="256032"/>
+          </a:xfrm>
+          <a:prstGeom prst="rect">
+            <a:avLst/>
+          </a:prstGeom>
+          <a:noFill/>
+        </p:spPr>
+        <p:txBody>
+          <a:bodyPr wrap="none" lIns="0" rIns="0" tIns="0" bIns="0">
+            <a:spAutoFit/>
+          </a:bodyPr>
+          <a:lstStyle/>
+          <a:p>
+            <a:pPr algn="r">
+              <a:lnSpc>
+                <a:spcPct val="100000"/>
+              </a:lnSpc>
+            </a:pPr>
+            <a:r>
+              <a:rPr sz="1000" i="1">
+                <a:solidFill>
+                  <a:srgbClr val="5B6678"/>
+                </a:solidFill>
+                <a:latin typeface="Arial"/>
+              </a:rPr>
+              <a:t>13 / 40</a:t>
+            </a:r>
+          </a:p>
+        </p:txBody>
+      </p:sp>
     </p:spTree>
   </p:cSld>
   <p:clrMapOvr>
@@ -12713,7 +13637,117 @@
                 </a:solidFill>
                 <a:latin typeface="Arial"/>
               </a:rPr>
-              <a:t>«Не знаю» / «см. источник X» — корректный ответ RAG-системы. Правдоподобный ответ при нерелевантном retrieval — это дефект, а не «лучше, чем ничего».</a:t>
+              <a:t>«Не знаю» / «см. источник X» — корректный ответ RAG-системы</a:t>
+            </a:r>
+            <a:r>
+              <a:rPr sz="780" baseline="30000" b="0" i="1">
+                <a:latin typeface="Arial"/>
+                <a:cs typeface="Arial"/>
+                <a:ea typeface="Arial"/>
+                <a:solidFill>
+                  <a:srgbClr val="1C7293"/>
+                </a:solidFill>
+              </a:rPr>
+              <a:t>[1]</a:t>
+            </a:r>
+            <a:r>
+              <a:rPr sz="1500" b="1" i="0">
+                <a:latin typeface="Arial"/>
+                <a:cs typeface="Arial"/>
+                <a:ea typeface="Arial"/>
+                <a:solidFill>
+                  <a:srgbClr val="21295C"/>
+                </a:solidFill>
+              </a:rPr>
+              <a:t>. Правдоподобный ответ при нерелевантном retrieval — это дефект, а не «лучше, чем ничего».</a:t>
+            </a:r>
+          </a:p>
+        </p:txBody>
+      </p:sp>
+      <p:sp>
+        <p:nvSpPr>
+          <p:cNvPr id="29" name="TextBox 28"/>
+          <p:cNvSpPr txBox="1"/>
+          <p:nvPr/>
+        </p:nvSpPr>
+        <p:spPr>
+          <a:xfrm>
+            <a:off x="502920" y="6419088"/>
+            <a:ext cx="11201400" cy="329184"/>
+          </a:xfrm>
+          <a:prstGeom prst="rect">
+            <a:avLst/>
+          </a:prstGeom>
+          <a:noFill/>
+        </p:spPr>
+        <p:txBody>
+          <a:bodyPr wrap="square" lIns="0" rIns="0" tIns="0" bIns="0" anchor="t">
+            <a:spAutoFit/>
+          </a:bodyPr>
+          <a:lstStyle/>
+          <a:p>
+            <a:pPr algn="l">
+              <a:lnSpc>
+                <a:spcPct val="102000"/>
+              </a:lnSpc>
+            </a:pPr>
+            <a:r>
+              <a:rPr sz="850" b="1" i="1">
+                <a:solidFill>
+                  <a:srgbClr val="065A82"/>
+                </a:solidFill>
+                <a:latin typeface="Arial"/>
+              </a:rPr>
+              <a:t>[1] </a:t>
+            </a:r>
+            <a:r>
+              <a:rPr sz="850" i="1">
+                <a:solidFill>
+                  <a:srgbClr val="1C7293"/>
+                </a:solidFill>
+                <a:latin typeface="Arial"/>
+                <a:hlinkClick r:id="rId6"/>
+              </a:rPr>
+              <a:t>Lewis et al. 2020 — Retrieval-Augmented Generation (NeurIPS)</a:t>
+            </a:r>
+          </a:p>
+        </p:txBody>
+      </p:sp>
+      <p:sp>
+        <p:nvSpPr>
+          <p:cNvPr id="30" name="TextBox 29"/>
+          <p:cNvSpPr txBox="1"/>
+          <p:nvPr/>
+        </p:nvSpPr>
+        <p:spPr>
+          <a:xfrm>
+            <a:off x="11274552" y="6547104"/>
+            <a:ext cx="868680" cy="256032"/>
+          </a:xfrm>
+          <a:prstGeom prst="rect">
+            <a:avLst/>
+          </a:prstGeom>
+          <a:noFill/>
+        </p:spPr>
+        <p:txBody>
+          <a:bodyPr wrap="none" lIns="0" rIns="0" tIns="0" bIns="0">
+            <a:spAutoFit/>
+          </a:bodyPr>
+          <a:lstStyle/>
+          <a:p>
+            <a:pPr algn="r">
+              <a:lnSpc>
+                <a:spcPct val="100000"/>
+              </a:lnSpc>
+            </a:pPr>
+            <a:r>
+              <a:rPr sz="1000" i="1">
+                <a:solidFill>
+                  <a:srgbClr val="5B6678"/>
+                </a:solidFill>
+                <a:latin typeface="Arial"/>
+              </a:rPr>
+              <a:t>14 / 40</a:t>
             </a:r>
           </a:p>
         </p:txBody>
@@ -12809,7 +13843,29 @@
                 </a:solidFill>
                 <a:latin typeface="Arial"/>
               </a:rPr>
-              <a:t>RAG оправдан при сильном сигнале по признакам ниже — и отсутствии блокеров со следующего слайда «когда НЕ RAG».</a:t>
+              <a:t>RAG оправдан при сильном сигнале по признакам ниже</a:t>
+            </a:r>
+            <a:r>
+              <a:rPr sz="754" baseline="30000" b="0" i="1">
+                <a:latin typeface="Arial"/>
+                <a:cs typeface="Arial"/>
+                <a:ea typeface="Arial"/>
+                <a:solidFill>
+                  <a:srgbClr val="1C7293"/>
+                </a:solidFill>
+              </a:rPr>
+              <a:t>[1]</a:t>
+            </a:r>
+            <a:r>
+              <a:rPr sz="1450" b="0" i="1">
+                <a:latin typeface="Arial"/>
+                <a:cs typeface="Arial"/>
+                <a:ea typeface="Arial"/>
+                <a:solidFill>
+                  <a:srgbClr val="065A82"/>
+                </a:solidFill>
+              </a:rPr>
+              <a:t> — и отсутствии блокеров со следующего слайда «когда НЕ RAG».</a:t>
             </a:r>
           </a:p>
         </p:txBody>
@@ -13550,7 +14606,145 @@
                 </a:solidFill>
                 <a:latin typeface="Arial"/>
               </a:rPr>
-              <a:t>Один признак — повод присмотреться, но не строить автоматически: сверьтесь с блокерами на следующем слайде.</a:t>
+              <a:t>Один признак — повод присмотреться</a:t>
+            </a:r>
+            <a:r>
+              <a:rPr sz="650" baseline="30000" b="0" i="1">
+                <a:latin typeface="Arial"/>
+                <a:cs typeface="Arial"/>
+                <a:ea typeface="Arial"/>
+                <a:solidFill>
+                  <a:srgbClr val="1C7293"/>
+                </a:solidFill>
+              </a:rPr>
+              <a:t>[2]</a:t>
+            </a:r>
+            <a:r>
+              <a:rPr sz="1250" b="1" i="0">
+                <a:latin typeface="Arial"/>
+                <a:cs typeface="Arial"/>
+                <a:ea typeface="Arial"/>
+                <a:solidFill>
+                  <a:srgbClr val="21295C"/>
+                </a:solidFill>
+              </a:rPr>
+              <a:t>, но не строить автоматически: сверьтесь с блокерами на следующем слайде.</a:t>
+            </a:r>
+          </a:p>
+        </p:txBody>
+      </p:sp>
+      <p:sp>
+        <p:nvSpPr>
+          <p:cNvPr id="22" name="TextBox 21"/>
+          <p:cNvSpPr txBox="1"/>
+          <p:nvPr/>
+        </p:nvSpPr>
+        <p:spPr>
+          <a:xfrm>
+            <a:off x="502920" y="6419088"/>
+            <a:ext cx="11201400" cy="329184"/>
+          </a:xfrm>
+          <a:prstGeom prst="rect">
+            <a:avLst/>
+          </a:prstGeom>
+          <a:noFill/>
+        </p:spPr>
+        <p:txBody>
+          <a:bodyPr wrap="square" lIns="0" rIns="0" tIns="0" bIns="0" anchor="t">
+            <a:spAutoFit/>
+          </a:bodyPr>
+          <a:lstStyle/>
+          <a:p>
+            <a:pPr algn="l">
+              <a:lnSpc>
+                <a:spcPct val="102000"/>
+              </a:lnSpc>
+            </a:pPr>
+            <a:r>
+              <a:rPr sz="850" b="1" i="1">
+                <a:solidFill>
+                  <a:srgbClr val="065A82"/>
+                </a:solidFill>
+                <a:latin typeface="Arial"/>
+              </a:rPr>
+              <a:t>[1] </a:t>
+            </a:r>
+            <a:r>
+              <a:rPr sz="850" i="1">
+                <a:solidFill>
+                  <a:srgbClr val="1C7293"/>
+                </a:solidFill>
+                <a:latin typeface="Arial"/>
+                <a:hlinkClick r:id="rId4"/>
+              </a:rPr>
+              <a:t>IBM — RAG vs Fine-Tuning (вендор-нейтрально)</a:t>
+            </a:r>
+            <a:r>
+              <a:rPr sz="850" i="1">
+                <a:solidFill>
+                  <a:srgbClr val="1C7293"/>
+                </a:solidFill>
+                <a:latin typeface="Arial"/>
+              </a:rPr>
+              <a:t>   ·   </a:t>
+            </a:r>
+            <a:r>
+              <a:rPr sz="850" b="1" i="1">
+                <a:solidFill>
+                  <a:srgbClr val="065A82"/>
+                </a:solidFill>
+                <a:latin typeface="Arial"/>
+              </a:rPr>
+              <a:t>[2] </a:t>
+            </a:r>
+            <a:r>
+              <a:rPr sz="850" i="1">
+                <a:solidFill>
+                  <a:srgbClr val="1C7293"/>
+                </a:solidFill>
+                <a:latin typeface="Arial"/>
+                <a:hlinkClick r:id="rId5"/>
+              </a:rPr>
+              <a:t>U-NIAH — RAG win-rate выше у меньших моделей</a:t>
+            </a:r>
+          </a:p>
+        </p:txBody>
+      </p:sp>
+      <p:sp>
+        <p:nvSpPr>
+          <p:cNvPr id="23" name="TextBox 22"/>
+          <p:cNvSpPr txBox="1"/>
+          <p:nvPr/>
+        </p:nvSpPr>
+        <p:spPr>
+          <a:xfrm>
+            <a:off x="11274552" y="6547104"/>
+            <a:ext cx="868680" cy="256032"/>
+          </a:xfrm>
+          <a:prstGeom prst="rect">
+            <a:avLst/>
+          </a:prstGeom>
+          <a:noFill/>
+        </p:spPr>
+        <p:txBody>
+          <a:bodyPr wrap="none" lIns="0" rIns="0" tIns="0" bIns="0">
+            <a:spAutoFit/>
+          </a:bodyPr>
+          <a:lstStyle/>
+          <a:p>
+            <a:pPr algn="r">
+              <a:lnSpc>
+                <a:spcPct val="100000"/>
+              </a:lnSpc>
+            </a:pPr>
+            <a:r>
+              <a:rPr sz="1000" i="1">
+                <a:solidFill>
+                  <a:srgbClr val="5B6678"/>
+                </a:solidFill>
+                <a:latin typeface="Arial"/>
+              </a:rPr>
+              <a:t>15 / 40</a:t>
             </a:r>
           </a:p>
         </p:txBody>
@@ -14114,6 +15308,17 @@
               </a:rPr>
               <a:t>Фиксированная политика / значение</a:t>
             </a:r>
+            <a:r>
+              <a:rPr sz="780" baseline="30000" b="0" i="1">
+                <a:latin typeface="Arial"/>
+                <a:cs typeface="Arial"/>
+                <a:ea typeface="Arial"/>
+                <a:solidFill>
+                  <a:srgbClr val="1C7293"/>
+                </a:solidFill>
+              </a:rPr>
+              <a:t>[2]</a:t>
+            </a:r>
           </a:p>
         </p:txBody>
       </p:sp>
@@ -14549,7 +15754,145 @@
                 </a:solidFill>
                 <a:latin typeface="Arial"/>
               </a:rPr>
-              <a:t>RAG избыточен, если выполнен ЛЮБОЙ из трёх: (а) корпус влезает в окно и стабилен, (б) задача сводится к фиксированному значению, (в) знание уже доступно напрямую и живьём через инструмент. «Прямой вызов вернёт данные на момент запроса; RAG-индекс — на момент последней индексации.»</a:t>
+              <a:t>RAG избыточен, если выполнен ЛЮБОЙ из трёх</a:t>
+            </a:r>
+            <a:r>
+              <a:rPr sz="702" baseline="30000" b="0" i="1">
+                <a:latin typeface="Arial"/>
+                <a:cs typeface="Arial"/>
+                <a:ea typeface="Arial"/>
+                <a:solidFill>
+                  <a:srgbClr val="1C7293"/>
+                </a:solidFill>
+              </a:rPr>
+              <a:t>[1]</a:t>
+            </a:r>
+            <a:r>
+              <a:rPr sz="1350" b="1" i="0">
+                <a:latin typeface="Arial"/>
+                <a:cs typeface="Arial"/>
+                <a:ea typeface="Arial"/>
+                <a:solidFill>
+                  <a:srgbClr val="21295C"/>
+                </a:solidFill>
+              </a:rPr>
+              <a:t>: (а) корпус влезает в окно и стабилен, (б) задача сводится к фиксированному значению, (в) знание уже доступно напрямую и живьём через инструмент. «Прямой вызов вернёт данные на момент запроса; RAG-индекс — на момент последней индексации.»</a:t>
+            </a:r>
+          </a:p>
+        </p:txBody>
+      </p:sp>
+      <p:sp>
+        <p:nvSpPr>
+          <p:cNvPr id="27" name="TextBox 26"/>
+          <p:cNvSpPr txBox="1"/>
+          <p:nvPr/>
+        </p:nvSpPr>
+        <p:spPr>
+          <a:xfrm>
+            <a:off x="502920" y="6419088"/>
+            <a:ext cx="11201400" cy="329184"/>
+          </a:xfrm>
+          <a:prstGeom prst="rect">
+            <a:avLst/>
+          </a:prstGeom>
+          <a:noFill/>
+        </p:spPr>
+        <p:txBody>
+          <a:bodyPr wrap="square" lIns="0" rIns="0" tIns="0" bIns="0" anchor="t">
+            <a:spAutoFit/>
+          </a:bodyPr>
+          <a:lstStyle/>
+          <a:p>
+            <a:pPr algn="l">
+              <a:lnSpc>
+                <a:spcPct val="102000"/>
+              </a:lnSpc>
+            </a:pPr>
+            <a:r>
+              <a:rPr sz="850" b="1" i="1">
+                <a:solidFill>
+                  <a:srgbClr val="065A82"/>
+                </a:solidFill>
+                <a:latin typeface="Arial"/>
+              </a:rPr>
+              <a:t>[1] </a:t>
+            </a:r>
+            <a:r>
+              <a:rPr sz="850" i="1">
+                <a:solidFill>
+                  <a:srgbClr val="1C7293"/>
+                </a:solidFill>
+                <a:latin typeface="Arial"/>
+                <a:hlinkClick r:id="rId6"/>
+              </a:rPr>
+              <a:t>Red Hat — RAG vs Fine-Tuning (когда не RAG)</a:t>
+            </a:r>
+            <a:r>
+              <a:rPr sz="850" i="1">
+                <a:solidFill>
+                  <a:srgbClr val="1C7293"/>
+                </a:solidFill>
+                <a:latin typeface="Arial"/>
+              </a:rPr>
+              <a:t>   ·   </a:t>
+            </a:r>
+            <a:r>
+              <a:rPr sz="850" b="1" i="1">
+                <a:solidFill>
+                  <a:srgbClr val="065A82"/>
+                </a:solidFill>
+                <a:latin typeface="Arial"/>
+              </a:rPr>
+              <a:t>[2] </a:t>
+            </a:r>
+            <a:r>
+              <a:rPr sz="850" i="1">
+                <a:solidFill>
+                  <a:srgbClr val="1C7293"/>
+                </a:solidFill>
+                <a:latin typeface="Arial"/>
+                <a:hlinkClick r:id="rId7"/>
+              </a:rPr>
+              <a:t>McCarthy Tétrault — Air Canada («генерация поверх фикс. политики»)</a:t>
+            </a:r>
+          </a:p>
+        </p:txBody>
+      </p:sp>
+      <p:sp>
+        <p:nvSpPr>
+          <p:cNvPr id="28" name="TextBox 27"/>
+          <p:cNvSpPr txBox="1"/>
+          <p:nvPr/>
+        </p:nvSpPr>
+        <p:spPr>
+          <a:xfrm>
+            <a:off x="11274552" y="6547104"/>
+            <a:ext cx="868680" cy="256032"/>
+          </a:xfrm>
+          <a:prstGeom prst="rect">
+            <a:avLst/>
+          </a:prstGeom>
+          <a:noFill/>
+        </p:spPr>
+        <p:txBody>
+          <a:bodyPr wrap="none" lIns="0" rIns="0" tIns="0" bIns="0">
+            <a:spAutoFit/>
+          </a:bodyPr>
+          <a:lstStyle/>
+          <a:p>
+            <a:pPr algn="r">
+              <a:lnSpc>
+                <a:spcPct val="100000"/>
+              </a:lnSpc>
+            </a:pPr>
+            <a:r>
+              <a:rPr sz="1000" i="1">
+                <a:solidFill>
+                  <a:srgbClr val="5B6678"/>
+                </a:solidFill>
+                <a:latin typeface="Arial"/>
+              </a:rPr>
+              <a:t>16 / 40</a:t>
             </a:r>
           </a:p>
         </p:txBody>
@@ -14693,7 +16036,29 @@
                 </a:solidFill>
                 <a:latin typeface="Arial"/>
               </a:rPr>
-              <a:t>«Вернул что-то» ≠ «вернул правильное». У RAG нет сигнала «не нашёл» — он всегда отдаёт k ближайших, даже нерелевантных.</a:t>
+              <a:t>«Вернул что-то» ≠ «вернул правильное»</a:t>
+            </a:r>
+            <a:r>
+              <a:rPr sz="780" baseline="30000" b="0" i="1">
+                <a:latin typeface="Arial"/>
+                <a:cs typeface="Arial"/>
+                <a:ea typeface="Arial"/>
+                <a:solidFill>
+                  <a:srgbClr val="1C7293"/>
+                </a:solidFill>
+              </a:rPr>
+              <a:t>[1,2]</a:t>
+            </a:r>
+            <a:r>
+              <a:rPr sz="1500" b="1" i="0">
+                <a:latin typeface="Arial"/>
+                <a:cs typeface="Arial"/>
+                <a:ea typeface="Arial"/>
+                <a:solidFill>
+                  <a:srgbClr val="21295C"/>
+                </a:solidFill>
+              </a:rPr>
+              <a:t>. У RAG нет сигнала «не нашёл» — он всегда отдаёт k ближайших, даже нерелевантных.</a:t>
             </a:r>
           </a:p>
         </p:txBody>
@@ -15206,6 +16571,17 @@
               </a:rPr>
               <a:t>Air Canada — разбор архитектуры</a:t>
             </a:r>
+            <a:r>
+              <a:rPr sz="832" baseline="30000" b="0" i="1">
+                <a:latin typeface="Arial"/>
+                <a:cs typeface="Arial"/>
+                <a:ea typeface="Arial"/>
+                <a:solidFill>
+                  <a:srgbClr val="1C7293"/>
+                </a:solidFill>
+              </a:rPr>
+              <a:t>[3]</a:t>
+            </a:r>
           </a:p>
         </p:txBody>
       </p:sp>
@@ -15424,17 +16800,131 @@
           <a:p>
             <a:pPr algn="l">
               <a:lnSpc>
+                <a:spcPct val="102000"/>
+              </a:lnSpc>
+            </a:pPr>
+            <a:r>
+              <a:rPr sz="850" b="1" i="1">
+                <a:solidFill>
+                  <a:srgbClr val="065A82"/>
+                </a:solidFill>
+                <a:latin typeface="Arial"/>
+              </a:rPr>
+              <a:t>[1] </a:t>
+            </a:r>
+            <a:r>
+              <a:rPr sz="850" i="1">
+                <a:solidFill>
+                  <a:srgbClr val="1C7293"/>
+                </a:solidFill>
+                <a:latin typeface="Arial"/>
+                <a:hlinkClick r:id="rId4"/>
+              </a:rPr>
+              <a:t>Barnett et al. 2024 — Seven Failure Points (RAG)</a:t>
+            </a:r>
+            <a:r>
+              <a:rPr sz="850" i="1">
+                <a:solidFill>
+                  <a:srgbClr val="1C7293"/>
+                </a:solidFill>
+                <a:latin typeface="Arial"/>
+              </a:rPr>
+              <a:t>   ·   </a:t>
+            </a:r>
+            <a:r>
+              <a:rPr sz="850" b="1" i="1">
+                <a:solidFill>
+                  <a:srgbClr val="065A82"/>
+                </a:solidFill>
+                <a:latin typeface="Arial"/>
+              </a:rPr>
+              <a:t>[2] </a:t>
+            </a:r>
+            <a:r>
+              <a:rPr sz="850" i="1">
+                <a:solidFill>
+                  <a:srgbClr val="1C7293"/>
+                </a:solidFill>
+                <a:latin typeface="Arial"/>
+                <a:hlinkClick r:id="rId5"/>
+              </a:rPr>
+              <a:t>Kore.ai — Seven RAG Engineering Failure Points</a:t>
+            </a:r>
+            <a:r>
+              <a:rPr sz="850" i="1">
+                <a:solidFill>
+                  <a:srgbClr val="1C7293"/>
+                </a:solidFill>
+                <a:latin typeface="Arial"/>
+              </a:rPr>
+              <a:t>   ·   </a:t>
+            </a:r>
+            <a:r>
+              <a:rPr sz="850" b="1" i="1">
+                <a:solidFill>
+                  <a:srgbClr val="065A82"/>
+                </a:solidFill>
+                <a:latin typeface="Arial"/>
+              </a:rPr>
+              <a:t>[3] </a:t>
+            </a:r>
+            <a:r>
+              <a:rPr sz="850" i="1">
+                <a:solidFill>
+                  <a:srgbClr val="1C7293"/>
+                </a:solidFill>
+                <a:latin typeface="Arial"/>
+                <a:hlinkClick r:id="rId6"/>
+              </a:rPr>
+              <a:t>McCarthy Tétrault — Air Canada (отказ grounding)</a:t>
+            </a:r>
+            <a:r>
+              <a:rPr sz="850" i="1">
+                <a:solidFill>
+                  <a:srgbClr val="5B6678"/>
+                </a:solidFill>
+                <a:latin typeface="Arial"/>
+              </a:rPr>
+              <a:t>   ·   Документированные классы провалов (Barnett et al. 2024; Air Canada — McCarthy Tétrault 2024). Кейсы — illustrative.</a:t>
+            </a:r>
+          </a:p>
+        </p:txBody>
+      </p:sp>
+      <p:sp>
+        <p:nvSpPr>
+          <p:cNvPr id="25" name="TextBox 24"/>
+          <p:cNvSpPr txBox="1"/>
+          <p:nvPr/>
+        </p:nvSpPr>
+        <p:spPr>
+          <a:xfrm>
+            <a:off x="11274552" y="6547104"/>
+            <a:ext cx="868680" cy="256032"/>
+          </a:xfrm>
+          <a:prstGeom prst="rect">
+            <a:avLst/>
+          </a:prstGeom>
+          <a:noFill/>
+        </p:spPr>
+        <p:txBody>
+          <a:bodyPr wrap="none" lIns="0" rIns="0" tIns="0" bIns="0">
+            <a:spAutoFit/>
+          </a:bodyPr>
+          <a:lstStyle/>
+          <a:p>
+            <a:pPr algn="r">
+              <a:lnSpc>
                 <a:spcPct val="100000"/>
               </a:lnSpc>
             </a:pPr>
             <a:r>
-              <a:rPr sz="1200" b="0" i="1">
-                <a:solidFill>
-                  <a:srgbClr val="1C7293"/>
-                </a:solidFill>
-                <a:latin typeface="Arial"/>
-              </a:rPr>
-              <a:t>Документированные классы провалов (Barnett et al. 2024; Air Canada — McCarthy Tétrault 2024). Кейсы — illustrative.</a:t>
+              <a:rPr sz="1000" i="1">
+                <a:solidFill>
+                  <a:srgbClr val="5B6678"/>
+                </a:solidFill>
+                <a:latin typeface="Arial"/>
+              </a:rPr>
+              <a:t>17 / 40</a:t>
             </a:r>
           </a:p>
         </p:txBody>
@@ -16421,6 +17911,45 @@
           </a:p>
         </p:txBody>
       </p:sp>
+      <p:sp>
+        <p:nvSpPr>
+          <p:cNvPr id="25" name="TextBox 24"/>
+          <p:cNvSpPr txBox="1"/>
+          <p:nvPr/>
+        </p:nvSpPr>
+        <p:spPr>
+          <a:xfrm>
+            <a:off x="11274552" y="6547104"/>
+            <a:ext cx="868680" cy="256032"/>
+          </a:xfrm>
+          <a:prstGeom prst="rect">
+            <a:avLst/>
+          </a:prstGeom>
+          <a:noFill/>
+        </p:spPr>
+        <p:txBody>
+          <a:bodyPr wrap="none" lIns="0" rIns="0" tIns="0" bIns="0">
+            <a:spAutoFit/>
+          </a:bodyPr>
+          <a:lstStyle/>
+          <a:p>
+            <a:pPr algn="r">
+              <a:lnSpc>
+                <a:spcPct val="100000"/>
+              </a:lnSpc>
+            </a:pPr>
+            <a:r>
+              <a:rPr sz="1000" i="1">
+                <a:solidFill>
+                  <a:srgbClr val="5B6678"/>
+                </a:solidFill>
+                <a:latin typeface="Arial"/>
+              </a:rPr>
+              <a:t>18 / 40</a:t>
+            </a:r>
+          </a:p>
+        </p:txBody>
+      </p:sp>
     </p:spTree>
   </p:cSld>
   <p:clrMapOvr>
@@ -17474,7 +19003,117 @@
                 </a:solidFill>
                 <a:latin typeface="Arial"/>
               </a:rPr>
-              <a:t>Промпт/RAG = «что показать модели».  Fine-tuning = «изменить саму модель». На практике «дообучить» почти всегда означает LoRA/PEFT, а не переобучение всех весов (следующий слайд).</a:t>
+              <a:t>Промпт/RAG = «что показать модели».  Fine-tuning = «изменить саму модель»</a:t>
+            </a:r>
+            <a:r>
+              <a:rPr sz="728" baseline="30000" b="0" i="1">
+                <a:latin typeface="Arial"/>
+                <a:cs typeface="Arial"/>
+                <a:ea typeface="Arial"/>
+                <a:solidFill>
+                  <a:srgbClr val="1C7293"/>
+                </a:solidFill>
+              </a:rPr>
+              <a:t>[1]</a:t>
+            </a:r>
+            <a:r>
+              <a:rPr sz="1400" b="1" i="0">
+                <a:latin typeface="Arial"/>
+                <a:cs typeface="Arial"/>
+                <a:ea typeface="Arial"/>
+                <a:solidFill>
+                  <a:srgbClr val="21295C"/>
+                </a:solidFill>
+              </a:rPr>
+              <a:t>. На практике «дообучить» почти всегда означает LoRA/PEFT, а не переобучение всех весов (следующий слайд).</a:t>
+            </a:r>
+          </a:p>
+        </p:txBody>
+      </p:sp>
+      <p:sp>
+        <p:nvSpPr>
+          <p:cNvPr id="28" name="TextBox 27"/>
+          <p:cNvSpPr txBox="1"/>
+          <p:nvPr/>
+        </p:nvSpPr>
+        <p:spPr>
+          <a:xfrm>
+            <a:off x="502920" y="6419088"/>
+            <a:ext cx="11201400" cy="329184"/>
+          </a:xfrm>
+          <a:prstGeom prst="rect">
+            <a:avLst/>
+          </a:prstGeom>
+          <a:noFill/>
+        </p:spPr>
+        <p:txBody>
+          <a:bodyPr wrap="square" lIns="0" rIns="0" tIns="0" bIns="0" anchor="t">
+            <a:spAutoFit/>
+          </a:bodyPr>
+          <a:lstStyle/>
+          <a:p>
+            <a:pPr algn="l">
+              <a:lnSpc>
+                <a:spcPct val="102000"/>
+              </a:lnSpc>
+            </a:pPr>
+            <a:r>
+              <a:rPr sz="850" b="1" i="1">
+                <a:solidFill>
+                  <a:srgbClr val="065A82"/>
+                </a:solidFill>
+                <a:latin typeface="Arial"/>
+              </a:rPr>
+              <a:t>[1] </a:t>
+            </a:r>
+            <a:r>
+              <a:rPr sz="850" i="1">
+                <a:solidFill>
+                  <a:srgbClr val="1C7293"/>
+                </a:solidFill>
+                <a:latin typeface="Arial"/>
+                <a:hlinkClick r:id="rId6"/>
+              </a:rPr>
+              <a:t>IBM — RAG vs Fine-Tuning (fine-tuning меняет веса)</a:t>
+            </a:r>
+          </a:p>
+        </p:txBody>
+      </p:sp>
+      <p:sp>
+        <p:nvSpPr>
+          <p:cNvPr id="29" name="TextBox 28"/>
+          <p:cNvSpPr txBox="1"/>
+          <p:nvPr/>
+        </p:nvSpPr>
+        <p:spPr>
+          <a:xfrm>
+            <a:off x="11274552" y="6547104"/>
+            <a:ext cx="868680" cy="256032"/>
+          </a:xfrm>
+          <a:prstGeom prst="rect">
+            <a:avLst/>
+          </a:prstGeom>
+          <a:noFill/>
+        </p:spPr>
+        <p:txBody>
+          <a:bodyPr wrap="none" lIns="0" rIns="0" tIns="0" bIns="0">
+            <a:spAutoFit/>
+          </a:bodyPr>
+          <a:lstStyle/>
+          <a:p>
+            <a:pPr algn="r">
+              <a:lnSpc>
+                <a:spcPct val="100000"/>
+              </a:lnSpc>
+            </a:pPr>
+            <a:r>
+              <a:rPr sz="1000" i="1">
+                <a:solidFill>
+                  <a:srgbClr val="5B6678"/>
+                </a:solidFill>
+                <a:latin typeface="Arial"/>
+              </a:rPr>
+              <a:t>19 / 40</a:t>
             </a:r>
           </a:p>
         </p:txBody>
@@ -17790,6 +19429,45 @@
           </a:p>
         </p:txBody>
       </p:sp>
+      <p:sp>
+        <p:nvSpPr>
+          <p:cNvPr id="9" name="TextBox 8"/>
+          <p:cNvSpPr txBox="1"/>
+          <p:nvPr/>
+        </p:nvSpPr>
+        <p:spPr>
+          <a:xfrm>
+            <a:off x="11274552" y="6547104"/>
+            <a:ext cx="868680" cy="256032"/>
+          </a:xfrm>
+          <a:prstGeom prst="rect">
+            <a:avLst/>
+          </a:prstGeom>
+          <a:noFill/>
+        </p:spPr>
+        <p:txBody>
+          <a:bodyPr wrap="none" lIns="0" rIns="0" tIns="0" bIns="0">
+            <a:spAutoFit/>
+          </a:bodyPr>
+          <a:lstStyle/>
+          <a:p>
+            <a:pPr algn="r">
+              <a:lnSpc>
+                <a:spcPct val="100000"/>
+              </a:lnSpc>
+            </a:pPr>
+            <a:r>
+              <a:rPr sz="1000" i="1">
+                <a:solidFill>
+                  <a:srgbClr val="5B6678"/>
+                </a:solidFill>
+                <a:latin typeface="Arial"/>
+              </a:rPr>
+              <a:t>2 / 40</a:t>
+            </a:r>
+          </a:p>
+        </p:txBody>
+      </p:sp>
     </p:spTree>
   </p:cSld>
   <p:clrMapOvr>
@@ -17881,7 +19559,29 @@
                 </a:solidFill>
                 <a:latin typeface="Arial"/>
               </a:rPr>
-              <a:t>PEFT — базовые веса замораживаются, обучается лишь небольшой набор адаптеров. LoRA — низкоранговые матрицы-адаптеры; QLoRA — то же поверх квантованной модели.</a:t>
+              <a:t>PEFT — базовые веса замораживаются, обучается лишь небольшой набор адаптеров. LoRA — низкоранговые матрицы-адаптеры; QLoRA — то же поверх квантованной модели</a:t>
+            </a:r>
+            <a:r>
+              <a:rPr sz="728" baseline="30000" b="0" i="1">
+                <a:latin typeface="Arial"/>
+                <a:cs typeface="Arial"/>
+                <a:ea typeface="Arial"/>
+                <a:solidFill>
+                  <a:srgbClr val="1C7293"/>
+                </a:solidFill>
+              </a:rPr>
+              <a:t>[1,2]</a:t>
+            </a:r>
+            <a:r>
+              <a:rPr sz="1400" b="0" i="1">
+                <a:latin typeface="Arial"/>
+                <a:cs typeface="Arial"/>
+                <a:ea typeface="Arial"/>
+                <a:solidFill>
+                  <a:srgbClr val="065A82"/>
+                </a:solidFill>
+              </a:rPr>
+              <a:t>.</a:t>
             </a:r>
           </a:p>
         </p:txBody>
@@ -18785,6 +20485,17 @@
               </a:rPr>
               <a:t>моделей с тегом PEFT — это LoRA</a:t>
             </a:r>
+            <a:r>
+              <a:rPr sz="728" baseline="30000" b="0" i="1">
+                <a:latin typeface="Arial"/>
+                <a:cs typeface="Arial"/>
+                <a:ea typeface="Arial"/>
+                <a:solidFill>
+                  <a:srgbClr val="1C7293"/>
+                </a:solidFill>
+              </a:rPr>
+              <a:t>[3]</a:t>
+            </a:r>
           </a:p>
         </p:txBody>
       </p:sp>
@@ -18938,17 +20649,131 @@
           <a:p>
             <a:pPr algn="l">
               <a:lnSpc>
+                <a:spcPct val="102000"/>
+              </a:lnSpc>
+            </a:pPr>
+            <a:r>
+              <a:rPr sz="850" b="1" i="1">
+                <a:solidFill>
+                  <a:srgbClr val="065A82"/>
+                </a:solidFill>
+                <a:latin typeface="Arial"/>
+              </a:rPr>
+              <a:t>[1] </a:t>
+            </a:r>
+            <a:r>
+              <a:rPr sz="850" i="1">
+                <a:solidFill>
+                  <a:srgbClr val="1C7293"/>
+                </a:solidFill>
+                <a:latin typeface="Arial"/>
+                <a:hlinkClick r:id="rId3"/>
+              </a:rPr>
+              <a:t>Hu et al. 2021 — LoRA</a:t>
+            </a:r>
+            <a:r>
+              <a:rPr sz="850" i="1">
+                <a:solidFill>
+                  <a:srgbClr val="1C7293"/>
+                </a:solidFill>
+                <a:latin typeface="Arial"/>
+              </a:rPr>
+              <a:t>   ·   </a:t>
+            </a:r>
+            <a:r>
+              <a:rPr sz="850" b="1" i="1">
+                <a:solidFill>
+                  <a:srgbClr val="065A82"/>
+                </a:solidFill>
+                <a:latin typeface="Arial"/>
+              </a:rPr>
+              <a:t>[2] </a:t>
+            </a:r>
+            <a:r>
+              <a:rPr sz="850" i="1">
+                <a:solidFill>
+                  <a:srgbClr val="1C7293"/>
+                </a:solidFill>
+                <a:latin typeface="Arial"/>
+                <a:hlinkClick r:id="rId4"/>
+              </a:rPr>
+              <a:t>Dettmers et al. 2023 — QLoRA</a:t>
+            </a:r>
+            <a:r>
+              <a:rPr sz="850" i="1">
+                <a:solidFill>
+                  <a:srgbClr val="1C7293"/>
+                </a:solidFill>
+                <a:latin typeface="Arial"/>
+              </a:rPr>
+              <a:t>   ·   </a:t>
+            </a:r>
+            <a:r>
+              <a:rPr sz="850" b="1" i="1">
+                <a:solidFill>
+                  <a:srgbClr val="065A82"/>
+                </a:solidFill>
+                <a:latin typeface="Arial"/>
+              </a:rPr>
+              <a:t>[3] </a:t>
+            </a:r>
+            <a:r>
+              <a:rPr sz="850" i="1">
+                <a:solidFill>
+                  <a:srgbClr val="1C7293"/>
+                </a:solidFill>
+                <a:latin typeface="Arial"/>
+                <a:hlinkClick r:id="rId5"/>
+              </a:rPr>
+              <a:t>HF PEFT — Beyond LoRA (LoRA 98,4% из 20 834 карточек)</a:t>
+            </a:r>
+            <a:r>
+              <a:rPr sz="850" i="1">
+                <a:solidFill>
+                  <a:srgbClr val="5B6678"/>
+                </a:solidFill>
+                <a:latin typeface="Arial"/>
+              </a:rPr>
+              <a:t>   ·   HF PEFT team, «Beyond LoRA?», июнь 2026. Полный спектр методов (SFT / DPO / RFT) — в главе.</a:t>
+            </a:r>
+          </a:p>
+        </p:txBody>
+      </p:sp>
+      <p:sp>
+        <p:nvSpPr>
+          <p:cNvPr id="29" name="TextBox 28"/>
+          <p:cNvSpPr txBox="1"/>
+          <p:nvPr/>
+        </p:nvSpPr>
+        <p:spPr>
+          <a:xfrm>
+            <a:off x="11274552" y="6547104"/>
+            <a:ext cx="868680" cy="256032"/>
+          </a:xfrm>
+          <a:prstGeom prst="rect">
+            <a:avLst/>
+          </a:prstGeom>
+          <a:noFill/>
+        </p:spPr>
+        <p:txBody>
+          <a:bodyPr wrap="none" lIns="0" rIns="0" tIns="0" bIns="0">
+            <a:spAutoFit/>
+          </a:bodyPr>
+          <a:lstStyle/>
+          <a:p>
+            <a:pPr algn="r">
+              <a:lnSpc>
                 <a:spcPct val="100000"/>
               </a:lnSpc>
             </a:pPr>
             <a:r>
-              <a:rPr sz="1200" b="0" i="1">
-                <a:solidFill>
-                  <a:srgbClr val="1C7293"/>
-                </a:solidFill>
-                <a:latin typeface="Arial"/>
-              </a:rPr>
-              <a:t>HF PEFT team, «Beyond LoRA?», июнь 2026. Полный спектр методов (SFT / DPO / RFT) — в главе.</a:t>
+              <a:rPr sz="1000" i="1">
+                <a:solidFill>
+                  <a:srgbClr val="5B6678"/>
+                </a:solidFill>
+                <a:latin typeface="Arial"/>
+              </a:rPr>
+              <a:t>20 / 40</a:t>
             </a:r>
           </a:p>
         </p:txBody>
@@ -19005,7 +20830,29 @@
                 </a:solidFill>
                 <a:latin typeface="Arial"/>
               </a:rPr>
-              <a:t>Fine-tuning не умер — он сузился до поведения.</a:t>
+              <a:t>Fine-tuning не умер</a:t>
+            </a:r>
+            <a:r>
+              <a:rPr sz="1300" baseline="30000" b="0" i="1">
+                <a:latin typeface="Arial"/>
+                <a:cs typeface="Arial"/>
+                <a:ea typeface="Arial"/>
+                <a:solidFill>
+                  <a:srgbClr val="1C7293"/>
+                </a:solidFill>
+              </a:rPr>
+              <a:t>[1]</a:t>
+            </a:r>
+            <a:r>
+              <a:rPr sz="2500" b="1" i="0">
+                <a:latin typeface="Arial"/>
+                <a:cs typeface="Arial"/>
+                <a:ea typeface="Arial"/>
+                <a:solidFill>
+                  <a:srgbClr val="21295C"/>
+                </a:solidFill>
+              </a:rPr>
+              <a:t> — он сузился до поведения.</a:t>
             </a:r>
           </a:p>
         </p:txBody>
@@ -19305,7 +21152,29 @@
                 </a:solidFill>
                 <a:latin typeface="Arial"/>
               </a:rPr>
-              <a:t>поведение · стиль · формат вывода · следование политике. Дистилляция — отдельная техника, часто применяемая в связке с дообучением.</a:t>
+              <a:t>поведение · стиль · формат вывода · следование политике. Дистилляция — отдельная техника, часто применяемая в связке с дообучением</a:t>
+            </a:r>
+            <a:r>
+              <a:rPr sz="650" baseline="30000" b="0" i="1">
+                <a:latin typeface="Arial"/>
+                <a:cs typeface="Arial"/>
+                <a:ea typeface="Arial"/>
+                <a:solidFill>
+                  <a:srgbClr val="1C7293"/>
+                </a:solidFill>
+              </a:rPr>
+              <a:t>[2,3]</a:t>
+            </a:r>
+            <a:r>
+              <a:rPr sz="1250" b="0" i="0">
+                <a:latin typeface="Arial"/>
+                <a:cs typeface="Arial"/>
+                <a:ea typeface="Arial"/>
+                <a:solidFill>
+                  <a:srgbClr val="21295C"/>
+                </a:solidFill>
+              </a:rPr>
+              <a:t>.</a:t>
             </a:r>
           </a:p>
         </p:txBody>
@@ -20710,6 +22579,150 @@
                 <a:latin typeface="Arial"/>
               </a:rPr>
               <a:t>Реальный вопрос 2026 — не «RAG или fine-tuning», а «что здесь знание (→ RAG), что поведение (→ PEFT), что детерминировано (→ код)». Гибрид — норма там, где есть И проблема знания, И проблема поведения.</a:t>
+            </a:r>
+          </a:p>
+        </p:txBody>
+      </p:sp>
+      <p:sp>
+        <p:nvSpPr>
+          <p:cNvPr id="44" name="TextBox 43"/>
+          <p:cNvSpPr txBox="1"/>
+          <p:nvPr/>
+        </p:nvSpPr>
+        <p:spPr>
+          <a:xfrm>
+            <a:off x="502920" y="6419088"/>
+            <a:ext cx="11201400" cy="329184"/>
+          </a:xfrm>
+          <a:prstGeom prst="rect">
+            <a:avLst/>
+          </a:prstGeom>
+          <a:noFill/>
+        </p:spPr>
+        <p:txBody>
+          <a:bodyPr wrap="square" lIns="0" rIns="0" tIns="0" bIns="0" anchor="t">
+            <a:spAutoFit/>
+          </a:bodyPr>
+          <a:lstStyle/>
+          <a:p>
+            <a:pPr algn="l">
+              <a:lnSpc>
+                <a:spcPct val="102000"/>
+              </a:lnSpc>
+            </a:pPr>
+            <a:r>
+              <a:rPr sz="850" b="1" i="1">
+                <a:solidFill>
+                  <a:srgbClr val="065A82"/>
+                </a:solidFill>
+                <a:latin typeface="Arial"/>
+              </a:rPr>
+              <a:t>[1] </a:t>
+            </a:r>
+            <a:r>
+              <a:rPr sz="850" i="1">
+                <a:solidFill>
+                  <a:srgbClr val="1C7293"/>
+                </a:solidFill>
+                <a:latin typeface="Arial"/>
+                <a:hlinkClick r:id="rId5"/>
+              </a:rPr>
+              <a:t>BigData Boutique — Fine-Tuning When RAG Isn't Enough</a:t>
+            </a:r>
+            <a:r>
+              <a:rPr sz="850" i="1">
+                <a:solidFill>
+                  <a:srgbClr val="1C7293"/>
+                </a:solidFill>
+                <a:latin typeface="Arial"/>
+              </a:rPr>
+              <a:t>   ·   </a:t>
+            </a:r>
+            <a:r>
+              <a:rPr sz="850" b="1" i="1">
+                <a:solidFill>
+                  <a:srgbClr val="065A82"/>
+                </a:solidFill>
+                <a:latin typeface="Arial"/>
+              </a:rPr>
+              <a:t>[2] </a:t>
+            </a:r>
+            <a:r>
+              <a:rPr sz="850" i="1">
+                <a:solidFill>
+                  <a:srgbClr val="1C7293"/>
+                </a:solidFill>
+                <a:latin typeface="Arial"/>
+                <a:hlinkClick r:id="rId6"/>
+              </a:rPr>
+              <a:t>Hinton, Vinyals, Dean 2015 — Distilling the Knowledge</a:t>
+            </a:r>
+            <a:r>
+              <a:rPr sz="850" i="1">
+                <a:solidFill>
+                  <a:srgbClr val="1C7293"/>
+                </a:solidFill>
+                <a:latin typeface="Arial"/>
+              </a:rPr>
+              <a:t>   ·   </a:t>
+            </a:r>
+            <a:r>
+              <a:rPr sz="850" b="1" i="1">
+                <a:solidFill>
+                  <a:srgbClr val="065A82"/>
+                </a:solidFill>
+                <a:latin typeface="Arial"/>
+              </a:rPr>
+              <a:t>[3] </a:t>
+            </a:r>
+            <a:r>
+              <a:rPr sz="850" i="1">
+                <a:solidFill>
+                  <a:srgbClr val="1C7293"/>
+                </a:solidFill>
+                <a:latin typeface="Arial"/>
+                <a:hlinkClick r:id="rId7"/>
+              </a:rPr>
+              <a:t>PEFT survey — таксономия методов настройки</a:t>
+            </a:r>
+          </a:p>
+        </p:txBody>
+      </p:sp>
+      <p:sp>
+        <p:nvSpPr>
+          <p:cNvPr id="45" name="TextBox 44"/>
+          <p:cNvSpPr txBox="1"/>
+          <p:nvPr/>
+        </p:nvSpPr>
+        <p:spPr>
+          <a:xfrm>
+            <a:off x="11274552" y="6547104"/>
+            <a:ext cx="868680" cy="256032"/>
+          </a:xfrm>
+          <a:prstGeom prst="rect">
+            <a:avLst/>
+          </a:prstGeom>
+          <a:noFill/>
+        </p:spPr>
+        <p:txBody>
+          <a:bodyPr wrap="none" lIns="0" rIns="0" tIns="0" bIns="0">
+            <a:spAutoFit/>
+          </a:bodyPr>
+          <a:lstStyle/>
+          <a:p>
+            <a:pPr algn="r">
+              <a:lnSpc>
+                <a:spcPct val="100000"/>
+              </a:lnSpc>
+            </a:pPr>
+            <a:r>
+              <a:rPr sz="1000" i="1">
+                <a:solidFill>
+                  <a:srgbClr val="5B6678"/>
+                </a:solidFill>
+                <a:latin typeface="Arial"/>
+              </a:rPr>
+              <a:t>21 / 40</a:t>
             </a:r>
           </a:p>
         </p:txBody>
@@ -20805,7 +22818,29 @@
                 </a:solidFill>
                 <a:latin typeface="Arial"/>
               </a:rPr>
-              <a:t>Catastrophic forgetting (катастрофическое забывание) — деградация общих способностей модели в результате узкого агрессивного дообучения.</a:t>
+              <a:t>Catastrophic forgetting (катастрофическое забывание) — деградация общих способностей модели в результате узкого агрессивного дообучения</a:t>
+            </a:r>
+            <a:r>
+              <a:rPr sz="728" baseline="30000" b="0" i="1">
+                <a:latin typeface="Arial"/>
+                <a:cs typeface="Arial"/>
+                <a:ea typeface="Arial"/>
+                <a:solidFill>
+                  <a:srgbClr val="1C7293"/>
+                </a:solidFill>
+              </a:rPr>
+              <a:t>[1]</a:t>
+            </a:r>
+            <a:r>
+              <a:rPr sz="1400" b="0" i="1">
+                <a:latin typeface="Arial"/>
+                <a:cs typeface="Arial"/>
+                <a:ea typeface="Arial"/>
+                <a:solidFill>
+                  <a:srgbClr val="065A82"/>
+                </a:solidFill>
+              </a:rPr>
+              <a:t>.</a:t>
             </a:r>
           </a:p>
         </p:txBody>
@@ -21119,17 +23154,75 @@
           <a:p>
             <a:pPr algn="l">
               <a:lnSpc>
+                <a:spcPct val="102000"/>
+              </a:lnSpc>
+            </a:pPr>
+            <a:r>
+              <a:rPr sz="850" b="1" i="1">
+                <a:solidFill>
+                  <a:srgbClr val="065A82"/>
+                </a:solidFill>
+                <a:latin typeface="Arial"/>
+              </a:rPr>
+              <a:t>[1] </a:t>
+            </a:r>
+            <a:r>
+              <a:rPr sz="850" i="1">
+                <a:solidFill>
+                  <a:srgbClr val="1C7293"/>
+                </a:solidFill>
+                <a:latin typeface="Arial"/>
+                <a:hlinkClick r:id="rId4"/>
+              </a:rPr>
+              <a:t>Luo et al. 2023 — Catastrophic Forgetting in LLM Continual FT</a:t>
+            </a:r>
+            <a:r>
+              <a:rPr sz="850" i="1">
+                <a:solidFill>
+                  <a:srgbClr val="5B6678"/>
+                </a:solidFill>
+                <a:latin typeface="Arial"/>
+              </a:rPr>
+              <a:t>   ·   Эмпирически наблюдается при continual fine-tuning (Luo et al. 2023). Механизмы — «исследования показывают» (preprint).</a:t>
+            </a:r>
+          </a:p>
+        </p:txBody>
+      </p:sp>
+      <p:sp>
+        <p:nvSpPr>
+          <p:cNvPr id="12" name="TextBox 11"/>
+          <p:cNvSpPr txBox="1"/>
+          <p:nvPr/>
+        </p:nvSpPr>
+        <p:spPr>
+          <a:xfrm>
+            <a:off x="11274552" y="6547104"/>
+            <a:ext cx="868680" cy="256032"/>
+          </a:xfrm>
+          <a:prstGeom prst="rect">
+            <a:avLst/>
+          </a:prstGeom>
+          <a:noFill/>
+        </p:spPr>
+        <p:txBody>
+          <a:bodyPr wrap="none" lIns="0" rIns="0" tIns="0" bIns="0">
+            <a:spAutoFit/>
+          </a:bodyPr>
+          <a:lstStyle/>
+          <a:p>
+            <a:pPr algn="r">
+              <a:lnSpc>
                 <a:spcPct val="100000"/>
               </a:lnSpc>
             </a:pPr>
             <a:r>
-              <a:rPr sz="1200" b="0" i="1">
-                <a:solidFill>
-                  <a:srgbClr val="1C7293"/>
-                </a:solidFill>
-                <a:latin typeface="Arial"/>
-              </a:rPr>
-              <a:t>Эмпирически наблюдается при continual fine-tuning (Luo et al. 2023). Механизмы — «исследования показывают» (preprint).</a:t>
+              <a:rPr sz="1000" i="1">
+                <a:solidFill>
+                  <a:srgbClr val="5B6678"/>
+                </a:solidFill>
+                <a:latin typeface="Arial"/>
+              </a:rPr>
+              <a:t>22 / 40</a:t>
             </a:r>
           </a:p>
         </p:txBody>
@@ -22116,6 +24209,45 @@
           </a:p>
         </p:txBody>
       </p:sp>
+      <p:sp>
+        <p:nvSpPr>
+          <p:cNvPr id="25" name="TextBox 24"/>
+          <p:cNvSpPr txBox="1"/>
+          <p:nvPr/>
+        </p:nvSpPr>
+        <p:spPr>
+          <a:xfrm>
+            <a:off x="11274552" y="6547104"/>
+            <a:ext cx="868680" cy="256032"/>
+          </a:xfrm>
+          <a:prstGeom prst="rect">
+            <a:avLst/>
+          </a:prstGeom>
+          <a:noFill/>
+        </p:spPr>
+        <p:txBody>
+          <a:bodyPr wrap="none" lIns="0" rIns="0" tIns="0" bIns="0">
+            <a:spAutoFit/>
+          </a:bodyPr>
+          <a:lstStyle/>
+          <a:p>
+            <a:pPr algn="r">
+              <a:lnSpc>
+                <a:spcPct val="100000"/>
+              </a:lnSpc>
+            </a:pPr>
+            <a:r>
+              <a:rPr sz="1000" i="1">
+                <a:solidFill>
+                  <a:srgbClr val="5B6678"/>
+                </a:solidFill>
+                <a:latin typeface="Arial"/>
+              </a:rPr>
+              <a:t>23 / 40</a:t>
+            </a:r>
+          </a:p>
+        </p:txBody>
+      </p:sp>
     </p:spTree>
   </p:cSld>
   <p:clrMapOvr>
@@ -23100,6 +25232,17 @@
               </a:rPr>
               <a:t>N+M</a:t>
             </a:r>
+            <a:r>
+              <a:rPr sz="1040" baseline="30000" b="0" i="1">
+                <a:latin typeface="Arial"/>
+                <a:cs typeface="Arial"/>
+                <a:ea typeface="Arial"/>
+                <a:solidFill>
+                  <a:srgbClr val="1C7293"/>
+                </a:solidFill>
+              </a:rPr>
+              <a:t>[1]</a:t>
+            </a:r>
           </a:p>
         </p:txBody>
       </p:sp>
@@ -23890,17 +26033,75 @@
           <a:p>
             <a:pPr algn="l">
               <a:lnSpc>
+                <a:spcPct val="102000"/>
+              </a:lnSpc>
+            </a:pPr>
+            <a:r>
+              <a:rPr sz="850" b="1" i="1">
+                <a:solidFill>
+                  <a:srgbClr val="065A82"/>
+                </a:solidFill>
+                <a:latin typeface="Arial"/>
+              </a:rPr>
+              <a:t>[1] </a:t>
+            </a:r>
+            <a:r>
+              <a:rPr sz="850" i="1">
+                <a:solidFill>
+                  <a:srgbClr val="1C7293"/>
+                </a:solidFill>
+                <a:latin typeface="Arial"/>
+                <a:hlinkClick r:id="rId10"/>
+              </a:rPr>
+              <a:t>Anthropic — MCP donation / Agentic AI Foundation (N×M→N+M)</a:t>
+            </a:r>
+            <a:r>
+              <a:rPr sz="850" i="1">
+                <a:solidFill>
+                  <a:srgbClr val="5B6678"/>
+                </a:solidFill>
+                <a:latin typeface="Arial"/>
+              </a:rPr>
+              <a:t>   ·   Актуальные цифры экономии и масштаб экосистемы MCP — в главе методички.</a:t>
+            </a:r>
+          </a:p>
+        </p:txBody>
+      </p:sp>
+      <p:sp>
+        <p:nvSpPr>
+          <p:cNvPr id="46" name="TextBox 45"/>
+          <p:cNvSpPr txBox="1"/>
+          <p:nvPr/>
+        </p:nvSpPr>
+        <p:spPr>
+          <a:xfrm>
+            <a:off x="11274552" y="6547104"/>
+            <a:ext cx="868680" cy="256032"/>
+          </a:xfrm>
+          <a:prstGeom prst="rect">
+            <a:avLst/>
+          </a:prstGeom>
+          <a:noFill/>
+        </p:spPr>
+        <p:txBody>
+          <a:bodyPr wrap="none" lIns="0" rIns="0" tIns="0" bIns="0">
+            <a:spAutoFit/>
+          </a:bodyPr>
+          <a:lstStyle/>
+          <a:p>
+            <a:pPr algn="r">
+              <a:lnSpc>
                 <a:spcPct val="100000"/>
               </a:lnSpc>
             </a:pPr>
             <a:r>
-              <a:rPr sz="1200" b="0" i="1">
-                <a:solidFill>
-                  <a:srgbClr val="1C7293"/>
-                </a:solidFill>
-                <a:latin typeface="Arial"/>
-              </a:rPr>
-              <a:t>Актуальные цифры экономии и масштаб экосистемы MCP — в главе методички.</a:t>
+              <a:rPr sz="1000" i="1">
+                <a:solidFill>
+                  <a:srgbClr val="5B6678"/>
+                </a:solidFill>
+                <a:latin typeface="Arial"/>
+              </a:rPr>
+              <a:t>24 / 40</a:t>
             </a:r>
           </a:p>
         </p:txBody>
@@ -23996,7 +26197,29 @@
                 </a:solidFill>
                 <a:latin typeface="Arial"/>
               </a:rPr>
-              <a:t>Агент — архитектура, где модель не делает один проход, а работает в цикле, сама определяя последовательность шагов.</a:t>
+              <a:t>Агент — архитектура, где модель не делает один проход, а работает в цикле</a:t>
+            </a:r>
+            <a:r>
+              <a:rPr sz="702" baseline="30000" b="0" i="1">
+                <a:latin typeface="Arial"/>
+                <a:cs typeface="Arial"/>
+                <a:ea typeface="Arial"/>
+                <a:solidFill>
+                  <a:srgbClr val="1C7293"/>
+                </a:solidFill>
+              </a:rPr>
+              <a:t>[1]</a:t>
+            </a:r>
+            <a:r>
+              <a:rPr sz="1350" b="0" i="1">
+                <a:latin typeface="Arial"/>
+                <a:cs typeface="Arial"/>
+                <a:ea typeface="Arial"/>
+                <a:solidFill>
+                  <a:srgbClr val="065A82"/>
+                </a:solidFill>
+              </a:rPr>
+              <a:t>, сама определяя последовательность шагов.</a:t>
             </a:r>
           </a:p>
         </p:txBody>
@@ -25027,7 +27250,29 @@
                 </a:solidFill>
                 <a:latin typeface="Arial"/>
               </a:rPr>
-              <a:t>режим отказа: валидация против ВНЕШНЕГО критерия — не самооценка модели (отсылка к пределу CoT)</a:t>
+              <a:t>режим отказа: валидация против ВНЕШНЕГО критерия — не самооценка модели</a:t>
+            </a:r>
+            <a:r>
+              <a:rPr sz="546" baseline="30000" b="0" i="1">
+                <a:latin typeface="Arial"/>
+                <a:cs typeface="Arial"/>
+                <a:ea typeface="Arial"/>
+                <a:solidFill>
+                  <a:srgbClr val="1C7293"/>
+                </a:solidFill>
+              </a:rPr>
+              <a:t>[2]</a:t>
+            </a:r>
+            <a:r>
+              <a:rPr sz="1050" b="0" i="1">
+                <a:latin typeface="Arial"/>
+                <a:cs typeface="Arial"/>
+                <a:ea typeface="Arial"/>
+                <a:solidFill>
+                  <a:srgbClr val="21295C"/>
+                </a:solidFill>
+              </a:rPr>
+              <a:t> (отсылка к пределу CoT)</a:t>
             </a:r>
           </a:p>
         </p:txBody>
@@ -25600,17 +27845,103 @@
           <a:p>
             <a:pPr algn="l">
               <a:lnSpc>
+                <a:spcPct val="102000"/>
+              </a:lnSpc>
+            </a:pPr>
+            <a:r>
+              <a:rPr sz="850" b="1" i="1">
+                <a:solidFill>
+                  <a:srgbClr val="065A82"/>
+                </a:solidFill>
+                <a:latin typeface="Arial"/>
+              </a:rPr>
+              <a:t>[1] </a:t>
+            </a:r>
+            <a:r>
+              <a:rPr sz="850" i="1">
+                <a:solidFill>
+                  <a:srgbClr val="1C7293"/>
+                </a:solidFill>
+                <a:latin typeface="Arial"/>
+                <a:hlinkClick r:id="rId3"/>
+              </a:rPr>
+              <a:t>Yao et al. 2022 — ReAct (plan→act→check→iterate)</a:t>
+            </a:r>
+            <a:r>
+              <a:rPr sz="850" i="1">
+                <a:solidFill>
+                  <a:srgbClr val="1C7293"/>
+                </a:solidFill>
+                <a:latin typeface="Arial"/>
+              </a:rPr>
+              <a:t>   ·   </a:t>
+            </a:r>
+            <a:r>
+              <a:rPr sz="850" b="1" i="1">
+                <a:solidFill>
+                  <a:srgbClr val="065A82"/>
+                </a:solidFill>
+                <a:latin typeface="Arial"/>
+              </a:rPr>
+              <a:t>[2] </a:t>
+            </a:r>
+            <a:r>
+              <a:rPr sz="850" i="1">
+                <a:solidFill>
+                  <a:srgbClr val="1C7293"/>
+                </a:solidFill>
+                <a:latin typeface="Arial"/>
+                <a:hlinkClick r:id="rId4"/>
+              </a:rPr>
+              <a:t>Anthropic — Reasoning Models faithfulness (check ≠ самооценка)</a:t>
+            </a:r>
+            <a:r>
+              <a:rPr sz="850" i="1">
+                <a:solidFill>
+                  <a:srgbClr val="5B6678"/>
+                </a:solidFill>
+                <a:latin typeface="Arial"/>
+              </a:rPr>
+              <a:t>   ·   Паттерны цикла (ReAct, Reflexion, Plan-and-Execute) — в главе. Проектировать агента = проектировать защиту на каждом из 4 шагов.</a:t>
+            </a:r>
+          </a:p>
+        </p:txBody>
+      </p:sp>
+      <p:sp>
+        <p:nvSpPr>
+          <p:cNvPr id="42" name="TextBox 41"/>
+          <p:cNvSpPr txBox="1"/>
+          <p:nvPr/>
+        </p:nvSpPr>
+        <p:spPr>
+          <a:xfrm>
+            <a:off x="11274552" y="6547104"/>
+            <a:ext cx="868680" cy="256032"/>
+          </a:xfrm>
+          <a:prstGeom prst="rect">
+            <a:avLst/>
+          </a:prstGeom>
+          <a:noFill/>
+        </p:spPr>
+        <p:txBody>
+          <a:bodyPr wrap="none" lIns="0" rIns="0" tIns="0" bIns="0">
+            <a:spAutoFit/>
+          </a:bodyPr>
+          <a:lstStyle/>
+          <a:p>
+            <a:pPr algn="r">
+              <a:lnSpc>
                 <a:spcPct val="100000"/>
               </a:lnSpc>
             </a:pPr>
             <a:r>
-              <a:rPr sz="1200" b="0" i="1">
-                <a:solidFill>
-                  <a:srgbClr val="1C7293"/>
-                </a:solidFill>
-                <a:latin typeface="Arial"/>
-              </a:rPr>
-              <a:t>Паттерны цикла (ReAct, Reflexion, Plan-and-Execute) — в главе. Проектировать агента = проектировать защиту на каждом из 4 шагов.</a:t>
+              <a:rPr sz="1000" i="1">
+                <a:solidFill>
+                  <a:srgbClr val="5B6678"/>
+                </a:solidFill>
+                <a:latin typeface="Arial"/>
+              </a:rPr>
+              <a:t>25 / 40</a:t>
             </a:r>
           </a:p>
         </p:txBody>
@@ -25706,7 +28037,29 @@
                 </a:solidFill>
                 <a:latin typeface="Arial"/>
               </a:rPr>
-              <a:t>Предсказуемая задача → workflow; непредсказуемая И ценность оправдывает кратный рост → агент.</a:t>
+              <a:t>Предсказуемая задача → workflow</a:t>
+            </a:r>
+            <a:r>
+              <a:rPr sz="754" baseline="30000" b="0" i="1">
+                <a:latin typeface="Arial"/>
+                <a:cs typeface="Arial"/>
+                <a:ea typeface="Arial"/>
+                <a:solidFill>
+                  <a:srgbClr val="1C7293"/>
+                </a:solidFill>
+              </a:rPr>
+              <a:t>[1]</a:t>
+            </a:r>
+            <a:r>
+              <a:rPr sz="1450" b="0" i="1">
+                <a:latin typeface="Arial"/>
+                <a:cs typeface="Arial"/>
+                <a:ea typeface="Arial"/>
+                <a:solidFill>
+                  <a:srgbClr val="065A82"/>
+                </a:solidFill>
+              </a:rPr>
+              <a:t>; непредсказуемая И ценность оправдывает кратный рост → агент.</a:t>
             </a:r>
           </a:p>
         </p:txBody>
@@ -26593,6 +28946,17 @@
               </a:rPr>
               <a:t>Могу ли я заранее, до запуска, выписать последовательность шагов?  да (даже с ветвлениями) → workflow  ·  принципиально нет И ценность оправдывает кратные стоимость/риск → агент</a:t>
             </a:r>
+            <a:r>
+              <a:rPr sz="702" baseline="30000" b="0" i="1">
+                <a:latin typeface="Arial"/>
+                <a:cs typeface="Arial"/>
+                <a:ea typeface="Arial"/>
+                <a:solidFill>
+                  <a:srgbClr val="1C7293"/>
+                </a:solidFill>
+              </a:rPr>
+              <a:t>[2]</a:t>
+            </a:r>
           </a:p>
         </p:txBody>
       </p:sp>
@@ -26766,6 +29130,122 @@
                 <a:latin typeface="Arial"/>
               </a:rPr>
               <a:t>Найди простейшее. «Лень формализовать» не делает задачу непредсказуемой.</a:t>
+            </a:r>
+          </a:p>
+        </p:txBody>
+      </p:sp>
+      <p:sp>
+        <p:nvSpPr>
+          <p:cNvPr id="30" name="TextBox 29"/>
+          <p:cNvSpPr txBox="1"/>
+          <p:nvPr/>
+        </p:nvSpPr>
+        <p:spPr>
+          <a:xfrm>
+            <a:off x="502920" y="6419088"/>
+            <a:ext cx="11201400" cy="329184"/>
+          </a:xfrm>
+          <a:prstGeom prst="rect">
+            <a:avLst/>
+          </a:prstGeom>
+          <a:noFill/>
+        </p:spPr>
+        <p:txBody>
+          <a:bodyPr wrap="square" lIns="0" rIns="0" tIns="0" bIns="0" anchor="t">
+            <a:spAutoFit/>
+          </a:bodyPr>
+          <a:lstStyle/>
+          <a:p>
+            <a:pPr algn="l">
+              <a:lnSpc>
+                <a:spcPct val="102000"/>
+              </a:lnSpc>
+            </a:pPr>
+            <a:r>
+              <a:rPr sz="850" b="1" i="1">
+                <a:solidFill>
+                  <a:srgbClr val="065A82"/>
+                </a:solidFill>
+                <a:latin typeface="Arial"/>
+              </a:rPr>
+              <a:t>[1] </a:t>
+            </a:r>
+            <a:r>
+              <a:rPr sz="850" i="1">
+                <a:solidFill>
+                  <a:srgbClr val="1C7293"/>
+                </a:solidFill>
+                <a:latin typeface="Arial"/>
+                <a:hlinkClick r:id="rId5"/>
+              </a:rPr>
+              <a:t>Anthropic — Building Effective Agents (workflow vs agent)</a:t>
+            </a:r>
+            <a:r>
+              <a:rPr sz="850" i="1">
+                <a:solidFill>
+                  <a:srgbClr val="1C7293"/>
+                </a:solidFill>
+                <a:latin typeface="Arial"/>
+              </a:rPr>
+              <a:t>   ·   </a:t>
+            </a:r>
+            <a:r>
+              <a:rPr sz="850" b="1" i="1">
+                <a:solidFill>
+                  <a:srgbClr val="065A82"/>
+                </a:solidFill>
+                <a:latin typeface="Arial"/>
+              </a:rPr>
+              <a:t>[2] </a:t>
+            </a:r>
+            <a:r>
+              <a:rPr sz="850" i="1">
+                <a:solidFill>
+                  <a:srgbClr val="1C7293"/>
+                </a:solidFill>
+                <a:latin typeface="Arial"/>
+                <a:hlinkClick r:id="rId6"/>
+              </a:rPr>
+              <a:t>Cognition — Don't Build Multi-Agents</a:t>
+            </a:r>
+          </a:p>
+        </p:txBody>
+      </p:sp>
+      <p:sp>
+        <p:nvSpPr>
+          <p:cNvPr id="31" name="TextBox 30"/>
+          <p:cNvSpPr txBox="1"/>
+          <p:nvPr/>
+        </p:nvSpPr>
+        <p:spPr>
+          <a:xfrm>
+            <a:off x="11274552" y="6547104"/>
+            <a:ext cx="868680" cy="256032"/>
+          </a:xfrm>
+          <a:prstGeom prst="rect">
+            <a:avLst/>
+          </a:prstGeom>
+          <a:noFill/>
+        </p:spPr>
+        <p:txBody>
+          <a:bodyPr wrap="none" lIns="0" rIns="0" tIns="0" bIns="0">
+            <a:spAutoFit/>
+          </a:bodyPr>
+          <a:lstStyle/>
+          <a:p>
+            <a:pPr algn="r">
+              <a:lnSpc>
+                <a:spcPct val="100000"/>
+              </a:lnSpc>
+            </a:pPr>
+            <a:r>
+              <a:rPr sz="1000" i="1">
+                <a:solidFill>
+                  <a:srgbClr val="5B6678"/>
+                </a:solidFill>
+                <a:latin typeface="Arial"/>
+              </a:rPr>
+              <a:t>26 / 40</a:t>
             </a:r>
           </a:p>
         </p:txBody>
@@ -26861,7 +29341,29 @@
                 </a:solidFill>
                 <a:latin typeface="Arial"/>
               </a:rPr>
-              <a:t>Реальный агент-помощник (Claude Code, Cursor, Aider) — это цикл plan→act→check→iterate ПЛЮС оснастка. Пять типовых слотов:</a:t>
+              <a:t>Реальный агент-помощник (Claude Code, Cursor, Aider) — это цикл plan→act→check→iterate ПЛЮС оснастка. Пять типовых слотов</a:t>
+            </a:r>
+            <a:r>
+              <a:rPr sz="702" baseline="30000" b="0" i="1">
+                <a:latin typeface="Arial"/>
+                <a:cs typeface="Arial"/>
+                <a:ea typeface="Arial"/>
+                <a:solidFill>
+                  <a:srgbClr val="1C7293"/>
+                </a:solidFill>
+              </a:rPr>
+              <a:t>[1]</a:t>
+            </a:r>
+            <a:r>
+              <a:rPr sz="1350" b="0" i="1">
+                <a:latin typeface="Arial"/>
+                <a:cs typeface="Arial"/>
+                <a:ea typeface="Arial"/>
+                <a:solidFill>
+                  <a:srgbClr val="065A82"/>
+                </a:solidFill>
+              </a:rPr>
+              <a:t>:</a:t>
             </a:r>
           </a:p>
         </p:txBody>
@@ -28344,6 +30846,93 @@
                 <a:latin typeface="Arial"/>
               </a:rPr>
               <a:t>Как не поднимаешься по лестнице архитектур без требования задачи — не добавляй агенту память, subagents или MCP «на всякий случай». Каждый слот несёт свою цену: операционную сложность, новую поверхность отказа, новую границу доверия — и должен отвечать на конкретный триггер (Раздел 5).</a:t>
+            </a:r>
+          </a:p>
+        </p:txBody>
+      </p:sp>
+      <p:sp>
+        <p:nvSpPr>
+          <p:cNvPr id="41" name="TextBox 40"/>
+          <p:cNvSpPr txBox="1"/>
+          <p:nvPr/>
+        </p:nvSpPr>
+        <p:spPr>
+          <a:xfrm>
+            <a:off x="502920" y="6419088"/>
+            <a:ext cx="11201400" cy="329184"/>
+          </a:xfrm>
+          <a:prstGeom prst="rect">
+            <a:avLst/>
+          </a:prstGeom>
+          <a:noFill/>
+        </p:spPr>
+        <p:txBody>
+          <a:bodyPr wrap="square" lIns="0" rIns="0" tIns="0" bIns="0" anchor="t">
+            <a:spAutoFit/>
+          </a:bodyPr>
+          <a:lstStyle/>
+          <a:p>
+            <a:pPr algn="l">
+              <a:lnSpc>
+                <a:spcPct val="102000"/>
+              </a:lnSpc>
+            </a:pPr>
+            <a:r>
+              <a:rPr sz="850" b="1" i="1">
+                <a:solidFill>
+                  <a:srgbClr val="065A82"/>
+                </a:solidFill>
+                <a:latin typeface="Arial"/>
+              </a:rPr>
+              <a:t>[1] </a:t>
+            </a:r>
+            <a:r>
+              <a:rPr sz="850" i="1">
+                <a:solidFill>
+                  <a:srgbClr val="1C7293"/>
+                </a:solidFill>
+                <a:latin typeface="Arial"/>
+              </a:rPr>
+              <a:t>agent-harness-registry — карта слотов экипировки агента</a:t>
+            </a:r>
+          </a:p>
+        </p:txBody>
+      </p:sp>
+      <p:sp>
+        <p:nvSpPr>
+          <p:cNvPr id="42" name="TextBox 41"/>
+          <p:cNvSpPr txBox="1"/>
+          <p:nvPr/>
+        </p:nvSpPr>
+        <p:spPr>
+          <a:xfrm>
+            <a:off x="11274552" y="6547104"/>
+            <a:ext cx="868680" cy="256032"/>
+          </a:xfrm>
+          <a:prstGeom prst="rect">
+            <a:avLst/>
+          </a:prstGeom>
+          <a:noFill/>
+        </p:spPr>
+        <p:txBody>
+          <a:bodyPr wrap="none" lIns="0" rIns="0" tIns="0" bIns="0">
+            <a:spAutoFit/>
+          </a:bodyPr>
+          <a:lstStyle/>
+          <a:p>
+            <a:pPr algn="r">
+              <a:lnSpc>
+                <a:spcPct val="100000"/>
+              </a:lnSpc>
+            </a:pPr>
+            <a:r>
+              <a:rPr sz="1000" i="1">
+                <a:solidFill>
+                  <a:srgbClr val="5B6678"/>
+                </a:solidFill>
+                <a:latin typeface="Arial"/>
+              </a:rPr>
+              <a:t>27 / 40</a:t>
             </a:r>
           </a:p>
         </p:txBody>
@@ -28439,7 +31028,29 @@
                 </a:solidFill>
                 <a:latin typeface="Arial"/>
               </a:rPr>
-              <a:t>Память — что агент помнит МЕЖДУ сессиями (в отличие от контекста одного разговора). Спектр — от плоского файла до graph-баз.</a:t>
+              <a:t>Память — что агент помнит МЕЖДУ сессиями (в отличие от контекста одного разговора). Спектр — от плоского файла до graph-баз</a:t>
+            </a:r>
+            <a:r>
+              <a:rPr sz="702" baseline="30000" b="0" i="1">
+                <a:latin typeface="Arial"/>
+                <a:cs typeface="Arial"/>
+                <a:ea typeface="Arial"/>
+                <a:solidFill>
+                  <a:srgbClr val="1C7293"/>
+                </a:solidFill>
+              </a:rPr>
+              <a:t>[1]</a:t>
+            </a:r>
+            <a:r>
+              <a:rPr sz="1350" b="0" i="1">
+                <a:latin typeface="Arial"/>
+                <a:cs typeface="Arial"/>
+                <a:ea typeface="Arial"/>
+                <a:solidFill>
+                  <a:srgbClr val="065A82"/>
+                </a:solidFill>
+              </a:rPr>
+              <a:t>.</a:t>
             </a:r>
           </a:p>
         </p:txBody>
@@ -29109,17 +31720,74 @@
           <a:p>
             <a:pPr algn="l">
               <a:lnSpc>
+                <a:spcPct val="102000"/>
+              </a:lnSpc>
+            </a:pPr>
+            <a:r>
+              <a:rPr sz="850" b="1" i="1">
+                <a:solidFill>
+                  <a:srgbClr val="065A82"/>
+                </a:solidFill>
+                <a:latin typeface="Arial"/>
+              </a:rPr>
+              <a:t>[1] </a:t>
+            </a:r>
+            <a:r>
+              <a:rPr sz="850" i="1">
+                <a:solidFill>
+                  <a:srgbClr val="1C7293"/>
+                </a:solidFill>
+                <a:latin typeface="Arial"/>
+              </a:rPr>
+              <a:t>agent-harness-registry (live-eval) — спектр памяти агента</a:t>
+            </a:r>
+            <a:r>
+              <a:rPr sz="850" i="1">
+                <a:solidFill>
+                  <a:srgbClr val="5B6678"/>
+                </a:solidFill>
+                <a:latin typeface="Arial"/>
+              </a:rPr>
+              <a:t>   ·   Источник: публичный реестр agent-harness-registry (workain lab, live-eval).</a:t>
+            </a:r>
+          </a:p>
+        </p:txBody>
+      </p:sp>
+      <p:sp>
+        <p:nvSpPr>
+          <p:cNvPr id="21" name="TextBox 20"/>
+          <p:cNvSpPr txBox="1"/>
+          <p:nvPr/>
+        </p:nvSpPr>
+        <p:spPr>
+          <a:xfrm>
+            <a:off x="11274552" y="6547104"/>
+            <a:ext cx="868680" cy="256032"/>
+          </a:xfrm>
+          <a:prstGeom prst="rect">
+            <a:avLst/>
+          </a:prstGeom>
+          <a:noFill/>
+        </p:spPr>
+        <p:txBody>
+          <a:bodyPr wrap="none" lIns="0" rIns="0" tIns="0" bIns="0">
+            <a:spAutoFit/>
+          </a:bodyPr>
+          <a:lstStyle/>
+          <a:p>
+            <a:pPr algn="r">
+              <a:lnSpc>
                 <a:spcPct val="100000"/>
               </a:lnSpc>
             </a:pPr>
             <a:r>
-              <a:rPr sz="1200" b="0" i="1">
-                <a:solidFill>
-                  <a:srgbClr val="1C7293"/>
-                </a:solidFill>
-                <a:latin typeface="Arial"/>
-              </a:rPr>
-              <a:t>Источник: публичный реестр agent-harness-registry (workain lab, live-eval).</a:t>
+              <a:rPr sz="1000" i="1">
+                <a:solidFill>
+                  <a:srgbClr val="5B6678"/>
+                </a:solidFill>
+                <a:latin typeface="Arial"/>
+              </a:rPr>
+              <a:t>28 / 40</a:t>
             </a:r>
           </a:p>
         </p:txBody>
@@ -29215,7 +31883,29 @@
                 </a:solidFill>
                 <a:latin typeface="Arial"/>
               </a:rPr>
-              <a:t>Наличие памяти интуитивно кажется чистым улучшением. Независимый live-eval показывает: иногда — драматически нет.</a:t>
+              <a:t>Наличие памяти интуитивно кажется чистым улучшением. Независимый live-eval показывает: иногда — драматически нет</a:t>
+            </a:r>
+            <a:r>
+              <a:rPr sz="702" baseline="30000" b="0" i="1">
+                <a:latin typeface="Arial"/>
+                <a:cs typeface="Arial"/>
+                <a:ea typeface="Arial"/>
+                <a:solidFill>
+                  <a:srgbClr val="1C7293"/>
+                </a:solidFill>
+              </a:rPr>
+              <a:t>[1]</a:t>
+            </a:r>
+            <a:r>
+              <a:rPr sz="1350" b="0" i="1">
+                <a:latin typeface="Arial"/>
+                <a:cs typeface="Arial"/>
+                <a:ea typeface="Arial"/>
+                <a:solidFill>
+                  <a:srgbClr val="065A82"/>
+                </a:solidFill>
+              </a:rPr>
+              <a:t>.</a:t>
             </a:r>
           </a:p>
         </p:txBody>
@@ -30507,17 +33197,74 @@
           <a:p>
             <a:pPr algn="l">
               <a:lnSpc>
+                <a:spcPct val="102000"/>
+              </a:lnSpc>
+            </a:pPr>
+            <a:r>
+              <a:rPr sz="850" b="1" i="1">
+                <a:solidFill>
+                  <a:srgbClr val="065A82"/>
+                </a:solidFill>
+                <a:latin typeface="Arial"/>
+              </a:rPr>
+              <a:t>[1] </a:t>
+            </a:r>
+            <a:r>
+              <a:rPr sz="850" i="1">
+                <a:solidFill>
+                  <a:srgbClr val="1C7293"/>
+                </a:solidFill>
+                <a:latin typeface="Arial"/>
+              </a:rPr>
+              <a:t>agent-harness-registry (live-eval) — Letta Tier D / Memory Tool 17%-хвост</a:t>
+            </a:r>
+            <a:r>
+              <a:rPr sz="850" i="1">
+                <a:solidFill>
+                  <a:srgbClr val="5B6678"/>
+                </a:solidFill>
+                <a:latin typeface="Arial"/>
+              </a:rPr>
+              <a:t>   ·   agent-harness-registry (workain lab, live-eval 2026-07-05). «Работает хорошо» ≠ «работает всегда» — тот же урок, что RAG на масштабе и forgetting.</a:t>
+            </a:r>
+          </a:p>
+        </p:txBody>
+      </p:sp>
+      <p:sp>
+        <p:nvSpPr>
+          <p:cNvPr id="36" name="TextBox 35"/>
+          <p:cNvSpPr txBox="1"/>
+          <p:nvPr/>
+        </p:nvSpPr>
+        <p:spPr>
+          <a:xfrm>
+            <a:off x="11274552" y="6547104"/>
+            <a:ext cx="868680" cy="256032"/>
+          </a:xfrm>
+          <a:prstGeom prst="rect">
+            <a:avLst/>
+          </a:prstGeom>
+          <a:noFill/>
+        </p:spPr>
+        <p:txBody>
+          <a:bodyPr wrap="none" lIns="0" rIns="0" tIns="0" bIns="0">
+            <a:spAutoFit/>
+          </a:bodyPr>
+          <a:lstStyle/>
+          <a:p>
+            <a:pPr algn="r">
+              <a:lnSpc>
                 <a:spcPct val="100000"/>
               </a:lnSpc>
             </a:pPr>
             <a:r>
-              <a:rPr sz="1200" b="0" i="1">
-                <a:solidFill>
-                  <a:srgbClr val="1C7293"/>
-                </a:solidFill>
-                <a:latin typeface="Arial"/>
-              </a:rPr>
-              <a:t>agent-harness-registry (workain lab, live-eval 2026-07-05). «Работает хорошо» ≠ «работает всегда» — тот же урок, что RAG на масштабе и forgetting.</a:t>
+              <a:rPr sz="1000" i="1">
+                <a:solidFill>
+                  <a:srgbClr val="5B6678"/>
+                </a:solidFill>
+                <a:latin typeface="Arial"/>
+              </a:rPr>
+              <a:t>29 / 40</a:t>
             </a:r>
           </a:p>
         </p:txBody>
@@ -32016,6 +34763,45 @@
           </a:p>
         </p:txBody>
       </p:sp>
+      <p:sp>
+        <p:nvSpPr>
+          <p:cNvPr id="40" name="TextBox 39"/>
+          <p:cNvSpPr txBox="1"/>
+          <p:nvPr/>
+        </p:nvSpPr>
+        <p:spPr>
+          <a:xfrm>
+            <a:off x="11274552" y="6547104"/>
+            <a:ext cx="868680" cy="256032"/>
+          </a:xfrm>
+          <a:prstGeom prst="rect">
+            <a:avLst/>
+          </a:prstGeom>
+          <a:noFill/>
+        </p:spPr>
+        <p:txBody>
+          <a:bodyPr wrap="none" lIns="0" rIns="0" tIns="0" bIns="0">
+            <a:spAutoFit/>
+          </a:bodyPr>
+          <a:lstStyle/>
+          <a:p>
+            <a:pPr algn="r">
+              <a:lnSpc>
+                <a:spcPct val="100000"/>
+              </a:lnSpc>
+            </a:pPr>
+            <a:r>
+              <a:rPr sz="1000" i="1">
+                <a:solidFill>
+                  <a:srgbClr val="5B6678"/>
+                </a:solidFill>
+                <a:latin typeface="Arial"/>
+              </a:rPr>
+              <a:t>3 / 40</a:t>
+            </a:r>
+          </a:p>
+        </p:txBody>
+      </p:sp>
     </p:spTree>
   </p:cSld>
   <p:clrMapOvr>
@@ -32257,7 +35043,29 @@
                 </a:solidFill>
                 <a:latin typeface="Arial"/>
               </a:rPr>
-              <a:t>RCT (Gloaguen et al. 2026): само наличие файла-инструкции НЕ даёт значимого прироста успешности — при этом стоимость и число шагов растут.</a:t>
+              <a:t>RCT (Gloaguen et al. 2026): само наличие файла-инструкции НЕ даёт значимого прироста</a:t>
+            </a:r>
+            <a:r>
+              <a:rPr sz="650" baseline="30000" b="0" i="1">
+                <a:latin typeface="Arial"/>
+                <a:cs typeface="Arial"/>
+                <a:ea typeface="Arial"/>
+                <a:solidFill>
+                  <a:srgbClr val="1C7293"/>
+                </a:solidFill>
+              </a:rPr>
+              <a:t>[1]</a:t>
+            </a:r>
+            <a:r>
+              <a:rPr sz="1250" b="0" i="0">
+                <a:latin typeface="Arial"/>
+                <a:cs typeface="Arial"/>
+                <a:ea typeface="Arial"/>
+                <a:solidFill>
+                  <a:srgbClr val="21295C"/>
+                </a:solidFill>
+              </a:rPr>
+              <a:t> успешности — при этом стоимость и число шагов растут.</a:t>
             </a:r>
           </a:p>
         </p:txBody>
@@ -32731,7 +35539,29 @@
                 </a:solidFill>
                 <a:latin typeface="Arial"/>
               </a:rPr>
-              <a:t>Реальный кейс: письменно признанная прошлая ошибка НЕ предотвратила её повторение спустя 25 дней.</a:t>
+              <a:t>Реальный кейс: письменно признанная прошлая ошибка НЕ предотвратила её повторение спустя 25 дней</a:t>
+            </a:r>
+            <a:r>
+              <a:rPr sz="650" baseline="30000" b="0" i="1">
+                <a:latin typeface="Arial"/>
+                <a:cs typeface="Arial"/>
+                <a:ea typeface="Arial"/>
+                <a:solidFill>
+                  <a:srgbClr val="1C7293"/>
+                </a:solidFill>
+              </a:rPr>
+              <a:t>[2]</a:t>
+            </a:r>
+            <a:r>
+              <a:rPr sz="1250" b="0" i="0">
+                <a:latin typeface="Arial"/>
+                <a:cs typeface="Arial"/>
+                <a:ea typeface="Arial"/>
+                <a:solidFill>
+                  <a:srgbClr val="21295C"/>
+                </a:solidFill>
+              </a:rPr>
+              <a:t>.</a:t>
             </a:r>
           </a:p>
         </p:txBody>
@@ -32906,6 +35736,122 @@
                 <a:latin typeface="Arial"/>
               </a:rPr>
               <a:t>Полезен, когда заполняет реальный пробел; бесполезен, когда дублирует доступное модели; может навредить, когда самоавторская память закрепляет ошибку. Тот же паттерн, что роль в промпте: «добавить X → лучше» не подтверждается измерением.</a:t>
+            </a:r>
+          </a:p>
+        </p:txBody>
+      </p:sp>
+      <p:sp>
+        <p:nvSpPr>
+          <p:cNvPr id="24" name="TextBox 23"/>
+          <p:cNvSpPr txBox="1"/>
+          <p:nvPr/>
+        </p:nvSpPr>
+        <p:spPr>
+          <a:xfrm>
+            <a:off x="502920" y="6419088"/>
+            <a:ext cx="11201400" cy="329184"/>
+          </a:xfrm>
+          <a:prstGeom prst="rect">
+            <a:avLst/>
+          </a:prstGeom>
+          <a:noFill/>
+        </p:spPr>
+        <p:txBody>
+          <a:bodyPr wrap="square" lIns="0" rIns="0" tIns="0" bIns="0" anchor="t">
+            <a:spAutoFit/>
+          </a:bodyPr>
+          <a:lstStyle/>
+          <a:p>
+            <a:pPr algn="l">
+              <a:lnSpc>
+                <a:spcPct val="102000"/>
+              </a:lnSpc>
+            </a:pPr>
+            <a:r>
+              <a:rPr sz="850" b="1" i="1">
+                <a:solidFill>
+                  <a:srgbClr val="065A82"/>
+                </a:solidFill>
+                <a:latin typeface="Arial"/>
+              </a:rPr>
+              <a:t>[1] </a:t>
+            </a:r>
+            <a:r>
+              <a:rPr sz="850" i="1">
+                <a:solidFill>
+                  <a:srgbClr val="1C7293"/>
+                </a:solidFill>
+                <a:latin typeface="Arial"/>
+                <a:hlinkClick r:id="rId6"/>
+              </a:rPr>
+              <a:t>Gloaguen et al. 2026 — Evaluating AGENTS.md (presence paradox)</a:t>
+            </a:r>
+            <a:r>
+              <a:rPr sz="850" i="1">
+                <a:solidFill>
+                  <a:srgbClr val="1C7293"/>
+                </a:solidFill>
+                <a:latin typeface="Arial"/>
+              </a:rPr>
+              <a:t>   ·   </a:t>
+            </a:r>
+            <a:r>
+              <a:rPr sz="850" b="1" i="1">
+                <a:solidFill>
+                  <a:srgbClr val="065A82"/>
+                </a:solidFill>
+                <a:latin typeface="Arial"/>
+              </a:rPr>
+              <a:t>[2] </a:t>
+            </a:r>
+            <a:r>
+              <a:rPr sz="850" i="1">
+                <a:solidFill>
+                  <a:srgbClr val="1C7293"/>
+                </a:solidFill>
+                <a:latin typeface="Arial"/>
+                <a:hlinkClick r:id="rId7"/>
+              </a:rPr>
+              <a:t>GitHub anthropics/claude-code#51735 (повтор ошибки через 25 дней)</a:t>
+            </a:r>
+          </a:p>
+        </p:txBody>
+      </p:sp>
+      <p:sp>
+        <p:nvSpPr>
+          <p:cNvPr id="25" name="TextBox 24"/>
+          <p:cNvSpPr txBox="1"/>
+          <p:nvPr/>
+        </p:nvSpPr>
+        <p:spPr>
+          <a:xfrm>
+            <a:off x="11274552" y="6547104"/>
+            <a:ext cx="868680" cy="256032"/>
+          </a:xfrm>
+          <a:prstGeom prst="rect">
+            <a:avLst/>
+          </a:prstGeom>
+          <a:noFill/>
+        </p:spPr>
+        <p:txBody>
+          <a:bodyPr wrap="none" lIns="0" rIns="0" tIns="0" bIns="0">
+            <a:spAutoFit/>
+          </a:bodyPr>
+          <a:lstStyle/>
+          <a:p>
+            <a:pPr algn="r">
+              <a:lnSpc>
+                <a:spcPct val="100000"/>
+              </a:lnSpc>
+            </a:pPr>
+            <a:r>
+              <a:rPr sz="1000" i="1">
+                <a:solidFill>
+                  <a:srgbClr val="5B6678"/>
+                </a:solidFill>
+                <a:latin typeface="Arial"/>
+              </a:rPr>
+              <a:t>30 / 40</a:t>
             </a:r>
           </a:p>
         </p:txBody>
@@ -33523,7 +36469,29 @@
                 </a:solidFill>
                 <a:latin typeface="Arial"/>
               </a:rPr>
-              <a:t>Безопасность: как только агент делегирует и подключается — появляется поверхность, которой не было у одного вызова</a:t>
+              <a:t>Безопасность: как только агент делегирует и подключается — появляется поверхность</a:t>
+            </a:r>
+            <a:r>
+              <a:rPr sz="780" baseline="30000" b="0" i="1">
+                <a:latin typeface="Arial"/>
+                <a:cs typeface="Arial"/>
+                <a:ea typeface="Arial"/>
+                <a:solidFill>
+                  <a:srgbClr val="1C7293"/>
+                </a:solidFill>
+              </a:rPr>
+              <a:t>[2,3]</a:t>
+            </a:r>
+            <a:r>
+              <a:rPr sz="1500" b="1" i="0">
+                <a:latin typeface="Arial"/>
+                <a:cs typeface="Arial"/>
+                <a:ea typeface="Arial"/>
+                <a:solidFill>
+                  <a:srgbClr val="21295C"/>
+                </a:solidFill>
+              </a:rPr>
+              <a:t>, которой не было у одного вызова</a:t>
             </a:r>
           </a:p>
         </p:txBody>
@@ -33601,7 +36569,29 @@
                 </a:solidFill>
                 <a:latin typeface="Arial"/>
               </a:rPr>
-              <a:t>issue с встроенной инструкцией + переизбыточный токен (PAT на все репо) → ассистент выгрузил приватные репозитории в публичный PR.</a:t>
+              <a:t>issue с встроенной инструкцией + переизбыточный токен (PAT на все репо) → ассистент выгрузил приватные репозитории в публичный PR</a:t>
+            </a:r>
+            <a:r>
+              <a:rPr sz="624" baseline="30000" b="0" i="1">
+                <a:latin typeface="Arial"/>
+                <a:cs typeface="Arial"/>
+                <a:ea typeface="Arial"/>
+                <a:solidFill>
+                  <a:srgbClr val="1C7293"/>
+                </a:solidFill>
+              </a:rPr>
+              <a:t>[1]</a:t>
+            </a:r>
+            <a:r>
+              <a:rPr sz="1200" b="0" i="0">
+                <a:latin typeface="Arial"/>
+                <a:cs typeface="Arial"/>
+                <a:ea typeface="Arial"/>
+                <a:solidFill>
+                  <a:srgbClr val="21295C"/>
+                </a:solidFill>
+              </a:rPr>
+              <a:t>.</a:t>
             </a:r>
           </a:p>
         </p:txBody>
@@ -33727,7 +36717,29 @@
                 </a:solidFill>
                 <a:latin typeface="Arial"/>
               </a:rPr>
-              <a:t>«У нас ZDR» ≠ «нигде не хранится»: судебный приказ (NYT v. OpenAI) + third-party/MCP вне ZDR. Регулируемое — не слать без ZDR/BAA.</a:t>
+              <a:t>«У нас ZDR» ≠ «нигде не хранится»: судебный приказ (NYT v. OpenAI) + third-party/MCP вне ZDR</a:t>
+            </a:r>
+            <a:r>
+              <a:rPr sz="572" baseline="30000" b="0" i="1">
+                <a:latin typeface="Arial"/>
+                <a:cs typeface="Arial"/>
+                <a:ea typeface="Arial"/>
+                <a:solidFill>
+                  <a:srgbClr val="1C7293"/>
+                </a:solidFill>
+              </a:rPr>
+              <a:t>[4,5]</a:t>
+            </a:r>
+            <a:r>
+              <a:rPr sz="1100" b="0" i="1">
+                <a:latin typeface="Arial"/>
+                <a:cs typeface="Arial"/>
+                <a:ea typeface="Arial"/>
+                <a:solidFill>
+                  <a:srgbClr val="21295C"/>
+                </a:solidFill>
+              </a:rPr>
+              <a:t>. Регулируемое — не слать без ZDR/BAA.</a:t>
             </a:r>
           </a:p>
         </p:txBody>
@@ -34411,6 +37423,206 @@
                 <a:latin typeface="Arial"/>
               </a:rPr>
               <a:t>аудированные версии; deny-by-default</a:t>
+            </a:r>
+          </a:p>
+        </p:txBody>
+      </p:sp>
+      <p:sp>
+        <p:nvSpPr>
+          <p:cNvPr id="40" name="TextBox 39"/>
+          <p:cNvSpPr txBox="1"/>
+          <p:nvPr/>
+        </p:nvSpPr>
+        <p:spPr>
+          <a:xfrm>
+            <a:off x="502920" y="6419088"/>
+            <a:ext cx="11201400" cy="329184"/>
+          </a:xfrm>
+          <a:prstGeom prst="rect">
+            <a:avLst/>
+          </a:prstGeom>
+          <a:noFill/>
+        </p:spPr>
+        <p:txBody>
+          <a:bodyPr wrap="square" lIns="0" rIns="0" tIns="0" bIns="0" anchor="t">
+            <a:spAutoFit/>
+          </a:bodyPr>
+          <a:lstStyle/>
+          <a:p>
+            <a:pPr algn="l">
+              <a:lnSpc>
+                <a:spcPct val="102000"/>
+              </a:lnSpc>
+            </a:pPr>
+            <a:r>
+              <a:rPr sz="740" b="1" i="1">
+                <a:solidFill>
+                  <a:srgbClr val="065A82"/>
+                </a:solidFill>
+                <a:latin typeface="Arial"/>
+              </a:rPr>
+              <a:t>[1] </a:t>
+            </a:r>
+            <a:r>
+              <a:rPr sz="740" i="1">
+                <a:solidFill>
+                  <a:srgbClr val="1C7293"/>
+                </a:solidFill>
+                <a:latin typeface="Arial"/>
+                <a:hlinkClick r:id="rId7"/>
+              </a:rPr>
+              <a:t>Docker — MCP Horror Stories: GitHub Prompt Injection</a:t>
+            </a:r>
+            <a:r>
+              <a:rPr sz="740" i="1">
+                <a:solidFill>
+                  <a:srgbClr val="1C7293"/>
+                </a:solidFill>
+                <a:latin typeface="Arial"/>
+              </a:rPr>
+              <a:t>   ·   </a:t>
+            </a:r>
+            <a:r>
+              <a:rPr sz="740" b="1" i="1">
+                <a:solidFill>
+                  <a:srgbClr val="065A82"/>
+                </a:solidFill>
+                <a:latin typeface="Arial"/>
+              </a:rPr>
+              <a:t>[2] </a:t>
+            </a:r>
+            <a:r>
+              <a:rPr sz="740" i="1">
+                <a:solidFill>
+                  <a:srgbClr val="1C7293"/>
+                </a:solidFill>
+                <a:latin typeface="Arial"/>
+                <a:hlinkClick r:id="rId8"/>
+              </a:rPr>
+              <a:t>Simon Willison — Prompt injection via MCP</a:t>
+            </a:r>
+            <a:r>
+              <a:rPr sz="740" i="1">
+                <a:solidFill>
+                  <a:srgbClr val="1C7293"/>
+                </a:solidFill>
+                <a:latin typeface="Arial"/>
+              </a:rPr>
+              <a:t>   ·   </a:t>
+            </a:r>
+            <a:r>
+              <a:rPr sz="740" b="1" i="1">
+                <a:solidFill>
+                  <a:srgbClr val="065A82"/>
+                </a:solidFill>
+                <a:latin typeface="Arial"/>
+              </a:rPr>
+              <a:t>[3] </a:t>
+            </a:r>
+            <a:r>
+              <a:rPr sz="740" i="1">
+                <a:solidFill>
+                  <a:srgbClr val="1C7293"/>
+                </a:solidFill>
+                <a:latin typeface="Arial"/>
+                <a:hlinkClick r:id="rId9"/>
+              </a:rPr>
+              <a:t>Palo Alto Unit 42 — MCP Attack Vectors</a:t>
+            </a:r>
+            <a:r>
+              <a:rPr sz="740" i="1">
+                <a:solidFill>
+                  <a:srgbClr val="1C7293"/>
+                </a:solidFill>
+                <a:latin typeface="Arial"/>
+              </a:rPr>
+              <a:t>   ·   </a:t>
+            </a:r>
+            <a:r>
+              <a:rPr sz="740" b="1" i="1">
+                <a:solidFill>
+                  <a:srgbClr val="065A82"/>
+                </a:solidFill>
+                <a:latin typeface="Arial"/>
+              </a:rPr>
+              <a:t>[4] </a:t>
+            </a:r>
+            <a:r>
+              <a:rPr sz="740" i="1">
+                <a:solidFill>
+                  <a:srgbClr val="1C7293"/>
+                </a:solidFill>
+                <a:latin typeface="Arial"/>
+                <a:hlinkClick r:id="rId10"/>
+              </a:rPr>
+              <a:t>Bloomberg Law — NYT v. OpenAI (суд обязал хранить логи)</a:t>
+            </a:r>
+            <a:r>
+              <a:rPr sz="740" i="1">
+                <a:solidFill>
+                  <a:srgbClr val="1C7293"/>
+                </a:solidFill>
+                <a:latin typeface="Arial"/>
+              </a:rPr>
+              <a:t>   ·   </a:t>
+            </a:r>
+            <a:r>
+              <a:rPr sz="740" b="1" i="1">
+                <a:solidFill>
+                  <a:srgbClr val="065A82"/>
+                </a:solidFill>
+                <a:latin typeface="Arial"/>
+              </a:rPr>
+              <a:t>[5] </a:t>
+            </a:r>
+            <a:r>
+              <a:rPr sz="740" i="1">
+                <a:solidFill>
+                  <a:srgbClr val="1C7293"/>
+                </a:solidFill>
+                <a:latin typeface="Arial"/>
+                <a:hlinkClick r:id="rId11"/>
+              </a:rPr>
+              <a:t>Anthropic — API and Data Retention (границы ZDR)</a:t>
+            </a:r>
+          </a:p>
+        </p:txBody>
+      </p:sp>
+      <p:sp>
+        <p:nvSpPr>
+          <p:cNvPr id="41" name="TextBox 40"/>
+          <p:cNvSpPr txBox="1"/>
+          <p:nvPr/>
+        </p:nvSpPr>
+        <p:spPr>
+          <a:xfrm>
+            <a:off x="11274552" y="6547104"/>
+            <a:ext cx="868680" cy="256032"/>
+          </a:xfrm>
+          <a:prstGeom prst="rect">
+            <a:avLst/>
+          </a:prstGeom>
+          <a:noFill/>
+        </p:spPr>
+        <p:txBody>
+          <a:bodyPr wrap="none" lIns="0" rIns="0" tIns="0" bIns="0">
+            <a:spAutoFit/>
+          </a:bodyPr>
+          <a:lstStyle/>
+          <a:p>
+            <a:pPr algn="r">
+              <a:lnSpc>
+                <a:spcPct val="100000"/>
+              </a:lnSpc>
+            </a:pPr>
+            <a:r>
+              <a:rPr sz="1000" i="1">
+                <a:solidFill>
+                  <a:srgbClr val="5B6678"/>
+                </a:solidFill>
+                <a:latin typeface="Arial"/>
+              </a:rPr>
+              <a:t>31 / 40</a:t>
             </a:r>
           </a:p>
         </p:txBody>
@@ -34506,7 +37718,29 @@
                 </a:solidFill>
                 <a:latin typeface="Arial"/>
               </a:rPr>
-              <a:t>Разница между инструментами — не в «качестве модели», а в том, какие слоты экипировки заполнены и где агент физически живёт.</a:t>
+              <a:t>Разница между инструментами — не в «качестве модели», а в том, какие слоты экипировки заполнены и где агент физически живёт</a:t>
+            </a:r>
+            <a:r>
+              <a:rPr sz="702" baseline="30000" b="0" i="1">
+                <a:latin typeface="Arial"/>
+                <a:cs typeface="Arial"/>
+                <a:ea typeface="Arial"/>
+                <a:solidFill>
+                  <a:srgbClr val="1C7293"/>
+                </a:solidFill>
+              </a:rPr>
+              <a:t>[1]</a:t>
+            </a:r>
+            <a:r>
+              <a:rPr sz="1350" b="0" i="1">
+                <a:latin typeface="Arial"/>
+                <a:cs typeface="Arial"/>
+                <a:ea typeface="Arial"/>
+                <a:solidFill>
+                  <a:srgbClr val="065A82"/>
+                </a:solidFill>
+              </a:rPr>
+              <a:t>.</a:t>
             </a:r>
           </a:p>
         </p:txBody>
@@ -35698,6 +38932,93 @@
                 <a:latin typeface="Arial"/>
               </a:rPr>
               <a:t>Выбор инструмента подчиняется тому же правилу: не бери самый оснащённый по умолчанию — смотри, какая оснастка нужна именно твоей задаче.</a:t>
+            </a:r>
+          </a:p>
+        </p:txBody>
+      </p:sp>
+      <p:sp>
+        <p:nvSpPr>
+          <p:cNvPr id="34" name="TextBox 33"/>
+          <p:cNvSpPr txBox="1"/>
+          <p:nvPr/>
+        </p:nvSpPr>
+        <p:spPr>
+          <a:xfrm>
+            <a:off x="502920" y="6419088"/>
+            <a:ext cx="11201400" cy="329184"/>
+          </a:xfrm>
+          <a:prstGeom prst="rect">
+            <a:avLst/>
+          </a:prstGeom>
+          <a:noFill/>
+        </p:spPr>
+        <p:txBody>
+          <a:bodyPr wrap="square" lIns="0" rIns="0" tIns="0" bIns="0" anchor="t">
+            <a:spAutoFit/>
+          </a:bodyPr>
+          <a:lstStyle/>
+          <a:p>
+            <a:pPr algn="l">
+              <a:lnSpc>
+                <a:spcPct val="102000"/>
+              </a:lnSpc>
+            </a:pPr>
+            <a:r>
+              <a:rPr sz="850" b="1" i="1">
+                <a:solidFill>
+                  <a:srgbClr val="065A82"/>
+                </a:solidFill>
+                <a:latin typeface="Arial"/>
+              </a:rPr>
+              <a:t>[1] </a:t>
+            </a:r>
+            <a:r>
+              <a:rPr sz="850" i="1">
+                <a:solidFill>
+                  <a:srgbClr val="1C7293"/>
+                </a:solidFill>
+                <a:latin typeface="Arial"/>
+              </a:rPr>
+              <a:t>agent-harness-registry — обзор через рамку экипировки</a:t>
+            </a:r>
+          </a:p>
+        </p:txBody>
+      </p:sp>
+      <p:sp>
+        <p:nvSpPr>
+          <p:cNvPr id="35" name="TextBox 34"/>
+          <p:cNvSpPr txBox="1"/>
+          <p:nvPr/>
+        </p:nvSpPr>
+        <p:spPr>
+          <a:xfrm>
+            <a:off x="11274552" y="6547104"/>
+            <a:ext cx="868680" cy="256032"/>
+          </a:xfrm>
+          <a:prstGeom prst="rect">
+            <a:avLst/>
+          </a:prstGeom>
+          <a:noFill/>
+        </p:spPr>
+        <p:txBody>
+          <a:bodyPr wrap="none" lIns="0" rIns="0" tIns="0" bIns="0">
+            <a:spAutoFit/>
+          </a:bodyPr>
+          <a:lstStyle/>
+          <a:p>
+            <a:pPr algn="r">
+              <a:lnSpc>
+                <a:spcPct val="100000"/>
+              </a:lnSpc>
+            </a:pPr>
+            <a:r>
+              <a:rPr sz="1000" i="1">
+                <a:solidFill>
+                  <a:srgbClr val="5B6678"/>
+                </a:solidFill>
+                <a:latin typeface="Arial"/>
+              </a:rPr>
+              <a:t>32 / 40</a:t>
             </a:r>
           </a:p>
         </p:txBody>
@@ -35984,6 +39305,17 @@
               </a:rPr>
               <a:t>$4 200 за 63 часа</a:t>
             </a:r>
+            <a:r>
+              <a:rPr sz="1144" baseline="30000" b="0" i="1">
+                <a:latin typeface="Arial"/>
+                <a:cs typeface="Arial"/>
+                <a:ea typeface="Arial"/>
+                <a:solidFill>
+                  <a:srgbClr val="1C7293"/>
+                </a:solidFill>
+              </a:rPr>
+              <a:t>[1]</a:t>
+            </a:r>
           </a:p>
         </p:txBody>
       </p:sp>
@@ -36299,6 +39631,17 @@
               </a:rPr>
               <a:t>Вывод: «улучшить шаг» — слабый рычаг; «меньше хопов + валидация между шагами» — сильный</a:t>
             </a:r>
+            <a:r>
+              <a:rPr sz="624" baseline="30000" b="0" i="1">
+                <a:latin typeface="Arial"/>
+                <a:cs typeface="Arial"/>
+                <a:ea typeface="Arial"/>
+                <a:solidFill>
+                  <a:srgbClr val="1C7293"/>
+                </a:solidFill>
+              </a:rPr>
+              <a:t>[2]</a:t>
+            </a:r>
           </a:p>
         </p:txBody>
       </p:sp>
@@ -36447,7 +39790,29 @@
                 </a:solidFill>
                 <a:latin typeface="Arial"/>
               </a:rPr>
-              <a:t>зависимые подзадачи → параллельные субагенты принимают конфликтующие неявные решения</a:t>
+              <a:t>зависимые подзадачи → параллельные субагенты принимают конфликтующие</a:t>
+            </a:r>
+            <a:r>
+              <a:rPr sz="650" baseline="30000" b="0" i="1">
+                <a:latin typeface="Arial"/>
+                <a:cs typeface="Arial"/>
+                <a:ea typeface="Arial"/>
+                <a:solidFill>
+                  <a:srgbClr val="1C7293"/>
+                </a:solidFill>
+              </a:rPr>
+              <a:t>[3]</a:t>
+            </a:r>
+            <a:r>
+              <a:rPr sz="1250" b="0" i="0">
+                <a:latin typeface="Arial"/>
+                <a:cs typeface="Arial"/>
+                <a:ea typeface="Arial"/>
+                <a:solidFill>
+                  <a:srgbClr val="21295C"/>
+                </a:solidFill>
+              </a:rPr>
+              <a:t> неявные решения</a:t>
             </a:r>
           </a:p>
         </p:txBody>
@@ -36515,17 +39880,131 @@
           <a:p>
             <a:pPr algn="l">
               <a:lnSpc>
+                <a:spcPct val="102000"/>
+              </a:lnSpc>
+            </a:pPr>
+            <a:r>
+              <a:rPr sz="850" b="1" i="1">
+                <a:solidFill>
+                  <a:srgbClr val="065A82"/>
+                </a:solidFill>
+                <a:latin typeface="Arial"/>
+              </a:rPr>
+              <a:t>[1] </a:t>
+            </a:r>
+            <a:r>
+              <a:rPr sz="850" i="1">
+                <a:solidFill>
+                  <a:srgbClr val="1C7293"/>
+                </a:solidFill>
+                <a:latin typeface="Arial"/>
+                <a:hlinkClick r:id="rId6"/>
+              </a:rPr>
+              <a:t>Sattyam Jain 2026 — The Agent That Burned $4,200 in 63 Hours</a:t>
+            </a:r>
+            <a:r>
+              <a:rPr sz="850" i="1">
+                <a:solidFill>
+                  <a:srgbClr val="1C7293"/>
+                </a:solidFill>
+                <a:latin typeface="Arial"/>
+              </a:rPr>
+              <a:t>   ·   </a:t>
+            </a:r>
+            <a:r>
+              <a:rPr sz="850" b="1" i="1">
+                <a:solidFill>
+                  <a:srgbClr val="065A82"/>
+                </a:solidFill>
+                <a:latin typeface="Arial"/>
+              </a:rPr>
+              <a:t>[2] </a:t>
+            </a:r>
+            <a:r>
+              <a:rPr sz="850" i="1">
+                <a:solidFill>
+                  <a:srgbClr val="1C7293"/>
+                </a:solidFill>
+                <a:latin typeface="Arial"/>
+                <a:hlinkClick r:id="rId7"/>
+              </a:rPr>
+              <a:t>MindStudio — Reliability Compounding Problem</a:t>
+            </a:r>
+            <a:r>
+              <a:rPr sz="850" i="1">
+                <a:solidFill>
+                  <a:srgbClr val="1C7293"/>
+                </a:solidFill>
+                <a:latin typeface="Arial"/>
+              </a:rPr>
+              <a:t>   ·   </a:t>
+            </a:r>
+            <a:r>
+              <a:rPr sz="850" b="1" i="1">
+                <a:solidFill>
+                  <a:srgbClr val="065A82"/>
+                </a:solidFill>
+                <a:latin typeface="Arial"/>
+              </a:rPr>
+              <a:t>[3] </a:t>
+            </a:r>
+            <a:r>
+              <a:rPr sz="850" i="1">
+                <a:solidFill>
+                  <a:srgbClr val="1C7293"/>
+                </a:solidFill>
+                <a:latin typeface="Arial"/>
+                <a:hlinkClick r:id="rId8"/>
+              </a:rPr>
+              <a:t>Cognition — Don't Build Multi-Agents (хрупкость)</a:t>
+            </a:r>
+            <a:r>
+              <a:rPr sz="850" i="1">
+                <a:solidFill>
+                  <a:srgbClr val="5B6678"/>
+                </a:solidFill>
+                <a:latin typeface="Arial"/>
+              </a:rPr>
+              <a:t>   ·   Атаки через инструменты (prompt injection, GitHub MCP heist) — 4-й класс провалов, разобран на слайде безопасности. $4 200-петля — single-author постмортем 2026-04 (illustrative); compounding — MindStudio 2025–2026.</a:t>
+            </a:r>
+          </a:p>
+        </p:txBody>
+      </p:sp>
+      <p:sp>
+        <p:nvSpPr>
+          <p:cNvPr id="23" name="TextBox 22"/>
+          <p:cNvSpPr txBox="1"/>
+          <p:nvPr/>
+        </p:nvSpPr>
+        <p:spPr>
+          <a:xfrm>
+            <a:off x="11274552" y="6547104"/>
+            <a:ext cx="868680" cy="256032"/>
+          </a:xfrm>
+          <a:prstGeom prst="rect">
+            <a:avLst/>
+          </a:prstGeom>
+          <a:noFill/>
+        </p:spPr>
+        <p:txBody>
+          <a:bodyPr wrap="none" lIns="0" rIns="0" tIns="0" bIns="0">
+            <a:spAutoFit/>
+          </a:bodyPr>
+          <a:lstStyle/>
+          <a:p>
+            <a:pPr algn="r">
+              <a:lnSpc>
                 <a:spcPct val="100000"/>
               </a:lnSpc>
             </a:pPr>
             <a:r>
-              <a:rPr sz="1200" b="0" i="1">
-                <a:solidFill>
-                  <a:srgbClr val="1C7293"/>
-                </a:solidFill>
-                <a:latin typeface="Arial"/>
-              </a:rPr>
-              <a:t>Атаки через инструменты (prompt injection, GitHub MCP heist) — 4-й класс провалов, разобран на слайде безопасности. $4 200-петля — single-author постмортем 2026-04 (illustrative); compounding — MindStudio 2025–2026.</a:t>
+              <a:rPr sz="1000" i="1">
+                <a:solidFill>
+                  <a:srgbClr val="5B6678"/>
+                </a:solidFill>
+                <a:latin typeface="Arial"/>
+              </a:rPr>
+              <a:t>33 / 40</a:t>
             </a:r>
           </a:p>
         </p:txBody>
@@ -37512,6 +40991,45 @@
           </a:p>
         </p:txBody>
       </p:sp>
+      <p:sp>
+        <p:nvSpPr>
+          <p:cNvPr id="25" name="TextBox 24"/>
+          <p:cNvSpPr txBox="1"/>
+          <p:nvPr/>
+        </p:nvSpPr>
+        <p:spPr>
+          <a:xfrm>
+            <a:off x="11274552" y="6547104"/>
+            <a:ext cx="868680" cy="256032"/>
+          </a:xfrm>
+          <a:prstGeom prst="rect">
+            <a:avLst/>
+          </a:prstGeom>
+          <a:noFill/>
+        </p:spPr>
+        <p:txBody>
+          <a:bodyPr wrap="none" lIns="0" rIns="0" tIns="0" bIns="0">
+            <a:spAutoFit/>
+          </a:bodyPr>
+          <a:lstStyle/>
+          <a:p>
+            <a:pPr algn="r">
+              <a:lnSpc>
+                <a:spcPct val="100000"/>
+              </a:lnSpc>
+            </a:pPr>
+            <a:r>
+              <a:rPr sz="1000" i="1">
+                <a:solidFill>
+                  <a:srgbClr val="5B6678"/>
+                </a:solidFill>
+                <a:latin typeface="Arial"/>
+              </a:rPr>
+              <a:t>34 / 40</a:t>
+            </a:r>
+          </a:p>
+        </p:txBody>
+      </p:sp>
     </p:spTree>
   </p:cSld>
   <p:clrMapOvr>
@@ -39090,7 +42608,29 @@
                 </a:solidFill>
                 <a:latin typeface="Arial"/>
               </a:rPr>
-              <a:t>Каждый подъём — это ОБМЕН (возможности ↔ стоимость, латентность, аудируемость, поверхность атаки), а не улучшение.</a:t>
+              <a:t>Каждый подъём — это ОБМЕН</a:t>
+            </a:r>
+            <a:r>
+              <a:rPr sz="702" baseline="30000" b="0" i="1">
+                <a:latin typeface="Arial"/>
+                <a:cs typeface="Arial"/>
+                <a:ea typeface="Arial"/>
+                <a:solidFill>
+                  <a:srgbClr val="1C7293"/>
+                </a:solidFill>
+              </a:rPr>
+              <a:t>[1]</a:t>
+            </a:r>
+            <a:r>
+              <a:rPr sz="1350" b="0" i="0">
+                <a:latin typeface="Arial"/>
+                <a:cs typeface="Arial"/>
+                <a:ea typeface="Arial"/>
+                <a:solidFill>
+                  <a:srgbClr val="21295C"/>
+                </a:solidFill>
+              </a:rPr>
+              <a:t> (возможности ↔ стоимость, латентность, аудируемость, поверхность атаки), а не улучшение.</a:t>
             </a:r>
           </a:p>
         </p:txBody>
@@ -39119,17 +42659,75 @@
           <a:p>
             <a:pPr algn="l">
               <a:lnSpc>
+                <a:spcPct val="102000"/>
+              </a:lnSpc>
+            </a:pPr>
+            <a:r>
+              <a:rPr sz="850" b="1" i="1">
+                <a:solidFill>
+                  <a:srgbClr val="065A82"/>
+                </a:solidFill>
+                <a:latin typeface="Arial"/>
+              </a:rPr>
+              <a:t>[1] </a:t>
+            </a:r>
+            <a:r>
+              <a:rPr sz="850" i="1">
+                <a:solidFill>
+                  <a:srgbClr val="1C7293"/>
+                </a:solidFill>
+                <a:latin typeface="Arial"/>
+                <a:hlinkClick r:id="rId4"/>
+              </a:rPr>
+              <a:t>Anthropic — Building Effective Agents (правило лестницы)</a:t>
+            </a:r>
+            <a:r>
+              <a:rPr sz="850" i="1">
+                <a:solidFill>
+                  <a:srgbClr val="5B6678"/>
+                </a:solidFill>
+                <a:latin typeface="Arial"/>
+              </a:rPr>
+              <a:t>   ·   Нижняя ступень — «обычный код без ИИ»: лестница начинается с вопроса «а нужен ли ИИ вообще».</a:t>
+            </a:r>
+          </a:p>
+        </p:txBody>
+      </p:sp>
+      <p:sp>
+        <p:nvSpPr>
+          <p:cNvPr id="41" name="TextBox 40"/>
+          <p:cNvSpPr txBox="1"/>
+          <p:nvPr/>
+        </p:nvSpPr>
+        <p:spPr>
+          <a:xfrm>
+            <a:off x="11274552" y="6547104"/>
+            <a:ext cx="868680" cy="256032"/>
+          </a:xfrm>
+          <a:prstGeom prst="rect">
+            <a:avLst/>
+          </a:prstGeom>
+          <a:noFill/>
+        </p:spPr>
+        <p:txBody>
+          <a:bodyPr wrap="none" lIns="0" rIns="0" tIns="0" bIns="0">
+            <a:spAutoFit/>
+          </a:bodyPr>
+          <a:lstStyle/>
+          <a:p>
+            <a:pPr algn="r">
+              <a:lnSpc>
                 <a:spcPct val="100000"/>
               </a:lnSpc>
             </a:pPr>
             <a:r>
-              <a:rPr sz="1200" b="0" i="1">
-                <a:solidFill>
-                  <a:srgbClr val="1C7293"/>
-                </a:solidFill>
-                <a:latin typeface="Arial"/>
-              </a:rPr>
-              <a:t>Нижняя ступень — «обычный код без ИИ»: лестница начинается с вопроса «а нужен ли ИИ вообще».</a:t>
+              <a:rPr sz="1000" i="1">
+                <a:solidFill>
+                  <a:srgbClr val="5B6678"/>
+                </a:solidFill>
+                <a:latin typeface="Arial"/>
+              </a:rPr>
+              <a:t>35 / 40</a:t>
             </a:r>
           </a:p>
         </p:txBody>
@@ -39225,7 +42823,29 @@
                 </a:solidFill>
                 <a:latin typeface="Arial"/>
               </a:rPr>
-              <a:t>Пройдите задачу сверху вниз; останавливайтесь на первом сработавшем вопросе.</a:t>
+              <a:t>Пройдите задачу сверху вниз; останавливайтесь на первом сработавшем вопросе</a:t>
+            </a:r>
+            <a:r>
+              <a:rPr sz="676" baseline="30000" b="0" i="1">
+                <a:latin typeface="Arial"/>
+                <a:cs typeface="Arial"/>
+                <a:ea typeface="Arial"/>
+                <a:solidFill>
+                  <a:srgbClr val="1C7293"/>
+                </a:solidFill>
+              </a:rPr>
+              <a:t>[1]</a:t>
+            </a:r>
+            <a:r>
+              <a:rPr sz="1300" b="0" i="1">
+                <a:latin typeface="Arial"/>
+                <a:cs typeface="Arial"/>
+                <a:ea typeface="Arial"/>
+                <a:solidFill>
+                  <a:srgbClr val="065A82"/>
+                </a:solidFill>
+              </a:rPr>
+              <a:t>.</a:t>
             </a:r>
           </a:p>
         </p:txBody>
@@ -41992,7 +45612,145 @@
                 </a:solidFill>
                 <a:latin typeface="Arial"/>
               </a:rPr>
-              <a:t>Приоритет маршрута: если задача детерминированная и верифицируемая — обычный код, СТОП здесь. ИИ добавил бы лишь недетерминизм, стоимость, латентность и поверхность для prompt injection.</a:t>
+              <a:t>Приоритет маршрута: если задача детерминированная и верифицируемая — обычный код, СТОП здесь</a:t>
+            </a:r>
+            <a:r>
+              <a:rPr sz="728" baseline="30000" b="0" i="1">
+                <a:latin typeface="Arial"/>
+                <a:cs typeface="Arial"/>
+                <a:ea typeface="Arial"/>
+                <a:solidFill>
+                  <a:srgbClr val="1C7293"/>
+                </a:solidFill>
+              </a:rPr>
+              <a:t>[2]</a:t>
+            </a:r>
+            <a:r>
+              <a:rPr sz="1400" b="1" i="0">
+                <a:latin typeface="Arial"/>
+                <a:cs typeface="Arial"/>
+                <a:ea typeface="Arial"/>
+                <a:solidFill>
+                  <a:srgbClr val="21295C"/>
+                </a:solidFill>
+              </a:rPr>
+              <a:t>. ИИ добавил бы лишь недетерминизм, стоимость, латентность и поверхность для prompt injection.</a:t>
+            </a:r>
+          </a:p>
+        </p:txBody>
+      </p:sp>
+      <p:sp>
+        <p:nvSpPr>
+          <p:cNvPr id="69" name="TextBox 68"/>
+          <p:cNvSpPr txBox="1"/>
+          <p:nvPr/>
+        </p:nvSpPr>
+        <p:spPr>
+          <a:xfrm>
+            <a:off x="502920" y="6419088"/>
+            <a:ext cx="11201400" cy="329184"/>
+          </a:xfrm>
+          <a:prstGeom prst="rect">
+            <a:avLst/>
+          </a:prstGeom>
+          <a:noFill/>
+        </p:spPr>
+        <p:txBody>
+          <a:bodyPr wrap="square" lIns="0" rIns="0" tIns="0" bIns="0" anchor="t">
+            <a:spAutoFit/>
+          </a:bodyPr>
+          <a:lstStyle/>
+          <a:p>
+            <a:pPr algn="l">
+              <a:lnSpc>
+                <a:spcPct val="102000"/>
+              </a:lnSpc>
+            </a:pPr>
+            <a:r>
+              <a:rPr sz="850" b="1" i="1">
+                <a:solidFill>
+                  <a:srgbClr val="065A82"/>
+                </a:solidFill>
+                <a:latin typeface="Arial"/>
+              </a:rPr>
+              <a:t>[1] </a:t>
+            </a:r>
+            <a:r>
+              <a:rPr sz="850" i="1">
+                <a:solidFill>
+                  <a:srgbClr val="1C7293"/>
+                </a:solidFill>
+                <a:latin typeface="Arial"/>
+                <a:hlinkClick r:id="rId3"/>
+              </a:rPr>
+              <a:t>Anthropic — Building Effective Agents (маршрут выбора)</a:t>
+            </a:r>
+            <a:r>
+              <a:rPr sz="850" i="1">
+                <a:solidFill>
+                  <a:srgbClr val="1C7293"/>
+                </a:solidFill>
+                <a:latin typeface="Arial"/>
+              </a:rPr>
+              <a:t>   ·   </a:t>
+            </a:r>
+            <a:r>
+              <a:rPr sz="850" b="1" i="1">
+                <a:solidFill>
+                  <a:srgbClr val="065A82"/>
+                </a:solidFill>
+                <a:latin typeface="Arial"/>
+              </a:rPr>
+              <a:t>[2] </a:t>
+            </a:r>
+            <a:r>
+              <a:rPr sz="850" i="1">
+                <a:solidFill>
+                  <a:srgbClr val="1C7293"/>
+                </a:solidFill>
+                <a:latin typeface="Arial"/>
+                <a:hlinkClick r:id="rId4"/>
+              </a:rPr>
+              <a:t>McCarthy Tétrault — Air Canada (нижняя строка матрицы)</a:t>
+            </a:r>
+          </a:p>
+        </p:txBody>
+      </p:sp>
+      <p:sp>
+        <p:nvSpPr>
+          <p:cNvPr id="70" name="TextBox 69"/>
+          <p:cNvSpPr txBox="1"/>
+          <p:nvPr/>
+        </p:nvSpPr>
+        <p:spPr>
+          <a:xfrm>
+            <a:off x="11274552" y="6547104"/>
+            <a:ext cx="868680" cy="256032"/>
+          </a:xfrm>
+          <a:prstGeom prst="rect">
+            <a:avLst/>
+          </a:prstGeom>
+          <a:noFill/>
+        </p:spPr>
+        <p:txBody>
+          <a:bodyPr wrap="none" lIns="0" rIns="0" tIns="0" bIns="0">
+            <a:spAutoFit/>
+          </a:bodyPr>
+          <a:lstStyle/>
+          <a:p>
+            <a:pPr algn="r">
+              <a:lnSpc>
+                <a:spcPct val="100000"/>
+              </a:lnSpc>
+            </a:pPr>
+            <a:r>
+              <a:rPr sz="1000" i="1">
+                <a:solidFill>
+                  <a:srgbClr val="5B6678"/>
+                </a:solidFill>
+                <a:latin typeface="Arial"/>
+              </a:rPr>
+              <a:t>36 / 40</a:t>
             </a:r>
           </a:p>
         </p:txBody>
@@ -43195,6 +46953,45 @@
           </a:p>
         </p:txBody>
       </p:sp>
+      <p:sp>
+        <p:nvSpPr>
+          <p:cNvPr id="32" name="TextBox 31"/>
+          <p:cNvSpPr txBox="1"/>
+          <p:nvPr/>
+        </p:nvSpPr>
+        <p:spPr>
+          <a:xfrm>
+            <a:off x="11274552" y="6547104"/>
+            <a:ext cx="868680" cy="256032"/>
+          </a:xfrm>
+          <a:prstGeom prst="rect">
+            <a:avLst/>
+          </a:prstGeom>
+          <a:noFill/>
+        </p:spPr>
+        <p:txBody>
+          <a:bodyPr wrap="none" lIns="0" rIns="0" tIns="0" bIns="0">
+            <a:spAutoFit/>
+          </a:bodyPr>
+          <a:lstStyle/>
+          <a:p>
+            <a:pPr algn="r">
+              <a:lnSpc>
+                <a:spcPct val="100000"/>
+              </a:lnSpc>
+            </a:pPr>
+            <a:r>
+              <a:rPr sz="1000" i="1">
+                <a:solidFill>
+                  <a:srgbClr val="5B6678"/>
+                </a:solidFill>
+                <a:latin typeface="Arial"/>
+              </a:rPr>
+              <a:t>37 / 40</a:t>
+            </a:r>
+          </a:p>
+        </p:txBody>
+      </p:sp>
     </p:spTree>
   </p:cSld>
   <p:clrMapOvr>
@@ -43397,7 +47194,29 @@
                 </a:solidFill>
                 <a:latin typeface="Arial"/>
               </a:rPr>
-              <a:t>против независимого источника истины, НЕ по правдоподобности рассуждения (self-rationale ≠ контроль — урок про faithfulness).</a:t>
+              <a:t>против независимого источника истины, НЕ по правдоподобности рассуждения</a:t>
+            </a:r>
+            <a:r>
+              <a:rPr sz="624" baseline="30000" b="0" i="1">
+                <a:latin typeface="Arial"/>
+                <a:cs typeface="Arial"/>
+                <a:ea typeface="Arial"/>
+                <a:solidFill>
+                  <a:srgbClr val="1C7293"/>
+                </a:solidFill>
+              </a:rPr>
+              <a:t>[1]</a:t>
+            </a:r>
+            <a:r>
+              <a:rPr sz="1200" b="0" i="1">
+                <a:latin typeface="Arial"/>
+                <a:cs typeface="Arial"/>
+                <a:ea typeface="Arial"/>
+                <a:solidFill>
+                  <a:srgbClr val="5B6678"/>
+                </a:solidFill>
+              </a:rPr>
+              <a:t> (self-rationale ≠ контроль — урок про faithfulness).</a:t>
             </a:r>
           </a:p>
         </p:txBody>
@@ -43927,6 +47746,17 @@
               </a:rPr>
               <a:t>корпоративных GenAI-пилотов без измеримого возврата инвестиций — корень в разрыве обучения и провале интеграции, не в качестве модели</a:t>
             </a:r>
+            <a:r>
+              <a:rPr sz="650" baseline="30000" b="0" i="1">
+                <a:latin typeface="Arial"/>
+                <a:cs typeface="Arial"/>
+                <a:ea typeface="Arial"/>
+                <a:solidFill>
+                  <a:srgbClr val="1C7293"/>
+                </a:solidFill>
+              </a:rPr>
+              <a:t>[2]</a:t>
+            </a:r>
           </a:p>
         </p:txBody>
       </p:sp>
@@ -44041,17 +47871,103 @@
           <a:p>
             <a:pPr algn="l">
               <a:lnSpc>
+                <a:spcPct val="102000"/>
+              </a:lnSpc>
+            </a:pPr>
+            <a:r>
+              <a:rPr sz="850" b="1" i="1">
+                <a:solidFill>
+                  <a:srgbClr val="065A82"/>
+                </a:solidFill>
+                <a:latin typeface="Arial"/>
+              </a:rPr>
+              <a:t>[1] </a:t>
+            </a:r>
+            <a:r>
+              <a:rPr sz="850" i="1">
+                <a:solidFill>
+                  <a:srgbClr val="1C7293"/>
+                </a:solidFill>
+                <a:latin typeface="Arial"/>
+                <a:hlinkClick r:id="rId5"/>
+              </a:rPr>
+              <a:t>Anthropic — Reasoning Models faithfulness (self-rationale ≠ контроль)</a:t>
+            </a:r>
+            <a:r>
+              <a:rPr sz="850" i="1">
+                <a:solidFill>
+                  <a:srgbClr val="1C7293"/>
+                </a:solidFill>
+                <a:latin typeface="Arial"/>
+              </a:rPr>
+              <a:t>   ·   </a:t>
+            </a:r>
+            <a:r>
+              <a:rPr sz="850" b="1" i="1">
+                <a:solidFill>
+                  <a:srgbClr val="065A82"/>
+                </a:solidFill>
+                <a:latin typeface="Arial"/>
+              </a:rPr>
+              <a:t>[2] </a:t>
+            </a:r>
+            <a:r>
+              <a:rPr sz="850" i="1">
+                <a:solidFill>
+                  <a:srgbClr val="1C7293"/>
+                </a:solidFill>
+                <a:latin typeface="Arial"/>
+                <a:hlinkClick r:id="rId6"/>
+              </a:rPr>
+              <a:t>MIT NANDA — State of AI in Business 2025 (~95% пилотов без ROI)</a:t>
+            </a:r>
+            <a:r>
+              <a:rPr sz="850" i="1">
+                <a:solidFill>
+                  <a:srgbClr val="5B6678"/>
+                </a:solidFill>
+                <a:latin typeface="Arial"/>
+              </a:rPr>
+              <a:t>   ·   MIT NANDA, State of AI in Business 2025 — отчёт с методологией (150 интервью + 350 опрос + 300 внедрений), не универсальный закон.</a:t>
+            </a:r>
+          </a:p>
+        </p:txBody>
+      </p:sp>
+      <p:sp>
+        <p:nvSpPr>
+          <p:cNvPr id="23" name="TextBox 22"/>
+          <p:cNvSpPr txBox="1"/>
+          <p:nvPr/>
+        </p:nvSpPr>
+        <p:spPr>
+          <a:xfrm>
+            <a:off x="11274552" y="6547104"/>
+            <a:ext cx="868680" cy="256032"/>
+          </a:xfrm>
+          <a:prstGeom prst="rect">
+            <a:avLst/>
+          </a:prstGeom>
+          <a:noFill/>
+        </p:spPr>
+        <p:txBody>
+          <a:bodyPr wrap="none" lIns="0" rIns="0" tIns="0" bIns="0">
+            <a:spAutoFit/>
+          </a:bodyPr>
+          <a:lstStyle/>
+          <a:p>
+            <a:pPr algn="r">
+              <a:lnSpc>
                 <a:spcPct val="100000"/>
               </a:lnSpc>
             </a:pPr>
             <a:r>
-              <a:rPr sz="1200" b="0" i="1">
-                <a:solidFill>
-                  <a:srgbClr val="1C7293"/>
-                </a:solidFill>
-                <a:latin typeface="Arial"/>
-              </a:rPr>
-              <a:t>MIT NANDA, State of AI in Business 2025 — отчёт с методологией (150 интервью + 350 опрос + 300 внедрений), не универсальный закон.</a:t>
+              <a:rPr sz="1000" i="1">
+                <a:solidFill>
+                  <a:srgbClr val="5B6678"/>
+                </a:solidFill>
+                <a:latin typeface="Arial"/>
+              </a:rPr>
+              <a:t>38 / 40</a:t>
             </a:r>
           </a:p>
         </p:txBody>
@@ -44685,6 +48601,45 @@
           </a:p>
         </p:txBody>
       </p:sp>
+      <p:sp>
+        <p:nvSpPr>
+          <p:cNvPr id="18" name="TextBox 17"/>
+          <p:cNvSpPr txBox="1"/>
+          <p:nvPr/>
+        </p:nvSpPr>
+        <p:spPr>
+          <a:xfrm>
+            <a:off x="11274552" y="6547104"/>
+            <a:ext cx="868680" cy="256032"/>
+          </a:xfrm>
+          <a:prstGeom prst="rect">
+            <a:avLst/>
+          </a:prstGeom>
+          <a:noFill/>
+        </p:spPr>
+        <p:txBody>
+          <a:bodyPr wrap="none" lIns="0" rIns="0" tIns="0" bIns="0">
+            <a:spAutoFit/>
+          </a:bodyPr>
+          <a:lstStyle/>
+          <a:p>
+            <a:pPr algn="r">
+              <a:lnSpc>
+                <a:spcPct val="100000"/>
+              </a:lnSpc>
+            </a:pPr>
+            <a:r>
+              <a:rPr sz="1000" i="1">
+                <a:solidFill>
+                  <a:srgbClr val="5B6678"/>
+                </a:solidFill>
+                <a:latin typeface="Arial"/>
+              </a:rPr>
+              <a:t>39 / 40</a:t>
+            </a:r>
+          </a:p>
+        </p:txBody>
+      </p:sp>
     </p:spTree>
   </p:cSld>
   <p:clrMapOvr>
@@ -45682,6 +49637,45 @@
                 <a:latin typeface="Arial"/>
               </a:rPr>
               <a:t>Из Лекции 2 берём готовыми: single-shot инференс и семантический поиск на эмбеддингах (основа RAG). Детали каждой обвязки — дальше по разделам.</a:t>
+            </a:r>
+          </a:p>
+        </p:txBody>
+      </p:sp>
+      <p:sp>
+        <p:nvSpPr>
+          <p:cNvPr id="28" name="TextBox 27"/>
+          <p:cNvSpPr txBox="1"/>
+          <p:nvPr/>
+        </p:nvSpPr>
+        <p:spPr>
+          <a:xfrm>
+            <a:off x="11274552" y="6547104"/>
+            <a:ext cx="868680" cy="256032"/>
+          </a:xfrm>
+          <a:prstGeom prst="rect">
+            <a:avLst/>
+          </a:prstGeom>
+          <a:noFill/>
+        </p:spPr>
+        <p:txBody>
+          <a:bodyPr wrap="none" lIns="0" rIns="0" tIns="0" bIns="0">
+            <a:spAutoFit/>
+          </a:bodyPr>
+          <a:lstStyle/>
+          <a:p>
+            <a:pPr algn="r">
+              <a:lnSpc>
+                <a:spcPct val="100000"/>
+              </a:lnSpc>
+            </a:pPr>
+            <a:r>
+              <a:rPr sz="1000" i="1">
+                <a:solidFill>
+                  <a:srgbClr val="5B6678"/>
+                </a:solidFill>
+                <a:latin typeface="Arial"/>
+              </a:rPr>
+              <a:t>4 / 40</a:t>
             </a:r>
           </a:p>
         </p:txBody>
@@ -45829,6 +49823,45 @@
           </a:p>
         </p:txBody>
       </p:sp>
+      <p:sp>
+        <p:nvSpPr>
+          <p:cNvPr id="5" name="TextBox 4"/>
+          <p:cNvSpPr txBox="1"/>
+          <p:nvPr/>
+        </p:nvSpPr>
+        <p:spPr>
+          <a:xfrm>
+            <a:off x="11274552" y="6547104"/>
+            <a:ext cx="868680" cy="256032"/>
+          </a:xfrm>
+          <a:prstGeom prst="rect">
+            <a:avLst/>
+          </a:prstGeom>
+          <a:noFill/>
+        </p:spPr>
+        <p:txBody>
+          <a:bodyPr wrap="none" lIns="0" rIns="0" tIns="0" bIns="0">
+            <a:spAutoFit/>
+          </a:bodyPr>
+          <a:lstStyle/>
+          <a:p>
+            <a:pPr algn="r">
+              <a:lnSpc>
+                <a:spcPct val="100000"/>
+              </a:lnSpc>
+            </a:pPr>
+            <a:r>
+              <a:rPr sz="1000" i="1">
+                <a:solidFill>
+                  <a:srgbClr val="5B6678"/>
+                </a:solidFill>
+                <a:latin typeface="Arial"/>
+              </a:rPr>
+              <a:t>40 / 40</a:t>
+            </a:r>
+          </a:p>
+        </p:txBody>
+      </p:sp>
     </p:spTree>
   </p:cSld>
   <p:clrMapOvr>
@@ -47495,6 +51528,45 @@
                 <a:latin typeface="Arial"/>
               </a:rPr>
               <a:t>Лестница — карта лекции, не требование понять всё сейчас. Каждую ступень разберём отдельно.</a:t>
+            </a:r>
+          </a:p>
+        </p:txBody>
+      </p:sp>
+      <p:sp>
+        <p:nvSpPr>
+          <p:cNvPr id="42" name="TextBox 41"/>
+          <p:cNvSpPr txBox="1"/>
+          <p:nvPr/>
+        </p:nvSpPr>
+        <p:spPr>
+          <a:xfrm>
+            <a:off x="11274552" y="6547104"/>
+            <a:ext cx="868680" cy="256032"/>
+          </a:xfrm>
+          <a:prstGeom prst="rect">
+            <a:avLst/>
+          </a:prstGeom>
+          <a:noFill/>
+        </p:spPr>
+        <p:txBody>
+          <a:bodyPr wrap="none" lIns="0" rIns="0" tIns="0" bIns="0">
+            <a:spAutoFit/>
+          </a:bodyPr>
+          <a:lstStyle/>
+          <a:p>
+            <a:pPr algn="r">
+              <a:lnSpc>
+                <a:spcPct val="100000"/>
+              </a:lnSpc>
+            </a:pPr>
+            <a:r>
+              <a:rPr sz="1000" i="1">
+                <a:solidFill>
+                  <a:srgbClr val="5B6678"/>
+                </a:solidFill>
+                <a:latin typeface="Arial"/>
+              </a:rPr>
+              <a:t>5 / 40</a:t>
             </a:r>
           </a:p>
         </p:txBody>
@@ -48481,6 +52553,45 @@
           </a:p>
         </p:txBody>
       </p:sp>
+      <p:sp>
+        <p:nvSpPr>
+          <p:cNvPr id="25" name="TextBox 24"/>
+          <p:cNvSpPr txBox="1"/>
+          <p:nvPr/>
+        </p:nvSpPr>
+        <p:spPr>
+          <a:xfrm>
+            <a:off x="11274552" y="6547104"/>
+            <a:ext cx="868680" cy="256032"/>
+          </a:xfrm>
+          <a:prstGeom prst="rect">
+            <a:avLst/>
+          </a:prstGeom>
+          <a:noFill/>
+        </p:spPr>
+        <p:txBody>
+          <a:bodyPr wrap="none" lIns="0" rIns="0" tIns="0" bIns="0">
+            <a:spAutoFit/>
+          </a:bodyPr>
+          <a:lstStyle/>
+          <a:p>
+            <a:pPr algn="r">
+              <a:lnSpc>
+                <a:spcPct val="100000"/>
+              </a:lnSpc>
+            </a:pPr>
+            <a:r>
+              <a:rPr sz="1000" i="1">
+                <a:solidFill>
+                  <a:srgbClr val="5B6678"/>
+                </a:solidFill>
+                <a:latin typeface="Arial"/>
+              </a:rPr>
+              <a:t>6 / 40</a:t>
+            </a:r>
+          </a:p>
+        </p:txBody>
+      </p:sp>
     </p:spTree>
   </p:cSld>
   <p:clrMapOvr>
@@ -49320,7 +53431,117 @@
                 </a:solidFill>
                 <a:latin typeface="Arial"/>
               </a:rPr>
-              <a:t>Не усложняй архитектуру без причины, выраженной в требованиях задачи. Это распределение бремени доказательства, а не примитивизм.</a:t>
+              <a:t>Не усложняй архитектуру без причины, выраженной в требованиях задачи</a:t>
+            </a:r>
+            <a:r>
+              <a:rPr sz="780" baseline="30000" b="0" i="1">
+                <a:latin typeface="Arial"/>
+                <a:cs typeface="Arial"/>
+                <a:ea typeface="Arial"/>
+                <a:solidFill>
+                  <a:srgbClr val="1C7293"/>
+                </a:solidFill>
+              </a:rPr>
+              <a:t>[1]</a:t>
+            </a:r>
+            <a:r>
+              <a:rPr sz="1500" b="1" i="0">
+                <a:latin typeface="Arial"/>
+                <a:cs typeface="Arial"/>
+                <a:ea typeface="Arial"/>
+                <a:solidFill>
+                  <a:srgbClr val="21295C"/>
+                </a:solidFill>
+              </a:rPr>
+              <a:t>. Это распределение бремени доказательства, а не примитивизм.</a:t>
+            </a:r>
+          </a:p>
+        </p:txBody>
+      </p:sp>
+      <p:sp>
+        <p:nvSpPr>
+          <p:cNvPr id="22" name="TextBox 21"/>
+          <p:cNvSpPr txBox="1"/>
+          <p:nvPr/>
+        </p:nvSpPr>
+        <p:spPr>
+          <a:xfrm>
+            <a:off x="502920" y="6419088"/>
+            <a:ext cx="11201400" cy="329184"/>
+          </a:xfrm>
+          <a:prstGeom prst="rect">
+            <a:avLst/>
+          </a:prstGeom>
+          <a:noFill/>
+        </p:spPr>
+        <p:txBody>
+          <a:bodyPr wrap="square" lIns="0" rIns="0" tIns="0" bIns="0" anchor="t">
+            <a:spAutoFit/>
+          </a:bodyPr>
+          <a:lstStyle/>
+          <a:p>
+            <a:pPr algn="l">
+              <a:lnSpc>
+                <a:spcPct val="102000"/>
+              </a:lnSpc>
+            </a:pPr>
+            <a:r>
+              <a:rPr sz="850" b="1" i="1">
+                <a:solidFill>
+                  <a:srgbClr val="065A82"/>
+                </a:solidFill>
+                <a:latin typeface="Arial"/>
+              </a:rPr>
+              <a:t>[1] </a:t>
+            </a:r>
+            <a:r>
+              <a:rPr sz="850" i="1">
+                <a:solidFill>
+                  <a:srgbClr val="1C7293"/>
+                </a:solidFill>
+                <a:latin typeface="Arial"/>
+                <a:hlinkClick r:id="rId4"/>
+              </a:rPr>
+              <a:t>Anthropic — Building Effective Agents («найди простейшее»)</a:t>
+            </a:r>
+          </a:p>
+        </p:txBody>
+      </p:sp>
+      <p:sp>
+        <p:nvSpPr>
+          <p:cNvPr id="23" name="TextBox 22"/>
+          <p:cNvSpPr txBox="1"/>
+          <p:nvPr/>
+        </p:nvSpPr>
+        <p:spPr>
+          <a:xfrm>
+            <a:off x="11274552" y="6547104"/>
+            <a:ext cx="868680" cy="256032"/>
+          </a:xfrm>
+          <a:prstGeom prst="rect">
+            <a:avLst/>
+          </a:prstGeom>
+          <a:noFill/>
+        </p:spPr>
+        <p:txBody>
+          <a:bodyPr wrap="none" lIns="0" rIns="0" tIns="0" bIns="0">
+            <a:spAutoFit/>
+          </a:bodyPr>
+          <a:lstStyle/>
+          <a:p>
+            <a:pPr algn="r">
+              <a:lnSpc>
+                <a:spcPct val="100000"/>
+              </a:lnSpc>
+            </a:pPr>
+            <a:r>
+              <a:rPr sz="1000" i="1">
+                <a:solidFill>
+                  <a:srgbClr val="5B6678"/>
+                </a:solidFill>
+                <a:latin typeface="Arial"/>
+              </a:rPr>
+              <a:t>7 / 40</a:t>
             </a:r>
           </a:p>
         </p:txBody>
@@ -49655,7 +53876,29 @@
                 </a:solidFill>
                 <a:latin typeface="Arial"/>
               </a:rPr>
-              <a:t>162 персоны · 6 типов отношений · 8 доменов · 2410 вопросов фактического QA · 4 семейства LLM. Персоны НЕ улучшили точность ответа по сравнению с ответом без персоны вообще.</a:t>
+              <a:t>162 персоны · 6 типов отношений · 8 доменов · 2410 вопросов фактического QA · 4 семейства LLM. Персоны НЕ улучшили точность ответа по сравнению с ответом без персоны вообще</a:t>
+            </a:r>
+            <a:r>
+              <a:rPr sz="728" baseline="30000" b="0" i="1">
+                <a:latin typeface="Arial"/>
+                <a:cs typeface="Arial"/>
+                <a:ea typeface="Arial"/>
+                <a:solidFill>
+                  <a:srgbClr val="1C7293"/>
+                </a:solidFill>
+              </a:rPr>
+              <a:t>[1]</a:t>
+            </a:r>
+            <a:r>
+              <a:rPr sz="1400" b="0" i="0">
+                <a:latin typeface="Arial"/>
+                <a:cs typeface="Arial"/>
+                <a:ea typeface="Arial"/>
+                <a:solidFill>
+                  <a:srgbClr val="21295C"/>
+                </a:solidFill>
+              </a:rPr>
+              <a:t>.</a:t>
             </a:r>
           </a:p>
         </p:txBody>
@@ -49921,17 +54164,75 @@
           <a:p>
             <a:pPr algn="l">
               <a:lnSpc>
+                <a:spcPct val="102000"/>
+              </a:lnSpc>
+            </a:pPr>
+            <a:r>
+              <a:rPr sz="850" b="1" i="1">
+                <a:solidFill>
+                  <a:srgbClr val="065A82"/>
+                </a:solidFill>
+                <a:latin typeface="Arial"/>
+              </a:rPr>
+              <a:t>[1] </a:t>
+            </a:r>
+            <a:r>
+              <a:rPr sz="850" i="1">
+                <a:solidFill>
+                  <a:srgbClr val="1C7293"/>
+                </a:solidFill>
+                <a:latin typeface="Arial"/>
+                <a:hlinkClick r:id="rId4"/>
+              </a:rPr>
+              <a:t>Zheng et al. 2024, Findings of EMNLP — персоны не улучшают точность фактов</a:t>
+            </a:r>
+            <a:r>
+              <a:rPr sz="850" i="1">
+                <a:solidFill>
+                  <a:srgbClr val="5B6678"/>
+                </a:solidFill>
+                <a:latin typeface="Arial"/>
+              </a:rPr>
+              <a:t>   ·   Zheng, Pei, Logeswaran, Lee, Jurgens · Findings of EMNLP 2024 (arXiv:2311.10054) + arXiv:2605.29420 (2026).</a:t>
+            </a:r>
+          </a:p>
+        </p:txBody>
+      </p:sp>
+      <p:sp>
+        <p:nvSpPr>
+          <p:cNvPr id="17" name="TextBox 16"/>
+          <p:cNvSpPr txBox="1"/>
+          <p:nvPr/>
+        </p:nvSpPr>
+        <p:spPr>
+          <a:xfrm>
+            <a:off x="11274552" y="6547104"/>
+            <a:ext cx="868680" cy="256032"/>
+          </a:xfrm>
+          <a:prstGeom prst="rect">
+            <a:avLst/>
+          </a:prstGeom>
+          <a:noFill/>
+        </p:spPr>
+        <p:txBody>
+          <a:bodyPr wrap="none" lIns="0" rIns="0" tIns="0" bIns="0">
+            <a:spAutoFit/>
+          </a:bodyPr>
+          <a:lstStyle/>
+          <a:p>
+            <a:pPr algn="r">
+              <a:lnSpc>
                 <a:spcPct val="100000"/>
               </a:lnSpc>
             </a:pPr>
             <a:r>
-              <a:rPr sz="1200" b="0" i="1">
-                <a:solidFill>
-                  <a:srgbClr val="1C7293"/>
-                </a:solidFill>
-                <a:latin typeface="Arial"/>
-              </a:rPr>
-              <a:t>Zheng, Pei, Logeswaran, Lee, Jurgens · Findings of EMNLP 2024 (arXiv:2311.10054) + arXiv:2605.29420 (2026).</a:t>
+              <a:rPr sz="1000" i="1">
+                <a:solidFill>
+                  <a:srgbClr val="5B6678"/>
+                </a:solidFill>
+                <a:latin typeface="Arial"/>
+              </a:rPr>
+              <a:t>8 / 40</a:t>
             </a:r>
           </a:p>
         </p:txBody>
@@ -51126,6 +55427,45 @@
                 <a:latin typeface="Arial"/>
               </a:rPr>
               <a:t>Модель, которой показали, где кончается инструкция и начинаются данные, реже принимает фрагмент данных за новую команду — та же путаница лежит в основе prompt injection (Раздел 4).</a:t>
+            </a:r>
+          </a:p>
+        </p:txBody>
+      </p:sp>
+      <p:sp>
+        <p:nvSpPr>
+          <p:cNvPr id="31" name="TextBox 30"/>
+          <p:cNvSpPr txBox="1"/>
+          <p:nvPr/>
+        </p:nvSpPr>
+        <p:spPr>
+          <a:xfrm>
+            <a:off x="11274552" y="6547104"/>
+            <a:ext cx="868680" cy="256032"/>
+          </a:xfrm>
+          <a:prstGeom prst="rect">
+            <a:avLst/>
+          </a:prstGeom>
+          <a:noFill/>
+        </p:spPr>
+        <p:txBody>
+          <a:bodyPr wrap="none" lIns="0" rIns="0" tIns="0" bIns="0">
+            <a:spAutoFit/>
+          </a:bodyPr>
+          <a:lstStyle/>
+          <a:p>
+            <a:pPr algn="r">
+              <a:lnSpc>
+                <a:spcPct val="100000"/>
+              </a:lnSpc>
+            </a:pPr>
+            <a:r>
+              <a:rPr sz="1000" i="1">
+                <a:solidFill>
+                  <a:srgbClr val="5B6678"/>
+                </a:solidFill>
+                <a:latin typeface="Arial"/>
+              </a:rPr>
+              <a:t>9 / 40</a:t>
             </a:r>
           </a:p>
         </p:txBody>
